--- a/slides/CSC336-Lecture-31-Common-Web-Attacks-and-Defences.pptx
+++ b/slides/CSC336-Lecture-31-Common-Web-Attacks-and-Defences.pptx
@@ -3904,79 +3904,44 @@
       </p:sp>
       <p:sp>
         <p:nvSpPr>
-          <p:cNvPr id="6" name="Text 4"/>
-          <p:cNvSpPr txBox="1"/>
-          <p:nvPr/>
-        </p:nvSpPr>
-        <p:spPr>
-          <a:xfrm>
-            <a:off x="640080" y="6446520"/>
-            <a:ext cx="8686800" cy="292608"/>
-          </a:xfrm>
-          <a:prstGeom prst="rect">
-            <a:avLst/>
-          </a:prstGeom>
-          <a:noFill/>
-          <a:ln/>
-        </p:spPr>
-        <p:txBody>
-          <a:bodyPr wrap="square" lIns="0" tIns="0" rIns="0" bIns="0" rtlCol="0" anchor="ctr"/>
-          <a:lstStyle/>
-          <a:p>
-            <a:pPr algn="l" indent="0" marL="0">
-              <a:buNone/>
-            </a:pPr>
-            <a:r>
-              <a:rPr lang="en-US" sz="900" dirty="0">
-                <a:solidFill>
-                  <a:srgbClr val="9AA3D8"/>
-                </a:solidFill>
-                <a:latin typeface="Calibri" pitchFamily="34" charset="0"/>
-                <a:ea typeface="Calibri" pitchFamily="34" charset="-122"/>
-                <a:cs typeface="Calibri" pitchFamily="34" charset="-120"/>
-              </a:rPr>
-              <a:t>Usman Akram  •  COMSATS University Islamabad</a:t>
-            </a:r>
-            <a:endParaRPr lang="en-US" sz="900" dirty="0"/>
-          </a:p>
-        </p:txBody>
-      </p:sp>
-      <p:sp>
-        <p:nvSpPr>
-          <p:cNvPr id="7" name="Text 5"/>
-          <p:cNvSpPr txBox="1"/>
-          <p:nvPr/>
-        </p:nvSpPr>
-        <p:spPr>
-          <a:xfrm>
-            <a:off x="11155680" y="6446520"/>
-            <a:ext cx="457200" cy="292608"/>
-          </a:xfrm>
-          <a:prstGeom prst="rect">
-            <a:avLst/>
-          </a:prstGeom>
-          <a:noFill/>
-          <a:ln/>
-        </p:spPr>
-        <p:txBody>
-          <a:bodyPr wrap="square" lIns="0" tIns="0" rIns="0" bIns="0" rtlCol="0" anchor="ctr"/>
-          <a:lstStyle/>
-          <a:p>
-            <a:pPr algn="r" indent="0" marL="0">
-              <a:buNone/>
-            </a:pPr>
-            <a:r>
-              <a:rPr lang="en-US" sz="900" dirty="0">
-                <a:solidFill>
-                  <a:srgbClr val="9AA3D8"/>
-                </a:solidFill>
-                <a:latin typeface="Calibri" pitchFamily="34" charset="0"/>
-                <a:ea typeface="Calibri" pitchFamily="34" charset="-122"/>
-                <a:cs typeface="Calibri" pitchFamily="34" charset="-120"/>
-              </a:rPr>
-              <a:t>1</a:t>
-            </a:r>
-            <a:endParaRPr lang="en-US" sz="900" dirty="0"/>
+          <p:cNvPr id="8" name="cuinotes-footer-mark"/>
+          <p:cNvSpPr txBox="1"/>
+          <p:nvPr/>
+        </p:nvSpPr>
+        <p:spPr>
+          <a:xfrm>
+            <a:off x="9951720" y="6455664"/>
+            <a:ext cx="2011680" cy="292608"/>
+          </a:xfrm>
+          <a:prstGeom prst="rect">
+            <a:avLst/>
+          </a:prstGeom>
+          <a:noFill/>
+        </p:spPr>
+        <p:txBody>
+          <a:bodyPr wrap="none" lIns="0" rIns="0" tIns="0" bIns="0">
+            <a:spAutoFit/>
+          </a:bodyPr>
+          <a:lstStyle/>
+          <a:p>
+            <a:pPr algn="r"/>
+            <a:r>
+              <a:rPr sz="1000">
+                <a:solidFill>
+                  <a:srgbClr val="8A939B"/>
+                </a:solidFill>
+                <a:hlinkClick r:id="rId3"/>
+              </a:rPr>
+              <a:t>cuinotes.com</a:t>
+            </a:r>
+            <a:r>
+              <a:rPr sz="1000">
+                <a:solidFill>
+                  <a:srgbClr val="8A939B"/>
+                </a:solidFill>
+              </a:rPr>
+              <a:t>  ·  1</a:t>
+            </a:r>
           </a:p>
         </p:txBody>
       </p:sp>
@@ -4109,6 +4074,10 @@
           </a:solidFill>
           <a:ln/>
         </p:spPr>
+        <p:txBody>
+          <a:bodyPr/>
+          <a:p/>
+        </p:txBody>
       </p:sp>
       <p:sp>
         <p:nvSpPr>
@@ -4207,6 +4176,10 @@
           </a:solidFill>
           <a:ln/>
         </p:spPr>
+        <p:txBody>
+          <a:bodyPr/>
+          <a:p/>
+        </p:txBody>
       </p:sp>
       <p:sp>
         <p:nvSpPr>
@@ -4305,6 +4278,10 @@
           </a:solidFill>
           <a:ln/>
         </p:spPr>
+        <p:txBody>
+          <a:bodyPr/>
+          <a:p/>
+        </p:txBody>
       </p:sp>
       <p:sp>
         <p:nvSpPr>
@@ -4386,79 +4363,44 @@
       </p:sp>
       <p:sp>
         <p:nvSpPr>
-          <p:cNvPr id="13" name="Text 11"/>
-          <p:cNvSpPr txBox="1"/>
-          <p:nvPr/>
-        </p:nvSpPr>
-        <p:spPr>
-          <a:xfrm>
-            <a:off x="640080" y="6446520"/>
-            <a:ext cx="8686800" cy="292608"/>
-          </a:xfrm>
-          <a:prstGeom prst="rect">
-            <a:avLst/>
-          </a:prstGeom>
-          <a:noFill/>
-          <a:ln/>
-        </p:spPr>
-        <p:txBody>
-          <a:bodyPr wrap="square" lIns="0" tIns="0" rIns="0" bIns="0" rtlCol="0" anchor="ctr"/>
-          <a:lstStyle/>
-          <a:p>
-            <a:pPr algn="l" indent="0" marL="0">
-              <a:buNone/>
-            </a:pPr>
-            <a:r>
-              <a:rPr lang="en-US" sz="900" dirty="0">
-                <a:solidFill>
-                  <a:srgbClr val="5D5D72"/>
-                </a:solidFill>
-                <a:latin typeface="Calibri" pitchFamily="34" charset="0"/>
-                <a:ea typeface="Calibri" pitchFamily="34" charset="-122"/>
-                <a:cs typeface="Calibri" pitchFamily="34" charset="-120"/>
-              </a:rPr>
-              <a:t>Usman Akram  •  COMSATS University Islamabad</a:t>
-            </a:r>
-            <a:endParaRPr lang="en-US" sz="900" dirty="0"/>
-          </a:p>
-        </p:txBody>
-      </p:sp>
-      <p:sp>
-        <p:nvSpPr>
-          <p:cNvPr id="14" name="Text 12"/>
-          <p:cNvSpPr txBox="1"/>
-          <p:nvPr/>
-        </p:nvSpPr>
-        <p:spPr>
-          <a:xfrm>
-            <a:off x="11155680" y="6446520"/>
-            <a:ext cx="457200" cy="292608"/>
-          </a:xfrm>
-          <a:prstGeom prst="rect">
-            <a:avLst/>
-          </a:prstGeom>
-          <a:noFill/>
-          <a:ln/>
-        </p:spPr>
-        <p:txBody>
-          <a:bodyPr wrap="square" lIns="0" tIns="0" rIns="0" bIns="0" rtlCol="0" anchor="ctr"/>
-          <a:lstStyle/>
-          <a:p>
-            <a:pPr algn="r" indent="0" marL="0">
-              <a:buNone/>
-            </a:pPr>
-            <a:r>
-              <a:rPr lang="en-US" sz="900" dirty="0">
-                <a:solidFill>
-                  <a:srgbClr val="5D5D72"/>
-                </a:solidFill>
-                <a:latin typeface="Calibri" pitchFamily="34" charset="0"/>
-                <a:ea typeface="Calibri" pitchFamily="34" charset="-122"/>
-                <a:cs typeface="Calibri" pitchFamily="34" charset="-120"/>
-              </a:rPr>
-              <a:t>10</a:t>
-            </a:r>
-            <a:endParaRPr lang="en-US" sz="900" dirty="0"/>
+          <p:cNvPr id="15" name="cuinotes-footer-mark"/>
+          <p:cNvSpPr txBox="1"/>
+          <p:nvPr/>
+        </p:nvSpPr>
+        <p:spPr>
+          <a:xfrm>
+            <a:off x="9951720" y="6455664"/>
+            <a:ext cx="2011680" cy="292608"/>
+          </a:xfrm>
+          <a:prstGeom prst="rect">
+            <a:avLst/>
+          </a:prstGeom>
+          <a:noFill/>
+        </p:spPr>
+        <p:txBody>
+          <a:bodyPr wrap="none" lIns="0" rIns="0" tIns="0" bIns="0">
+            <a:spAutoFit/>
+          </a:bodyPr>
+          <a:lstStyle/>
+          <a:p>
+            <a:pPr algn="r"/>
+            <a:r>
+              <a:rPr sz="1000">
+                <a:solidFill>
+                  <a:srgbClr val="8A939B"/>
+                </a:solidFill>
+                <a:hlinkClick r:id="rId3"/>
+              </a:rPr>
+              <a:t>cuinotes.com</a:t>
+            </a:r>
+            <a:r>
+              <a:rPr sz="1000">
+                <a:solidFill>
+                  <a:srgbClr val="8A939B"/>
+                </a:solidFill>
+              </a:rPr>
+              <a:t>  ·  10</a:t>
+            </a:r>
           </a:p>
         </p:txBody>
       </p:sp>
@@ -4591,6 +4533,10 @@
           </a:solidFill>
           <a:ln/>
         </p:spPr>
+        <p:txBody>
+          <a:bodyPr/>
+          <a:p/>
+        </p:txBody>
       </p:sp>
       <p:sp>
         <p:nvSpPr>
@@ -4689,6 +4635,10 @@
           </a:solidFill>
           <a:ln/>
         </p:spPr>
+        <p:txBody>
+          <a:bodyPr/>
+          <a:p/>
+        </p:txBody>
       </p:sp>
       <p:sp>
         <p:nvSpPr>
@@ -4787,6 +4737,10 @@
           </a:solidFill>
           <a:ln/>
         </p:spPr>
+        <p:txBody>
+          <a:bodyPr/>
+          <a:p/>
+        </p:txBody>
       </p:sp>
       <p:sp>
         <p:nvSpPr>
@@ -4868,79 +4822,44 @@
       </p:sp>
       <p:sp>
         <p:nvSpPr>
-          <p:cNvPr id="13" name="Text 11"/>
-          <p:cNvSpPr txBox="1"/>
-          <p:nvPr/>
-        </p:nvSpPr>
-        <p:spPr>
-          <a:xfrm>
-            <a:off x="640080" y="6446520"/>
-            <a:ext cx="8686800" cy="292608"/>
-          </a:xfrm>
-          <a:prstGeom prst="rect">
-            <a:avLst/>
-          </a:prstGeom>
-          <a:noFill/>
-          <a:ln/>
-        </p:spPr>
-        <p:txBody>
-          <a:bodyPr wrap="square" lIns="0" tIns="0" rIns="0" bIns="0" rtlCol="0" anchor="ctr"/>
-          <a:lstStyle/>
-          <a:p>
-            <a:pPr algn="l" indent="0" marL="0">
-              <a:buNone/>
-            </a:pPr>
-            <a:r>
-              <a:rPr lang="en-US" sz="900" dirty="0">
-                <a:solidFill>
-                  <a:srgbClr val="5D5D72"/>
-                </a:solidFill>
-                <a:latin typeface="Calibri" pitchFamily="34" charset="0"/>
-                <a:ea typeface="Calibri" pitchFamily="34" charset="-122"/>
-                <a:cs typeface="Calibri" pitchFamily="34" charset="-120"/>
-              </a:rPr>
-              <a:t>Usman Akram  •  COMSATS University Islamabad</a:t>
-            </a:r>
-            <a:endParaRPr lang="en-US" sz="900" dirty="0"/>
-          </a:p>
-        </p:txBody>
-      </p:sp>
-      <p:sp>
-        <p:nvSpPr>
-          <p:cNvPr id="14" name="Text 12"/>
-          <p:cNvSpPr txBox="1"/>
-          <p:nvPr/>
-        </p:nvSpPr>
-        <p:spPr>
-          <a:xfrm>
-            <a:off x="11155680" y="6446520"/>
-            <a:ext cx="457200" cy="292608"/>
-          </a:xfrm>
-          <a:prstGeom prst="rect">
-            <a:avLst/>
-          </a:prstGeom>
-          <a:noFill/>
-          <a:ln/>
-        </p:spPr>
-        <p:txBody>
-          <a:bodyPr wrap="square" lIns="0" tIns="0" rIns="0" bIns="0" rtlCol="0" anchor="ctr"/>
-          <a:lstStyle/>
-          <a:p>
-            <a:pPr algn="r" indent="0" marL="0">
-              <a:buNone/>
-            </a:pPr>
-            <a:r>
-              <a:rPr lang="en-US" sz="900" dirty="0">
-                <a:solidFill>
-                  <a:srgbClr val="5D5D72"/>
-                </a:solidFill>
-                <a:latin typeface="Calibri" pitchFamily="34" charset="0"/>
-                <a:ea typeface="Calibri" pitchFamily="34" charset="-122"/>
-                <a:cs typeface="Calibri" pitchFamily="34" charset="-120"/>
-              </a:rPr>
-              <a:t>11</a:t>
-            </a:r>
-            <a:endParaRPr lang="en-US" sz="900" dirty="0"/>
+          <p:cNvPr id="15" name="cuinotes-footer-mark"/>
+          <p:cNvSpPr txBox="1"/>
+          <p:nvPr/>
+        </p:nvSpPr>
+        <p:spPr>
+          <a:xfrm>
+            <a:off x="9951720" y="6455664"/>
+            <a:ext cx="2011680" cy="292608"/>
+          </a:xfrm>
+          <a:prstGeom prst="rect">
+            <a:avLst/>
+          </a:prstGeom>
+          <a:noFill/>
+        </p:spPr>
+        <p:txBody>
+          <a:bodyPr wrap="none" lIns="0" rIns="0" tIns="0" bIns="0">
+            <a:spAutoFit/>
+          </a:bodyPr>
+          <a:lstStyle/>
+          <a:p>
+            <a:pPr algn="r"/>
+            <a:r>
+              <a:rPr sz="1000">
+                <a:solidFill>
+                  <a:srgbClr val="8A939B"/>
+                </a:solidFill>
+                <a:hlinkClick r:id="rId3"/>
+              </a:rPr>
+              <a:t>cuinotes.com</a:t>
+            </a:r>
+            <a:r>
+              <a:rPr sz="1000">
+                <a:solidFill>
+                  <a:srgbClr val="8A939B"/>
+                </a:solidFill>
+              </a:rPr>
+              <a:t>  ·  11</a:t>
+            </a:r>
           </a:p>
         </p:txBody>
       </p:sp>
@@ -5075,6 +4994,10 @@
           </a:solidFill>
           <a:ln/>
         </p:spPr>
+        <p:txBody>
+          <a:bodyPr/>
+          <a:p/>
+        </p:txBody>
       </p:sp>
       <p:sp>
         <p:nvSpPr>
@@ -5155,6 +5078,10 @@
             <a:tailEnd type="triangle"/>
           </a:ln>
         </p:spPr>
+        <p:txBody>
+          <a:bodyPr/>
+          <a:p/>
+        </p:txBody>
       </p:sp>
       <p:sp>
         <p:nvSpPr>
@@ -5177,6 +5104,10 @@
           </a:solidFill>
           <a:ln/>
         </p:spPr>
+        <p:txBody>
+          <a:bodyPr/>
+          <a:p/>
+        </p:txBody>
       </p:sp>
       <p:sp>
         <p:nvSpPr>
@@ -5257,6 +5188,10 @@
             <a:tailEnd type="triangle"/>
           </a:ln>
         </p:spPr>
+        <p:txBody>
+          <a:bodyPr/>
+          <a:p/>
+        </p:txBody>
       </p:sp>
       <p:sp>
         <p:nvSpPr>
@@ -5279,6 +5214,10 @@
           </a:solidFill>
           <a:ln/>
         </p:spPr>
+        <p:txBody>
+          <a:bodyPr/>
+          <a:p/>
+        </p:txBody>
       </p:sp>
       <p:sp>
         <p:nvSpPr>
@@ -5359,6 +5298,10 @@
             <a:tailEnd type="triangle"/>
           </a:ln>
         </p:spPr>
+        <p:txBody>
+          <a:bodyPr/>
+          <a:p/>
+        </p:txBody>
       </p:sp>
       <p:sp>
         <p:nvSpPr>
@@ -5381,6 +5324,10 @@
           </a:solidFill>
           <a:ln/>
         </p:spPr>
+        <p:txBody>
+          <a:bodyPr/>
+          <a:p/>
+        </p:txBody>
       </p:sp>
       <p:sp>
         <p:nvSpPr>
@@ -5461,6 +5408,10 @@
             <a:tailEnd type="triangle"/>
           </a:ln>
         </p:spPr>
+        <p:txBody>
+          <a:bodyPr/>
+          <a:p/>
+        </p:txBody>
       </p:sp>
       <p:sp>
         <p:nvSpPr>
@@ -5483,6 +5434,10 @@
           </a:solidFill>
           <a:ln/>
         </p:spPr>
+        <p:txBody>
+          <a:bodyPr/>
+          <a:p/>
+        </p:txBody>
       </p:sp>
       <p:sp>
         <p:nvSpPr>
@@ -5581,79 +5536,44 @@
       </p:sp>
       <p:sp>
         <p:nvSpPr>
-          <p:cNvPr id="19" name="Text 17"/>
-          <p:cNvSpPr txBox="1"/>
-          <p:nvPr/>
-        </p:nvSpPr>
-        <p:spPr>
-          <a:xfrm>
-            <a:off x="640080" y="6446520"/>
-            <a:ext cx="8686800" cy="292608"/>
-          </a:xfrm>
-          <a:prstGeom prst="rect">
-            <a:avLst/>
-          </a:prstGeom>
-          <a:noFill/>
-          <a:ln/>
-        </p:spPr>
-        <p:txBody>
-          <a:bodyPr wrap="square" lIns="0" tIns="0" rIns="0" bIns="0" rtlCol="0" anchor="ctr"/>
-          <a:lstStyle/>
-          <a:p>
-            <a:pPr algn="l" indent="0" marL="0">
-              <a:buNone/>
-            </a:pPr>
-            <a:r>
-              <a:rPr lang="en-US" sz="900" dirty="0">
-                <a:solidFill>
-                  <a:srgbClr val="5D5D72"/>
-                </a:solidFill>
-                <a:latin typeface="Calibri" pitchFamily="34" charset="0"/>
-                <a:ea typeface="Calibri" pitchFamily="34" charset="-122"/>
-                <a:cs typeface="Calibri" pitchFamily="34" charset="-120"/>
-              </a:rPr>
-              <a:t>Usman Akram  •  COMSATS University Islamabad</a:t>
-            </a:r>
-            <a:endParaRPr lang="en-US" sz="900" dirty="0"/>
-          </a:p>
-        </p:txBody>
-      </p:sp>
-      <p:sp>
-        <p:nvSpPr>
-          <p:cNvPr id="20" name="Text 18"/>
-          <p:cNvSpPr txBox="1"/>
-          <p:nvPr/>
-        </p:nvSpPr>
-        <p:spPr>
-          <a:xfrm>
-            <a:off x="11155680" y="6446520"/>
-            <a:ext cx="457200" cy="292608"/>
-          </a:xfrm>
-          <a:prstGeom prst="rect">
-            <a:avLst/>
-          </a:prstGeom>
-          <a:noFill/>
-          <a:ln/>
-        </p:spPr>
-        <p:txBody>
-          <a:bodyPr wrap="square" lIns="0" tIns="0" rIns="0" bIns="0" rtlCol="0" anchor="ctr"/>
-          <a:lstStyle/>
-          <a:p>
-            <a:pPr algn="r" indent="0" marL="0">
-              <a:buNone/>
-            </a:pPr>
-            <a:r>
-              <a:rPr lang="en-US" sz="900" dirty="0">
-                <a:solidFill>
-                  <a:srgbClr val="5D5D72"/>
-                </a:solidFill>
-                <a:latin typeface="Calibri" pitchFamily="34" charset="0"/>
-                <a:ea typeface="Calibri" pitchFamily="34" charset="-122"/>
-                <a:cs typeface="Calibri" pitchFamily="34" charset="-120"/>
-              </a:rPr>
-              <a:t>12</a:t>
-            </a:r>
-            <a:endParaRPr lang="en-US" sz="900" dirty="0"/>
+          <p:cNvPr id="21" name="cuinotes-footer-mark"/>
+          <p:cNvSpPr txBox="1"/>
+          <p:nvPr/>
+        </p:nvSpPr>
+        <p:spPr>
+          <a:xfrm>
+            <a:off x="9951720" y="6455664"/>
+            <a:ext cx="2011680" cy="292608"/>
+          </a:xfrm>
+          <a:prstGeom prst="rect">
+            <a:avLst/>
+          </a:prstGeom>
+          <a:noFill/>
+        </p:spPr>
+        <p:txBody>
+          <a:bodyPr wrap="none" lIns="0" rIns="0" tIns="0" bIns="0">
+            <a:spAutoFit/>
+          </a:bodyPr>
+          <a:lstStyle/>
+          <a:p>
+            <a:pPr algn="r"/>
+            <a:r>
+              <a:rPr sz="1000">
+                <a:solidFill>
+                  <a:srgbClr val="8A939B"/>
+                </a:solidFill>
+                <a:hlinkClick r:id="rId3"/>
+              </a:rPr>
+              <a:t>cuinotes.com</a:t>
+            </a:r>
+            <a:r>
+              <a:rPr sz="1000">
+                <a:solidFill>
+                  <a:srgbClr val="8A939B"/>
+                </a:solidFill>
+              </a:rPr>
+              <a:t>  ·  12</a:t>
+            </a:r>
           </a:p>
         </p:txBody>
       </p:sp>
@@ -5839,6 +5759,10 @@
             </a:outerShdw>
           </a:effectLst>
         </p:spPr>
+        <p:txBody>
+          <a:bodyPr/>
+          <a:p/>
+        </p:txBody>
       </p:sp>
       <p:pic>
         <p:nvPicPr>
@@ -5936,6 +5860,10 @@
             </a:outerShdw>
           </a:effectLst>
         </p:spPr>
+        <p:txBody>
+          <a:bodyPr/>
+          <a:p/>
+        </p:txBody>
       </p:sp>
       <p:pic>
         <p:nvPicPr>
@@ -5963,79 +5891,44 @@
       </p:pic>
       <p:sp>
         <p:nvSpPr>
-          <p:cNvPr id="10" name="Text 6"/>
-          <p:cNvSpPr txBox="1"/>
-          <p:nvPr/>
-        </p:nvSpPr>
-        <p:spPr>
-          <a:xfrm>
-            <a:off x="640080" y="6446520"/>
-            <a:ext cx="8686800" cy="292608"/>
-          </a:xfrm>
-          <a:prstGeom prst="rect">
-            <a:avLst/>
-          </a:prstGeom>
-          <a:noFill/>
-          <a:ln/>
-        </p:spPr>
-        <p:txBody>
-          <a:bodyPr wrap="square" lIns="0" tIns="0" rIns="0" bIns="0" rtlCol="0" anchor="ctr"/>
-          <a:lstStyle/>
-          <a:p>
-            <a:pPr algn="l" indent="0" marL="0">
-              <a:buNone/>
-            </a:pPr>
-            <a:r>
-              <a:rPr lang="en-US" sz="900" dirty="0">
-                <a:solidFill>
-                  <a:srgbClr val="5D5D72"/>
-                </a:solidFill>
-                <a:latin typeface="Calibri" pitchFamily="34" charset="0"/>
-                <a:ea typeface="Calibri" pitchFamily="34" charset="-122"/>
-                <a:cs typeface="Calibri" pitchFamily="34" charset="-120"/>
-              </a:rPr>
-              <a:t>Usman Akram  •  COMSATS University Islamabad</a:t>
-            </a:r>
-            <a:endParaRPr lang="en-US" sz="900" dirty="0"/>
-          </a:p>
-        </p:txBody>
-      </p:sp>
-      <p:sp>
-        <p:nvSpPr>
-          <p:cNvPr id="11" name="Text 7"/>
-          <p:cNvSpPr txBox="1"/>
-          <p:nvPr/>
-        </p:nvSpPr>
-        <p:spPr>
-          <a:xfrm>
-            <a:off x="11155680" y="6446520"/>
-            <a:ext cx="457200" cy="292608"/>
-          </a:xfrm>
-          <a:prstGeom prst="rect">
-            <a:avLst/>
-          </a:prstGeom>
-          <a:noFill/>
-          <a:ln/>
-        </p:spPr>
-        <p:txBody>
-          <a:bodyPr wrap="square" lIns="0" tIns="0" rIns="0" bIns="0" rtlCol="0" anchor="ctr"/>
-          <a:lstStyle/>
-          <a:p>
-            <a:pPr algn="r" indent="0" marL="0">
-              <a:buNone/>
-            </a:pPr>
-            <a:r>
-              <a:rPr lang="en-US" sz="900" dirty="0">
-                <a:solidFill>
-                  <a:srgbClr val="5D5D72"/>
-                </a:solidFill>
-                <a:latin typeface="Calibri" pitchFamily="34" charset="0"/>
-                <a:ea typeface="Calibri" pitchFamily="34" charset="-122"/>
-                <a:cs typeface="Calibri" pitchFamily="34" charset="-120"/>
-              </a:rPr>
-              <a:t>13</a:t>
-            </a:r>
-            <a:endParaRPr lang="en-US" sz="900" dirty="0"/>
+          <p:cNvPr id="12" name="cuinotes-footer-mark"/>
+          <p:cNvSpPr txBox="1"/>
+          <p:nvPr/>
+        </p:nvSpPr>
+        <p:spPr>
+          <a:xfrm>
+            <a:off x="9951720" y="6455664"/>
+            <a:ext cx="2011680" cy="292608"/>
+          </a:xfrm>
+          <a:prstGeom prst="rect">
+            <a:avLst/>
+          </a:prstGeom>
+          <a:noFill/>
+        </p:spPr>
+        <p:txBody>
+          <a:bodyPr wrap="none" lIns="0" rIns="0" tIns="0" bIns="0">
+            <a:spAutoFit/>
+          </a:bodyPr>
+          <a:lstStyle/>
+          <a:p>
+            <a:pPr algn="r"/>
+            <a:r>
+              <a:rPr sz="1000">
+                <a:solidFill>
+                  <a:srgbClr val="8A939B"/>
+                </a:solidFill>
+                <a:hlinkClick r:id="rId5"/>
+              </a:rPr>
+              <a:t>cuinotes.com</a:t>
+            </a:r>
+            <a:r>
+              <a:rPr sz="1000">
+                <a:solidFill>
+                  <a:srgbClr val="8A939B"/>
+                </a:solidFill>
+              </a:rPr>
+              <a:t>  ·  13</a:t>
+            </a:r>
           </a:p>
         </p:txBody>
       </p:sp>
@@ -6168,6 +6061,10 @@
           </a:solidFill>
           <a:ln/>
         </p:spPr>
+        <p:txBody>
+          <a:bodyPr/>
+          <a:p/>
+        </p:txBody>
       </p:sp>
       <p:sp>
         <p:nvSpPr>
@@ -6266,6 +6163,10 @@
           </a:solidFill>
           <a:ln/>
         </p:spPr>
+        <p:txBody>
+          <a:bodyPr/>
+          <a:p/>
+        </p:txBody>
       </p:sp>
       <p:sp>
         <p:nvSpPr>
@@ -6364,6 +6265,10 @@
           </a:solidFill>
           <a:ln/>
         </p:spPr>
+        <p:txBody>
+          <a:bodyPr/>
+          <a:p/>
+        </p:txBody>
       </p:sp>
       <p:sp>
         <p:nvSpPr>
@@ -6445,79 +6350,44 @@
       </p:sp>
       <p:sp>
         <p:nvSpPr>
-          <p:cNvPr id="13" name="Text 11"/>
-          <p:cNvSpPr txBox="1"/>
-          <p:nvPr/>
-        </p:nvSpPr>
-        <p:spPr>
-          <a:xfrm>
-            <a:off x="640080" y="6446520"/>
-            <a:ext cx="8686800" cy="292608"/>
-          </a:xfrm>
-          <a:prstGeom prst="rect">
-            <a:avLst/>
-          </a:prstGeom>
-          <a:noFill/>
-          <a:ln/>
-        </p:spPr>
-        <p:txBody>
-          <a:bodyPr wrap="square" lIns="0" tIns="0" rIns="0" bIns="0" rtlCol="0" anchor="ctr"/>
-          <a:lstStyle/>
-          <a:p>
-            <a:pPr algn="l" indent="0" marL="0">
-              <a:buNone/>
-            </a:pPr>
-            <a:r>
-              <a:rPr lang="en-US" sz="900" dirty="0">
-                <a:solidFill>
-                  <a:srgbClr val="5D5D72"/>
-                </a:solidFill>
-                <a:latin typeface="Calibri" pitchFamily="34" charset="0"/>
-                <a:ea typeface="Calibri" pitchFamily="34" charset="-122"/>
-                <a:cs typeface="Calibri" pitchFamily="34" charset="-120"/>
-              </a:rPr>
-              <a:t>Usman Akram  •  COMSATS University Islamabad</a:t>
-            </a:r>
-            <a:endParaRPr lang="en-US" sz="900" dirty="0"/>
-          </a:p>
-        </p:txBody>
-      </p:sp>
-      <p:sp>
-        <p:nvSpPr>
-          <p:cNvPr id="14" name="Text 12"/>
-          <p:cNvSpPr txBox="1"/>
-          <p:nvPr/>
-        </p:nvSpPr>
-        <p:spPr>
-          <a:xfrm>
-            <a:off x="11155680" y="6446520"/>
-            <a:ext cx="457200" cy="292608"/>
-          </a:xfrm>
-          <a:prstGeom prst="rect">
-            <a:avLst/>
-          </a:prstGeom>
-          <a:noFill/>
-          <a:ln/>
-        </p:spPr>
-        <p:txBody>
-          <a:bodyPr wrap="square" lIns="0" tIns="0" rIns="0" bIns="0" rtlCol="0" anchor="ctr"/>
-          <a:lstStyle/>
-          <a:p>
-            <a:pPr algn="r" indent="0" marL="0">
-              <a:buNone/>
-            </a:pPr>
-            <a:r>
-              <a:rPr lang="en-US" sz="900" dirty="0">
-                <a:solidFill>
-                  <a:srgbClr val="5D5D72"/>
-                </a:solidFill>
-                <a:latin typeface="Calibri" pitchFamily="34" charset="0"/>
-                <a:ea typeface="Calibri" pitchFamily="34" charset="-122"/>
-                <a:cs typeface="Calibri" pitchFamily="34" charset="-120"/>
-              </a:rPr>
-              <a:t>14</a:t>
-            </a:r>
-            <a:endParaRPr lang="en-US" sz="900" dirty="0"/>
+          <p:cNvPr id="15" name="cuinotes-footer-mark"/>
+          <p:cNvSpPr txBox="1"/>
+          <p:nvPr/>
+        </p:nvSpPr>
+        <p:spPr>
+          <a:xfrm>
+            <a:off x="9951720" y="6455664"/>
+            <a:ext cx="2011680" cy="292608"/>
+          </a:xfrm>
+          <a:prstGeom prst="rect">
+            <a:avLst/>
+          </a:prstGeom>
+          <a:noFill/>
+        </p:spPr>
+        <p:txBody>
+          <a:bodyPr wrap="none" lIns="0" rIns="0" tIns="0" bIns="0">
+            <a:spAutoFit/>
+          </a:bodyPr>
+          <a:lstStyle/>
+          <a:p>
+            <a:pPr algn="r"/>
+            <a:r>
+              <a:rPr sz="1000">
+                <a:solidFill>
+                  <a:srgbClr val="8A939B"/>
+                </a:solidFill>
+                <a:hlinkClick r:id="rId3"/>
+              </a:rPr>
+              <a:t>cuinotes.com</a:t>
+            </a:r>
+            <a:r>
+              <a:rPr sz="1000">
+                <a:solidFill>
+                  <a:srgbClr val="8A939B"/>
+                </a:solidFill>
+              </a:rPr>
+              <a:t>  ·  14</a:t>
+            </a:r>
           </a:p>
         </p:txBody>
       </p:sp>
@@ -6652,6 +6522,10 @@
           </a:solidFill>
           <a:ln/>
         </p:spPr>
+        <p:txBody>
+          <a:bodyPr/>
+          <a:p/>
+        </p:txBody>
       </p:sp>
       <p:sp>
         <p:nvSpPr>
@@ -6816,79 +6690,44 @@
       </p:sp>
       <p:sp>
         <p:nvSpPr>
-          <p:cNvPr id="7" name="Text 5"/>
-          <p:cNvSpPr txBox="1"/>
-          <p:nvPr/>
-        </p:nvSpPr>
-        <p:spPr>
-          <a:xfrm>
-            <a:off x="640080" y="6446520"/>
-            <a:ext cx="8686800" cy="292608"/>
-          </a:xfrm>
-          <a:prstGeom prst="rect">
-            <a:avLst/>
-          </a:prstGeom>
-          <a:noFill/>
-          <a:ln/>
-        </p:spPr>
-        <p:txBody>
-          <a:bodyPr wrap="square" lIns="0" tIns="0" rIns="0" bIns="0" rtlCol="0" anchor="ctr"/>
-          <a:lstStyle/>
-          <a:p>
-            <a:pPr algn="l" indent="0" marL="0">
-              <a:buNone/>
-            </a:pPr>
-            <a:r>
-              <a:rPr lang="en-US" sz="900" dirty="0">
-                <a:solidFill>
-                  <a:srgbClr val="5D5D72"/>
-                </a:solidFill>
-                <a:latin typeface="Calibri" pitchFamily="34" charset="0"/>
-                <a:ea typeface="Calibri" pitchFamily="34" charset="-122"/>
-                <a:cs typeface="Calibri" pitchFamily="34" charset="-120"/>
-              </a:rPr>
-              <a:t>Usman Akram  •  COMSATS University Islamabad</a:t>
-            </a:r>
-            <a:endParaRPr lang="en-US" sz="900" dirty="0"/>
-          </a:p>
-        </p:txBody>
-      </p:sp>
-      <p:sp>
-        <p:nvSpPr>
-          <p:cNvPr id="8" name="Text 6"/>
-          <p:cNvSpPr txBox="1"/>
-          <p:nvPr/>
-        </p:nvSpPr>
-        <p:spPr>
-          <a:xfrm>
-            <a:off x="11155680" y="6446520"/>
-            <a:ext cx="457200" cy="292608"/>
-          </a:xfrm>
-          <a:prstGeom prst="rect">
-            <a:avLst/>
-          </a:prstGeom>
-          <a:noFill/>
-          <a:ln/>
-        </p:spPr>
-        <p:txBody>
-          <a:bodyPr wrap="square" lIns="0" tIns="0" rIns="0" bIns="0" rtlCol="0" anchor="ctr"/>
-          <a:lstStyle/>
-          <a:p>
-            <a:pPr algn="r" indent="0" marL="0">
-              <a:buNone/>
-            </a:pPr>
-            <a:r>
-              <a:rPr lang="en-US" sz="900" dirty="0">
-                <a:solidFill>
-                  <a:srgbClr val="5D5D72"/>
-                </a:solidFill>
-                <a:latin typeface="Calibri" pitchFamily="34" charset="0"/>
-                <a:ea typeface="Calibri" pitchFamily="34" charset="-122"/>
-                <a:cs typeface="Calibri" pitchFamily="34" charset="-120"/>
-              </a:rPr>
-              <a:t>15</a:t>
-            </a:r>
-            <a:endParaRPr lang="en-US" sz="900" dirty="0"/>
+          <p:cNvPr id="9" name="cuinotes-footer-mark"/>
+          <p:cNvSpPr txBox="1"/>
+          <p:nvPr/>
+        </p:nvSpPr>
+        <p:spPr>
+          <a:xfrm>
+            <a:off x="9951720" y="6455664"/>
+            <a:ext cx="2011680" cy="292608"/>
+          </a:xfrm>
+          <a:prstGeom prst="rect">
+            <a:avLst/>
+          </a:prstGeom>
+          <a:noFill/>
+        </p:spPr>
+        <p:txBody>
+          <a:bodyPr wrap="none" lIns="0" rIns="0" tIns="0" bIns="0">
+            <a:spAutoFit/>
+          </a:bodyPr>
+          <a:lstStyle/>
+          <a:p>
+            <a:pPr algn="r"/>
+            <a:r>
+              <a:rPr sz="1000">
+                <a:solidFill>
+                  <a:srgbClr val="8A939B"/>
+                </a:solidFill>
+                <a:hlinkClick r:id="rId3"/>
+              </a:rPr>
+              <a:t>cuinotes.com</a:t>
+            </a:r>
+            <a:r>
+              <a:rPr sz="1000">
+                <a:solidFill>
+                  <a:srgbClr val="8A939B"/>
+                </a:solidFill>
+              </a:rPr>
+              <a:t>  ·  15</a:t>
+            </a:r>
           </a:p>
         </p:txBody>
       </p:sp>
@@ -7023,6 +6862,10 @@
           </a:solidFill>
           <a:ln/>
         </p:spPr>
+        <p:txBody>
+          <a:bodyPr/>
+          <a:p/>
+        </p:txBody>
       </p:sp>
       <p:sp>
         <p:nvSpPr>
@@ -7217,79 +7060,44 @@
       </p:sp>
       <p:sp>
         <p:nvSpPr>
-          <p:cNvPr id="6" name="Text 4"/>
-          <p:cNvSpPr txBox="1"/>
-          <p:nvPr/>
-        </p:nvSpPr>
-        <p:spPr>
-          <a:xfrm>
-            <a:off x="640080" y="6446520"/>
-            <a:ext cx="8686800" cy="292608"/>
-          </a:xfrm>
-          <a:prstGeom prst="rect">
-            <a:avLst/>
-          </a:prstGeom>
-          <a:noFill/>
-          <a:ln/>
-        </p:spPr>
-        <p:txBody>
-          <a:bodyPr wrap="square" lIns="0" tIns="0" rIns="0" bIns="0" rtlCol="0" anchor="ctr"/>
-          <a:lstStyle/>
-          <a:p>
-            <a:pPr algn="l" indent="0" marL="0">
-              <a:buNone/>
-            </a:pPr>
-            <a:r>
-              <a:rPr lang="en-US" sz="900" dirty="0">
-                <a:solidFill>
-                  <a:srgbClr val="5D5D72"/>
-                </a:solidFill>
-                <a:latin typeface="Calibri" pitchFamily="34" charset="0"/>
-                <a:ea typeface="Calibri" pitchFamily="34" charset="-122"/>
-                <a:cs typeface="Calibri" pitchFamily="34" charset="-120"/>
-              </a:rPr>
-              <a:t>Usman Akram  •  COMSATS University Islamabad</a:t>
-            </a:r>
-            <a:endParaRPr lang="en-US" sz="900" dirty="0"/>
-          </a:p>
-        </p:txBody>
-      </p:sp>
-      <p:sp>
-        <p:nvSpPr>
-          <p:cNvPr id="7" name="Text 5"/>
-          <p:cNvSpPr txBox="1"/>
-          <p:nvPr/>
-        </p:nvSpPr>
-        <p:spPr>
-          <a:xfrm>
-            <a:off x="11155680" y="6446520"/>
-            <a:ext cx="457200" cy="292608"/>
-          </a:xfrm>
-          <a:prstGeom prst="rect">
-            <a:avLst/>
-          </a:prstGeom>
-          <a:noFill/>
-          <a:ln/>
-        </p:spPr>
-        <p:txBody>
-          <a:bodyPr wrap="square" lIns="0" tIns="0" rIns="0" bIns="0" rtlCol="0" anchor="ctr"/>
-          <a:lstStyle/>
-          <a:p>
-            <a:pPr algn="r" indent="0" marL="0">
-              <a:buNone/>
-            </a:pPr>
-            <a:r>
-              <a:rPr lang="en-US" sz="900" dirty="0">
-                <a:solidFill>
-                  <a:srgbClr val="5D5D72"/>
-                </a:solidFill>
-                <a:latin typeface="Calibri" pitchFamily="34" charset="0"/>
-                <a:ea typeface="Calibri" pitchFamily="34" charset="-122"/>
-                <a:cs typeface="Calibri" pitchFamily="34" charset="-120"/>
-              </a:rPr>
-              <a:t>16</a:t>
-            </a:r>
-            <a:endParaRPr lang="en-US" sz="900" dirty="0"/>
+          <p:cNvPr id="8" name="cuinotes-footer-mark"/>
+          <p:cNvSpPr txBox="1"/>
+          <p:nvPr/>
+        </p:nvSpPr>
+        <p:spPr>
+          <a:xfrm>
+            <a:off x="9951720" y="6455664"/>
+            <a:ext cx="2011680" cy="292608"/>
+          </a:xfrm>
+          <a:prstGeom prst="rect">
+            <a:avLst/>
+          </a:prstGeom>
+          <a:noFill/>
+        </p:spPr>
+        <p:txBody>
+          <a:bodyPr wrap="none" lIns="0" rIns="0" tIns="0" bIns="0">
+            <a:spAutoFit/>
+          </a:bodyPr>
+          <a:lstStyle/>
+          <a:p>
+            <a:pPr algn="r"/>
+            <a:r>
+              <a:rPr sz="1000">
+                <a:solidFill>
+                  <a:srgbClr val="8A939B"/>
+                </a:solidFill>
+                <a:hlinkClick r:id="rId3"/>
+              </a:rPr>
+              <a:t>cuinotes.com</a:t>
+            </a:r>
+            <a:r>
+              <a:rPr sz="1000">
+                <a:solidFill>
+                  <a:srgbClr val="8A939B"/>
+                </a:solidFill>
+              </a:rPr>
+              <a:t>  ·  16</a:t>
+            </a:r>
           </a:p>
         </p:txBody>
       </p:sp>
@@ -7424,6 +7232,10 @@
           </a:solidFill>
           <a:ln/>
         </p:spPr>
+        <p:txBody>
+          <a:bodyPr/>
+          <a:p/>
+        </p:txBody>
       </p:sp>
       <p:sp>
         <p:nvSpPr>
@@ -7557,79 +7369,44 @@
       </p:sp>
       <p:sp>
         <p:nvSpPr>
-          <p:cNvPr id="7" name="Text 5"/>
-          <p:cNvSpPr txBox="1"/>
-          <p:nvPr/>
-        </p:nvSpPr>
-        <p:spPr>
-          <a:xfrm>
-            <a:off x="640080" y="6446520"/>
-            <a:ext cx="8686800" cy="292608"/>
-          </a:xfrm>
-          <a:prstGeom prst="rect">
-            <a:avLst/>
-          </a:prstGeom>
-          <a:noFill/>
-          <a:ln/>
-        </p:spPr>
-        <p:txBody>
-          <a:bodyPr wrap="square" lIns="0" tIns="0" rIns="0" bIns="0" rtlCol="0" anchor="ctr"/>
-          <a:lstStyle/>
-          <a:p>
-            <a:pPr algn="l" indent="0" marL="0">
-              <a:buNone/>
-            </a:pPr>
-            <a:r>
-              <a:rPr lang="en-US" sz="900" dirty="0">
-                <a:solidFill>
-                  <a:srgbClr val="5D5D72"/>
-                </a:solidFill>
-                <a:latin typeface="Calibri" pitchFamily="34" charset="0"/>
-                <a:ea typeface="Calibri" pitchFamily="34" charset="-122"/>
-                <a:cs typeface="Calibri" pitchFamily="34" charset="-120"/>
-              </a:rPr>
-              <a:t>Usman Akram  •  COMSATS University Islamabad</a:t>
-            </a:r>
-            <a:endParaRPr lang="en-US" sz="900" dirty="0"/>
-          </a:p>
-        </p:txBody>
-      </p:sp>
-      <p:sp>
-        <p:nvSpPr>
-          <p:cNvPr id="8" name="Text 6"/>
-          <p:cNvSpPr txBox="1"/>
-          <p:nvPr/>
-        </p:nvSpPr>
-        <p:spPr>
-          <a:xfrm>
-            <a:off x="11155680" y="6446520"/>
-            <a:ext cx="457200" cy="292608"/>
-          </a:xfrm>
-          <a:prstGeom prst="rect">
-            <a:avLst/>
-          </a:prstGeom>
-          <a:noFill/>
-          <a:ln/>
-        </p:spPr>
-        <p:txBody>
-          <a:bodyPr wrap="square" lIns="0" tIns="0" rIns="0" bIns="0" rtlCol="0" anchor="ctr"/>
-          <a:lstStyle/>
-          <a:p>
-            <a:pPr algn="r" indent="0" marL="0">
-              <a:buNone/>
-            </a:pPr>
-            <a:r>
-              <a:rPr lang="en-US" sz="900" dirty="0">
-                <a:solidFill>
-                  <a:srgbClr val="5D5D72"/>
-                </a:solidFill>
-                <a:latin typeface="Calibri" pitchFamily="34" charset="0"/>
-                <a:ea typeface="Calibri" pitchFamily="34" charset="-122"/>
-                <a:cs typeface="Calibri" pitchFamily="34" charset="-120"/>
-              </a:rPr>
-              <a:t>17</a:t>
-            </a:r>
-            <a:endParaRPr lang="en-US" sz="900" dirty="0"/>
+          <p:cNvPr id="9" name="cuinotes-footer-mark"/>
+          <p:cNvSpPr txBox="1"/>
+          <p:nvPr/>
+        </p:nvSpPr>
+        <p:spPr>
+          <a:xfrm>
+            <a:off x="9951720" y="6455664"/>
+            <a:ext cx="2011680" cy="292608"/>
+          </a:xfrm>
+          <a:prstGeom prst="rect">
+            <a:avLst/>
+          </a:prstGeom>
+          <a:noFill/>
+        </p:spPr>
+        <p:txBody>
+          <a:bodyPr wrap="none" lIns="0" rIns="0" tIns="0" bIns="0">
+            <a:spAutoFit/>
+          </a:bodyPr>
+          <a:lstStyle/>
+          <a:p>
+            <a:pPr algn="r"/>
+            <a:r>
+              <a:rPr sz="1000">
+                <a:solidFill>
+                  <a:srgbClr val="8A939B"/>
+                </a:solidFill>
+                <a:hlinkClick r:id="rId3"/>
+              </a:rPr>
+              <a:t>cuinotes.com</a:t>
+            </a:r>
+            <a:r>
+              <a:rPr sz="1000">
+                <a:solidFill>
+                  <a:srgbClr val="8A939B"/>
+                </a:solidFill>
+              </a:rPr>
+              <a:t>  ·  17</a:t>
+            </a:r>
           </a:p>
         </p:txBody>
       </p:sp>
@@ -7764,6 +7541,10 @@
           </a:solidFill>
           <a:ln/>
         </p:spPr>
+        <p:txBody>
+          <a:bodyPr/>
+          <a:p/>
+        </p:txBody>
       </p:sp>
       <p:sp>
         <p:nvSpPr>
@@ -7848,79 +7629,44 @@
       </p:sp>
       <p:sp>
         <p:nvSpPr>
-          <p:cNvPr id="7" name="Text 5"/>
-          <p:cNvSpPr txBox="1"/>
-          <p:nvPr/>
-        </p:nvSpPr>
-        <p:spPr>
-          <a:xfrm>
-            <a:off x="640080" y="6446520"/>
-            <a:ext cx="8686800" cy="292608"/>
-          </a:xfrm>
-          <a:prstGeom prst="rect">
-            <a:avLst/>
-          </a:prstGeom>
-          <a:noFill/>
-          <a:ln/>
-        </p:spPr>
-        <p:txBody>
-          <a:bodyPr wrap="square" lIns="0" tIns="0" rIns="0" bIns="0" rtlCol="0" anchor="ctr"/>
-          <a:lstStyle/>
-          <a:p>
-            <a:pPr algn="l" indent="0" marL="0">
-              <a:buNone/>
-            </a:pPr>
-            <a:r>
-              <a:rPr lang="en-US" sz="900" dirty="0">
-                <a:solidFill>
-                  <a:srgbClr val="5D5D72"/>
-                </a:solidFill>
-                <a:latin typeface="Calibri" pitchFamily="34" charset="0"/>
-                <a:ea typeface="Calibri" pitchFamily="34" charset="-122"/>
-                <a:cs typeface="Calibri" pitchFamily="34" charset="-120"/>
-              </a:rPr>
-              <a:t>Usman Akram  •  COMSATS University Islamabad</a:t>
-            </a:r>
-            <a:endParaRPr lang="en-US" sz="900" dirty="0"/>
-          </a:p>
-        </p:txBody>
-      </p:sp>
-      <p:sp>
-        <p:nvSpPr>
-          <p:cNvPr id="8" name="Text 6"/>
-          <p:cNvSpPr txBox="1"/>
-          <p:nvPr/>
-        </p:nvSpPr>
-        <p:spPr>
-          <a:xfrm>
-            <a:off x="11155680" y="6446520"/>
-            <a:ext cx="457200" cy="292608"/>
-          </a:xfrm>
-          <a:prstGeom prst="rect">
-            <a:avLst/>
-          </a:prstGeom>
-          <a:noFill/>
-          <a:ln/>
-        </p:spPr>
-        <p:txBody>
-          <a:bodyPr wrap="square" lIns="0" tIns="0" rIns="0" bIns="0" rtlCol="0" anchor="ctr"/>
-          <a:lstStyle/>
-          <a:p>
-            <a:pPr algn="r" indent="0" marL="0">
-              <a:buNone/>
-            </a:pPr>
-            <a:r>
-              <a:rPr lang="en-US" sz="900" dirty="0">
-                <a:solidFill>
-                  <a:srgbClr val="5D5D72"/>
-                </a:solidFill>
-                <a:latin typeface="Calibri" pitchFamily="34" charset="0"/>
-                <a:ea typeface="Calibri" pitchFamily="34" charset="-122"/>
-                <a:cs typeface="Calibri" pitchFamily="34" charset="-120"/>
-              </a:rPr>
-              <a:t>18</a:t>
-            </a:r>
-            <a:endParaRPr lang="en-US" sz="900" dirty="0"/>
+          <p:cNvPr id="9" name="cuinotes-footer-mark"/>
+          <p:cNvSpPr txBox="1"/>
+          <p:nvPr/>
+        </p:nvSpPr>
+        <p:spPr>
+          <a:xfrm>
+            <a:off x="9951720" y="6455664"/>
+            <a:ext cx="2011680" cy="292608"/>
+          </a:xfrm>
+          <a:prstGeom prst="rect">
+            <a:avLst/>
+          </a:prstGeom>
+          <a:noFill/>
+        </p:spPr>
+        <p:txBody>
+          <a:bodyPr wrap="none" lIns="0" rIns="0" tIns="0" bIns="0">
+            <a:spAutoFit/>
+          </a:bodyPr>
+          <a:lstStyle/>
+          <a:p>
+            <a:pPr algn="r"/>
+            <a:r>
+              <a:rPr sz="1000">
+                <a:solidFill>
+                  <a:srgbClr val="8A939B"/>
+                </a:solidFill>
+                <a:hlinkClick r:id="rId3"/>
+              </a:rPr>
+              <a:t>cuinotes.com</a:t>
+            </a:r>
+            <a:r>
+              <a:rPr sz="1000">
+                <a:solidFill>
+                  <a:srgbClr val="8A939B"/>
+                </a:solidFill>
+              </a:rPr>
+              <a:t>  ·  18</a:t>
+            </a:r>
           </a:p>
         </p:txBody>
       </p:sp>
@@ -8053,6 +7799,10 @@
           </a:solidFill>
           <a:ln/>
         </p:spPr>
+        <p:txBody>
+          <a:bodyPr/>
+          <a:p/>
+        </p:txBody>
       </p:sp>
       <p:sp>
         <p:nvSpPr>
@@ -8151,6 +7901,10 @@
           </a:solidFill>
           <a:ln/>
         </p:spPr>
+        <p:txBody>
+          <a:bodyPr/>
+          <a:p/>
+        </p:txBody>
       </p:sp>
       <p:sp>
         <p:nvSpPr>
@@ -8249,6 +8003,10 @@
           </a:solidFill>
           <a:ln/>
         </p:spPr>
+        <p:txBody>
+          <a:bodyPr/>
+          <a:p/>
+        </p:txBody>
       </p:sp>
       <p:sp>
         <p:nvSpPr>
@@ -8330,79 +8088,44 @@
       </p:sp>
       <p:sp>
         <p:nvSpPr>
-          <p:cNvPr id="13" name="Text 11"/>
-          <p:cNvSpPr txBox="1"/>
-          <p:nvPr/>
-        </p:nvSpPr>
-        <p:spPr>
-          <a:xfrm>
-            <a:off x="640080" y="6446520"/>
-            <a:ext cx="8686800" cy="292608"/>
-          </a:xfrm>
-          <a:prstGeom prst="rect">
-            <a:avLst/>
-          </a:prstGeom>
-          <a:noFill/>
-          <a:ln/>
-        </p:spPr>
-        <p:txBody>
-          <a:bodyPr wrap="square" lIns="0" tIns="0" rIns="0" bIns="0" rtlCol="0" anchor="ctr"/>
-          <a:lstStyle/>
-          <a:p>
-            <a:pPr algn="l" indent="0" marL="0">
-              <a:buNone/>
-            </a:pPr>
-            <a:r>
-              <a:rPr lang="en-US" sz="900" dirty="0">
-                <a:solidFill>
-                  <a:srgbClr val="5D5D72"/>
-                </a:solidFill>
-                <a:latin typeface="Calibri" pitchFamily="34" charset="0"/>
-                <a:ea typeface="Calibri" pitchFamily="34" charset="-122"/>
-                <a:cs typeface="Calibri" pitchFamily="34" charset="-120"/>
-              </a:rPr>
-              <a:t>Usman Akram  •  COMSATS University Islamabad</a:t>
-            </a:r>
-            <a:endParaRPr lang="en-US" sz="900" dirty="0"/>
-          </a:p>
-        </p:txBody>
-      </p:sp>
-      <p:sp>
-        <p:nvSpPr>
-          <p:cNvPr id="14" name="Text 12"/>
-          <p:cNvSpPr txBox="1"/>
-          <p:nvPr/>
-        </p:nvSpPr>
-        <p:spPr>
-          <a:xfrm>
-            <a:off x="11155680" y="6446520"/>
-            <a:ext cx="457200" cy="292608"/>
-          </a:xfrm>
-          <a:prstGeom prst="rect">
-            <a:avLst/>
-          </a:prstGeom>
-          <a:noFill/>
-          <a:ln/>
-        </p:spPr>
-        <p:txBody>
-          <a:bodyPr wrap="square" lIns="0" tIns="0" rIns="0" bIns="0" rtlCol="0" anchor="ctr"/>
-          <a:lstStyle/>
-          <a:p>
-            <a:pPr algn="r" indent="0" marL="0">
-              <a:buNone/>
-            </a:pPr>
-            <a:r>
-              <a:rPr lang="en-US" sz="900" dirty="0">
-                <a:solidFill>
-                  <a:srgbClr val="5D5D72"/>
-                </a:solidFill>
-                <a:latin typeface="Calibri" pitchFamily="34" charset="0"/>
-                <a:ea typeface="Calibri" pitchFamily="34" charset="-122"/>
-                <a:cs typeface="Calibri" pitchFamily="34" charset="-120"/>
-              </a:rPr>
-              <a:t>19</a:t>
-            </a:r>
-            <a:endParaRPr lang="en-US" sz="900" dirty="0"/>
+          <p:cNvPr id="15" name="cuinotes-footer-mark"/>
+          <p:cNvSpPr txBox="1"/>
+          <p:nvPr/>
+        </p:nvSpPr>
+        <p:spPr>
+          <a:xfrm>
+            <a:off x="9951720" y="6455664"/>
+            <a:ext cx="2011680" cy="292608"/>
+          </a:xfrm>
+          <a:prstGeom prst="rect">
+            <a:avLst/>
+          </a:prstGeom>
+          <a:noFill/>
+        </p:spPr>
+        <p:txBody>
+          <a:bodyPr wrap="none" lIns="0" rIns="0" tIns="0" bIns="0">
+            <a:spAutoFit/>
+          </a:bodyPr>
+          <a:lstStyle/>
+          <a:p>
+            <a:pPr algn="r"/>
+            <a:r>
+              <a:rPr sz="1000">
+                <a:solidFill>
+                  <a:srgbClr val="8A939B"/>
+                </a:solidFill>
+                <a:hlinkClick r:id="rId3"/>
+              </a:rPr>
+              <a:t>cuinotes.com</a:t>
+            </a:r>
+            <a:r>
+              <a:rPr sz="1000">
+                <a:solidFill>
+                  <a:srgbClr val="8A939B"/>
+                </a:solidFill>
+              </a:rPr>
+              <a:t>  ·  19</a:t>
+            </a:r>
           </a:p>
         </p:txBody>
       </p:sp>
@@ -8535,6 +8258,10 @@
           </a:solidFill>
           <a:ln/>
         </p:spPr>
+        <p:txBody>
+          <a:bodyPr/>
+          <a:p/>
+        </p:txBody>
       </p:sp>
       <p:sp>
         <p:nvSpPr>
@@ -8633,6 +8360,10 @@
           </a:solidFill>
           <a:ln/>
         </p:spPr>
+        <p:txBody>
+          <a:bodyPr/>
+          <a:p/>
+        </p:txBody>
       </p:sp>
       <p:sp>
         <p:nvSpPr>
@@ -8731,6 +8462,10 @@
           </a:solidFill>
           <a:ln/>
         </p:spPr>
+        <p:txBody>
+          <a:bodyPr/>
+          <a:p/>
+        </p:txBody>
       </p:sp>
       <p:sp>
         <p:nvSpPr>
@@ -8829,6 +8564,10 @@
           </a:solidFill>
           <a:ln/>
         </p:spPr>
+        <p:txBody>
+          <a:bodyPr/>
+          <a:p/>
+        </p:txBody>
       </p:sp>
       <p:sp>
         <p:nvSpPr>
@@ -8927,6 +8666,10 @@
           </a:solidFill>
           <a:ln/>
         </p:spPr>
+        <p:txBody>
+          <a:bodyPr/>
+          <a:p/>
+        </p:txBody>
       </p:sp>
       <p:sp>
         <p:nvSpPr>
@@ -9008,79 +8751,44 @@
       </p:sp>
       <p:sp>
         <p:nvSpPr>
-          <p:cNvPr id="19" name="Text 17"/>
-          <p:cNvSpPr txBox="1"/>
-          <p:nvPr/>
-        </p:nvSpPr>
-        <p:spPr>
-          <a:xfrm>
-            <a:off x="640080" y="6446520"/>
-            <a:ext cx="8686800" cy="292608"/>
-          </a:xfrm>
-          <a:prstGeom prst="rect">
-            <a:avLst/>
-          </a:prstGeom>
-          <a:noFill/>
-          <a:ln/>
-        </p:spPr>
-        <p:txBody>
-          <a:bodyPr wrap="square" lIns="0" tIns="0" rIns="0" bIns="0" rtlCol="0" anchor="ctr"/>
-          <a:lstStyle/>
-          <a:p>
-            <a:pPr algn="l" indent="0" marL="0">
-              <a:buNone/>
-            </a:pPr>
-            <a:r>
-              <a:rPr lang="en-US" sz="900" dirty="0">
-                <a:solidFill>
-                  <a:srgbClr val="5D5D72"/>
-                </a:solidFill>
-                <a:latin typeface="Calibri" pitchFamily="34" charset="0"/>
-                <a:ea typeface="Calibri" pitchFamily="34" charset="-122"/>
-                <a:cs typeface="Calibri" pitchFamily="34" charset="-120"/>
-              </a:rPr>
-              <a:t>Usman Akram  •  COMSATS University Islamabad</a:t>
-            </a:r>
-            <a:endParaRPr lang="en-US" sz="900" dirty="0"/>
-          </a:p>
-        </p:txBody>
-      </p:sp>
-      <p:sp>
-        <p:nvSpPr>
-          <p:cNvPr id="20" name="Text 18"/>
-          <p:cNvSpPr txBox="1"/>
-          <p:nvPr/>
-        </p:nvSpPr>
-        <p:spPr>
-          <a:xfrm>
-            <a:off x="11155680" y="6446520"/>
-            <a:ext cx="457200" cy="292608"/>
-          </a:xfrm>
-          <a:prstGeom prst="rect">
-            <a:avLst/>
-          </a:prstGeom>
-          <a:noFill/>
-          <a:ln/>
-        </p:spPr>
-        <p:txBody>
-          <a:bodyPr wrap="square" lIns="0" tIns="0" rIns="0" bIns="0" rtlCol="0" anchor="ctr"/>
-          <a:lstStyle/>
-          <a:p>
-            <a:pPr algn="r" indent="0" marL="0">
-              <a:buNone/>
-            </a:pPr>
-            <a:r>
-              <a:rPr lang="en-US" sz="900" dirty="0">
-                <a:solidFill>
-                  <a:srgbClr val="5D5D72"/>
-                </a:solidFill>
-                <a:latin typeface="Calibri" pitchFamily="34" charset="0"/>
-                <a:ea typeface="Calibri" pitchFamily="34" charset="-122"/>
-                <a:cs typeface="Calibri" pitchFamily="34" charset="-120"/>
-              </a:rPr>
-              <a:t>2</a:t>
-            </a:r>
-            <a:endParaRPr lang="en-US" sz="900" dirty="0"/>
+          <p:cNvPr id="21" name="cuinotes-footer-mark"/>
+          <p:cNvSpPr txBox="1"/>
+          <p:nvPr/>
+        </p:nvSpPr>
+        <p:spPr>
+          <a:xfrm>
+            <a:off x="9951720" y="6455664"/>
+            <a:ext cx="2011680" cy="292608"/>
+          </a:xfrm>
+          <a:prstGeom prst="rect">
+            <a:avLst/>
+          </a:prstGeom>
+          <a:noFill/>
+        </p:spPr>
+        <p:txBody>
+          <a:bodyPr wrap="none" lIns="0" rIns="0" tIns="0" bIns="0">
+            <a:spAutoFit/>
+          </a:bodyPr>
+          <a:lstStyle/>
+          <a:p>
+            <a:pPr algn="r"/>
+            <a:r>
+              <a:rPr sz="1000">
+                <a:solidFill>
+                  <a:srgbClr val="8A939B"/>
+                </a:solidFill>
+                <a:hlinkClick r:id="rId3"/>
+              </a:rPr>
+              <a:t>cuinotes.com</a:t>
+            </a:r>
+            <a:r>
+              <a:rPr sz="1000">
+                <a:solidFill>
+                  <a:srgbClr val="8A939B"/>
+                </a:solidFill>
+              </a:rPr>
+              <a:t>  ·  2</a:t>
+            </a:r>
           </a:p>
         </p:txBody>
       </p:sp>
@@ -9215,6 +8923,10 @@
           </a:solidFill>
           <a:ln/>
         </p:spPr>
+        <p:txBody>
+          <a:bodyPr/>
+          <a:p/>
+        </p:txBody>
       </p:sp>
       <p:sp>
         <p:nvSpPr>
@@ -9420,79 +9132,44 @@
       </p:sp>
       <p:sp>
         <p:nvSpPr>
-          <p:cNvPr id="6" name="Text 4"/>
-          <p:cNvSpPr txBox="1"/>
-          <p:nvPr/>
-        </p:nvSpPr>
-        <p:spPr>
-          <a:xfrm>
-            <a:off x="640080" y="6446520"/>
-            <a:ext cx="8686800" cy="292608"/>
-          </a:xfrm>
-          <a:prstGeom prst="rect">
-            <a:avLst/>
-          </a:prstGeom>
-          <a:noFill/>
-          <a:ln/>
-        </p:spPr>
-        <p:txBody>
-          <a:bodyPr wrap="square" lIns="0" tIns="0" rIns="0" bIns="0" rtlCol="0" anchor="ctr"/>
-          <a:lstStyle/>
-          <a:p>
-            <a:pPr algn="l" indent="0" marL="0">
-              <a:buNone/>
-            </a:pPr>
-            <a:r>
-              <a:rPr lang="en-US" sz="900" dirty="0">
-                <a:solidFill>
-                  <a:srgbClr val="5D5D72"/>
-                </a:solidFill>
-                <a:latin typeface="Calibri" pitchFamily="34" charset="0"/>
-                <a:ea typeface="Calibri" pitchFamily="34" charset="-122"/>
-                <a:cs typeface="Calibri" pitchFamily="34" charset="-120"/>
-              </a:rPr>
-              <a:t>Usman Akram  •  COMSATS University Islamabad</a:t>
-            </a:r>
-            <a:endParaRPr lang="en-US" sz="900" dirty="0"/>
-          </a:p>
-        </p:txBody>
-      </p:sp>
-      <p:sp>
-        <p:nvSpPr>
-          <p:cNvPr id="7" name="Text 5"/>
-          <p:cNvSpPr txBox="1"/>
-          <p:nvPr/>
-        </p:nvSpPr>
-        <p:spPr>
-          <a:xfrm>
-            <a:off x="11155680" y="6446520"/>
-            <a:ext cx="457200" cy="292608"/>
-          </a:xfrm>
-          <a:prstGeom prst="rect">
-            <a:avLst/>
-          </a:prstGeom>
-          <a:noFill/>
-          <a:ln/>
-        </p:spPr>
-        <p:txBody>
-          <a:bodyPr wrap="square" lIns="0" tIns="0" rIns="0" bIns="0" rtlCol="0" anchor="ctr"/>
-          <a:lstStyle/>
-          <a:p>
-            <a:pPr algn="r" indent="0" marL="0">
-              <a:buNone/>
-            </a:pPr>
-            <a:r>
-              <a:rPr lang="en-US" sz="900" dirty="0">
-                <a:solidFill>
-                  <a:srgbClr val="5D5D72"/>
-                </a:solidFill>
-                <a:latin typeface="Calibri" pitchFamily="34" charset="0"/>
-                <a:ea typeface="Calibri" pitchFamily="34" charset="-122"/>
-                <a:cs typeface="Calibri" pitchFamily="34" charset="-120"/>
-              </a:rPr>
-              <a:t>20</a:t>
-            </a:r>
-            <a:endParaRPr lang="en-US" sz="900" dirty="0"/>
+          <p:cNvPr id="8" name="cuinotes-footer-mark"/>
+          <p:cNvSpPr txBox="1"/>
+          <p:nvPr/>
+        </p:nvSpPr>
+        <p:spPr>
+          <a:xfrm>
+            <a:off x="9951720" y="6455664"/>
+            <a:ext cx="2011680" cy="292608"/>
+          </a:xfrm>
+          <a:prstGeom prst="rect">
+            <a:avLst/>
+          </a:prstGeom>
+          <a:noFill/>
+        </p:spPr>
+        <p:txBody>
+          <a:bodyPr wrap="none" lIns="0" rIns="0" tIns="0" bIns="0">
+            <a:spAutoFit/>
+          </a:bodyPr>
+          <a:lstStyle/>
+          <a:p>
+            <a:pPr algn="r"/>
+            <a:r>
+              <a:rPr sz="1000">
+                <a:solidFill>
+                  <a:srgbClr val="8A939B"/>
+                </a:solidFill>
+                <a:hlinkClick r:id="rId3"/>
+              </a:rPr>
+              <a:t>cuinotes.com</a:t>
+            </a:r>
+            <a:r>
+              <a:rPr sz="1000">
+                <a:solidFill>
+                  <a:srgbClr val="8A939B"/>
+                </a:solidFill>
+              </a:rPr>
+              <a:t>  ·  20</a:t>
+            </a:r>
           </a:p>
         </p:txBody>
       </p:sp>
@@ -9627,6 +9304,10 @@
           </a:solidFill>
           <a:ln/>
         </p:spPr>
+        <p:txBody>
+          <a:bodyPr/>
+          <a:p/>
+        </p:txBody>
       </p:sp>
       <p:sp>
         <p:nvSpPr>
@@ -9707,6 +9388,10 @@
             <a:tailEnd type="triangle"/>
           </a:ln>
         </p:spPr>
+        <p:txBody>
+          <a:bodyPr/>
+          <a:p/>
+        </p:txBody>
       </p:sp>
       <p:sp>
         <p:nvSpPr>
@@ -9729,6 +9414,10 @@
           </a:solidFill>
           <a:ln/>
         </p:spPr>
+        <p:txBody>
+          <a:bodyPr/>
+          <a:p/>
+        </p:txBody>
       </p:sp>
       <p:sp>
         <p:nvSpPr>
@@ -9809,6 +9498,10 @@
             <a:tailEnd type="triangle"/>
           </a:ln>
         </p:spPr>
+        <p:txBody>
+          <a:bodyPr/>
+          <a:p/>
+        </p:txBody>
       </p:sp>
       <p:sp>
         <p:nvSpPr>
@@ -9831,6 +9524,10 @@
           </a:solidFill>
           <a:ln/>
         </p:spPr>
+        <p:txBody>
+          <a:bodyPr/>
+          <a:p/>
+        </p:txBody>
       </p:sp>
       <p:sp>
         <p:nvSpPr>
@@ -9911,6 +9608,10 @@
             <a:tailEnd type="triangle"/>
           </a:ln>
         </p:spPr>
+        <p:txBody>
+          <a:bodyPr/>
+          <a:p/>
+        </p:txBody>
       </p:sp>
       <p:sp>
         <p:nvSpPr>
@@ -9933,6 +9634,10 @@
           </a:solidFill>
           <a:ln/>
         </p:spPr>
+        <p:txBody>
+          <a:bodyPr/>
+          <a:p/>
+        </p:txBody>
       </p:sp>
       <p:sp>
         <p:nvSpPr>
@@ -10013,6 +9718,10 @@
             <a:tailEnd type="triangle"/>
           </a:ln>
         </p:spPr>
+        <p:txBody>
+          <a:bodyPr/>
+          <a:p/>
+        </p:txBody>
       </p:sp>
       <p:sp>
         <p:nvSpPr>
@@ -10035,6 +9744,10 @@
           </a:solidFill>
           <a:ln/>
         </p:spPr>
+        <p:txBody>
+          <a:bodyPr/>
+          <a:p/>
+        </p:txBody>
       </p:sp>
       <p:sp>
         <p:nvSpPr>
@@ -10133,79 +9846,44 @@
       </p:sp>
       <p:sp>
         <p:nvSpPr>
-          <p:cNvPr id="19" name="Text 17"/>
-          <p:cNvSpPr txBox="1"/>
-          <p:nvPr/>
-        </p:nvSpPr>
-        <p:spPr>
-          <a:xfrm>
-            <a:off x="640080" y="6446520"/>
-            <a:ext cx="8686800" cy="292608"/>
-          </a:xfrm>
-          <a:prstGeom prst="rect">
-            <a:avLst/>
-          </a:prstGeom>
-          <a:noFill/>
-          <a:ln/>
-        </p:spPr>
-        <p:txBody>
-          <a:bodyPr wrap="square" lIns="0" tIns="0" rIns="0" bIns="0" rtlCol="0" anchor="ctr"/>
-          <a:lstStyle/>
-          <a:p>
-            <a:pPr algn="l" indent="0" marL="0">
-              <a:buNone/>
-            </a:pPr>
-            <a:r>
-              <a:rPr lang="en-US" sz="900" dirty="0">
-                <a:solidFill>
-                  <a:srgbClr val="5D5D72"/>
-                </a:solidFill>
-                <a:latin typeface="Calibri" pitchFamily="34" charset="0"/>
-                <a:ea typeface="Calibri" pitchFamily="34" charset="-122"/>
-                <a:cs typeface="Calibri" pitchFamily="34" charset="-120"/>
-              </a:rPr>
-              <a:t>Usman Akram  •  COMSATS University Islamabad</a:t>
-            </a:r>
-            <a:endParaRPr lang="en-US" sz="900" dirty="0"/>
-          </a:p>
-        </p:txBody>
-      </p:sp>
-      <p:sp>
-        <p:nvSpPr>
-          <p:cNvPr id="20" name="Text 18"/>
-          <p:cNvSpPr txBox="1"/>
-          <p:nvPr/>
-        </p:nvSpPr>
-        <p:spPr>
-          <a:xfrm>
-            <a:off x="11155680" y="6446520"/>
-            <a:ext cx="457200" cy="292608"/>
-          </a:xfrm>
-          <a:prstGeom prst="rect">
-            <a:avLst/>
-          </a:prstGeom>
-          <a:noFill/>
-          <a:ln/>
-        </p:spPr>
-        <p:txBody>
-          <a:bodyPr wrap="square" lIns="0" tIns="0" rIns="0" bIns="0" rtlCol="0" anchor="ctr"/>
-          <a:lstStyle/>
-          <a:p>
-            <a:pPr algn="r" indent="0" marL="0">
-              <a:buNone/>
-            </a:pPr>
-            <a:r>
-              <a:rPr lang="en-US" sz="900" dirty="0">
-                <a:solidFill>
-                  <a:srgbClr val="5D5D72"/>
-                </a:solidFill>
-                <a:latin typeface="Calibri" pitchFamily="34" charset="0"/>
-                <a:ea typeface="Calibri" pitchFamily="34" charset="-122"/>
-                <a:cs typeface="Calibri" pitchFamily="34" charset="-120"/>
-              </a:rPr>
-              <a:t>21</a:t>
-            </a:r>
-            <a:endParaRPr lang="en-US" sz="900" dirty="0"/>
+          <p:cNvPr id="21" name="cuinotes-footer-mark"/>
+          <p:cNvSpPr txBox="1"/>
+          <p:nvPr/>
+        </p:nvSpPr>
+        <p:spPr>
+          <a:xfrm>
+            <a:off x="9951720" y="6455664"/>
+            <a:ext cx="2011680" cy="292608"/>
+          </a:xfrm>
+          <a:prstGeom prst="rect">
+            <a:avLst/>
+          </a:prstGeom>
+          <a:noFill/>
+        </p:spPr>
+        <p:txBody>
+          <a:bodyPr wrap="none" lIns="0" rIns="0" tIns="0" bIns="0">
+            <a:spAutoFit/>
+          </a:bodyPr>
+          <a:lstStyle/>
+          <a:p>
+            <a:pPr algn="r"/>
+            <a:r>
+              <a:rPr sz="1000">
+                <a:solidFill>
+                  <a:srgbClr val="8A939B"/>
+                </a:solidFill>
+                <a:hlinkClick r:id="rId3"/>
+              </a:rPr>
+              <a:t>cuinotes.com</a:t>
+            </a:r>
+            <a:r>
+              <a:rPr sz="1000">
+                <a:solidFill>
+                  <a:srgbClr val="8A939B"/>
+                </a:solidFill>
+              </a:rPr>
+              <a:t>  ·  21</a:t>
+            </a:r>
           </a:p>
         </p:txBody>
       </p:sp>
@@ -10340,6 +10018,10 @@
           </a:solidFill>
           <a:ln/>
         </p:spPr>
+        <p:txBody>
+          <a:bodyPr/>
+          <a:p/>
+        </p:txBody>
       </p:sp>
       <p:sp>
         <p:nvSpPr>
@@ -10633,79 +10315,44 @@
       </p:sp>
       <p:sp>
         <p:nvSpPr>
-          <p:cNvPr id="7" name="Text 5"/>
-          <p:cNvSpPr txBox="1"/>
-          <p:nvPr/>
-        </p:nvSpPr>
-        <p:spPr>
-          <a:xfrm>
-            <a:off x="640080" y="6446520"/>
-            <a:ext cx="8686800" cy="292608"/>
-          </a:xfrm>
-          <a:prstGeom prst="rect">
-            <a:avLst/>
-          </a:prstGeom>
-          <a:noFill/>
-          <a:ln/>
-        </p:spPr>
-        <p:txBody>
-          <a:bodyPr wrap="square" lIns="0" tIns="0" rIns="0" bIns="0" rtlCol="0" anchor="ctr"/>
-          <a:lstStyle/>
-          <a:p>
-            <a:pPr algn="l" indent="0" marL="0">
-              <a:buNone/>
-            </a:pPr>
-            <a:r>
-              <a:rPr lang="en-US" sz="900" dirty="0">
-                <a:solidFill>
-                  <a:srgbClr val="5D5D72"/>
-                </a:solidFill>
-                <a:latin typeface="Calibri" pitchFamily="34" charset="0"/>
-                <a:ea typeface="Calibri" pitchFamily="34" charset="-122"/>
-                <a:cs typeface="Calibri" pitchFamily="34" charset="-120"/>
-              </a:rPr>
-              <a:t>Usman Akram  •  COMSATS University Islamabad</a:t>
-            </a:r>
-            <a:endParaRPr lang="en-US" sz="900" dirty="0"/>
-          </a:p>
-        </p:txBody>
-      </p:sp>
-      <p:sp>
-        <p:nvSpPr>
-          <p:cNvPr id="8" name="Text 6"/>
-          <p:cNvSpPr txBox="1"/>
-          <p:nvPr/>
-        </p:nvSpPr>
-        <p:spPr>
-          <a:xfrm>
-            <a:off x="11155680" y="6446520"/>
-            <a:ext cx="457200" cy="292608"/>
-          </a:xfrm>
-          <a:prstGeom prst="rect">
-            <a:avLst/>
-          </a:prstGeom>
-          <a:noFill/>
-          <a:ln/>
-        </p:spPr>
-        <p:txBody>
-          <a:bodyPr wrap="square" lIns="0" tIns="0" rIns="0" bIns="0" rtlCol="0" anchor="ctr"/>
-          <a:lstStyle/>
-          <a:p>
-            <a:pPr algn="r" indent="0" marL="0">
-              <a:buNone/>
-            </a:pPr>
-            <a:r>
-              <a:rPr lang="en-US" sz="900" dirty="0">
-                <a:solidFill>
-                  <a:srgbClr val="5D5D72"/>
-                </a:solidFill>
-                <a:latin typeface="Calibri" pitchFamily="34" charset="0"/>
-                <a:ea typeface="Calibri" pitchFamily="34" charset="-122"/>
-                <a:cs typeface="Calibri" pitchFamily="34" charset="-120"/>
-              </a:rPr>
-              <a:t>22</a:t>
-            </a:r>
-            <a:endParaRPr lang="en-US" sz="900" dirty="0"/>
+          <p:cNvPr id="9" name="cuinotes-footer-mark"/>
+          <p:cNvSpPr txBox="1"/>
+          <p:nvPr/>
+        </p:nvSpPr>
+        <p:spPr>
+          <a:xfrm>
+            <a:off x="9951720" y="6455664"/>
+            <a:ext cx="2011680" cy="292608"/>
+          </a:xfrm>
+          <a:prstGeom prst="rect">
+            <a:avLst/>
+          </a:prstGeom>
+          <a:noFill/>
+        </p:spPr>
+        <p:txBody>
+          <a:bodyPr wrap="none" lIns="0" rIns="0" tIns="0" bIns="0">
+            <a:spAutoFit/>
+          </a:bodyPr>
+          <a:lstStyle/>
+          <a:p>
+            <a:pPr algn="r"/>
+            <a:r>
+              <a:rPr sz="1000">
+                <a:solidFill>
+                  <a:srgbClr val="8A939B"/>
+                </a:solidFill>
+                <a:hlinkClick r:id="rId3"/>
+              </a:rPr>
+              <a:t>cuinotes.com</a:t>
+            </a:r>
+            <a:r>
+              <a:rPr sz="1000">
+                <a:solidFill>
+                  <a:srgbClr val="8A939B"/>
+                </a:solidFill>
+              </a:rPr>
+              <a:t>  ·  22</a:t>
+            </a:r>
           </a:p>
         </p:txBody>
       </p:sp>
@@ -10845,6 +10492,10 @@
             <a:prstDash val="solid"/>
           </a:ln>
         </p:spPr>
+        <p:txBody>
+          <a:bodyPr/>
+          <a:p/>
+        </p:txBody>
       </p:sp>
       <p:sp>
         <p:nvSpPr>
@@ -10926,79 +10577,44 @@
       </p:sp>
       <p:sp>
         <p:nvSpPr>
-          <p:cNvPr id="7" name="Text 5"/>
-          <p:cNvSpPr txBox="1"/>
-          <p:nvPr/>
-        </p:nvSpPr>
-        <p:spPr>
-          <a:xfrm>
-            <a:off x="640080" y="6446520"/>
-            <a:ext cx="8686800" cy="292608"/>
-          </a:xfrm>
-          <a:prstGeom prst="rect">
-            <a:avLst/>
-          </a:prstGeom>
-          <a:noFill/>
-          <a:ln/>
-        </p:spPr>
-        <p:txBody>
-          <a:bodyPr wrap="square" lIns="0" tIns="0" rIns="0" bIns="0" rtlCol="0" anchor="ctr"/>
-          <a:lstStyle/>
-          <a:p>
-            <a:pPr algn="l" indent="0" marL="0">
-              <a:buNone/>
-            </a:pPr>
-            <a:r>
-              <a:rPr lang="en-US" sz="900" dirty="0">
-                <a:solidFill>
-                  <a:srgbClr val="5D5D72"/>
-                </a:solidFill>
-                <a:latin typeface="Calibri" pitchFamily="34" charset="0"/>
-                <a:ea typeface="Calibri" pitchFamily="34" charset="-122"/>
-                <a:cs typeface="Calibri" pitchFamily="34" charset="-120"/>
-              </a:rPr>
-              <a:t>Usman Akram  •  COMSATS University Islamabad</a:t>
-            </a:r>
-            <a:endParaRPr lang="en-US" sz="900" dirty="0"/>
-          </a:p>
-        </p:txBody>
-      </p:sp>
-      <p:sp>
-        <p:nvSpPr>
-          <p:cNvPr id="8" name="Text 6"/>
-          <p:cNvSpPr txBox="1"/>
-          <p:nvPr/>
-        </p:nvSpPr>
-        <p:spPr>
-          <a:xfrm>
-            <a:off x="11155680" y="6446520"/>
-            <a:ext cx="457200" cy="292608"/>
-          </a:xfrm>
-          <a:prstGeom prst="rect">
-            <a:avLst/>
-          </a:prstGeom>
-          <a:noFill/>
-          <a:ln/>
-        </p:spPr>
-        <p:txBody>
-          <a:bodyPr wrap="square" lIns="0" tIns="0" rIns="0" bIns="0" rtlCol="0" anchor="ctr"/>
-          <a:lstStyle/>
-          <a:p>
-            <a:pPr algn="r" indent="0" marL="0">
-              <a:buNone/>
-            </a:pPr>
-            <a:r>
-              <a:rPr lang="en-US" sz="900" dirty="0">
-                <a:solidFill>
-                  <a:srgbClr val="5D5D72"/>
-                </a:solidFill>
-                <a:latin typeface="Calibri" pitchFamily="34" charset="0"/>
-                <a:ea typeface="Calibri" pitchFamily="34" charset="-122"/>
-                <a:cs typeface="Calibri" pitchFamily="34" charset="-120"/>
-              </a:rPr>
-              <a:t>23</a:t>
-            </a:r>
-            <a:endParaRPr lang="en-US" sz="900" dirty="0"/>
+          <p:cNvPr id="9" name="cuinotes-footer-mark"/>
+          <p:cNvSpPr txBox="1"/>
+          <p:nvPr/>
+        </p:nvSpPr>
+        <p:spPr>
+          <a:xfrm>
+            <a:off x="9951720" y="6455664"/>
+            <a:ext cx="2011680" cy="292608"/>
+          </a:xfrm>
+          <a:prstGeom prst="rect">
+            <a:avLst/>
+          </a:prstGeom>
+          <a:noFill/>
+        </p:spPr>
+        <p:txBody>
+          <a:bodyPr wrap="none" lIns="0" rIns="0" tIns="0" bIns="0">
+            <a:spAutoFit/>
+          </a:bodyPr>
+          <a:lstStyle/>
+          <a:p>
+            <a:pPr algn="r"/>
+            <a:r>
+              <a:rPr sz="1000">
+                <a:solidFill>
+                  <a:srgbClr val="8A939B"/>
+                </a:solidFill>
+                <a:hlinkClick r:id="rId3"/>
+              </a:rPr>
+              <a:t>cuinotes.com</a:t>
+            </a:r>
+            <a:r>
+              <a:rPr sz="1000">
+                <a:solidFill>
+                  <a:srgbClr val="8A939B"/>
+                </a:solidFill>
+              </a:rPr>
+              <a:t>  ·  23</a:t>
+            </a:r>
           </a:p>
         </p:txBody>
       </p:sp>
@@ -11131,6 +10747,10 @@
           </a:solidFill>
           <a:ln/>
         </p:spPr>
+        <p:txBody>
+          <a:bodyPr/>
+          <a:p/>
+        </p:txBody>
       </p:sp>
       <p:sp>
         <p:nvSpPr>
@@ -11229,6 +10849,10 @@
           </a:solidFill>
           <a:ln/>
         </p:spPr>
+        <p:txBody>
+          <a:bodyPr/>
+          <a:p/>
+        </p:txBody>
       </p:sp>
       <p:sp>
         <p:nvSpPr>
@@ -11327,6 +10951,10 @@
           </a:solidFill>
           <a:ln/>
         </p:spPr>
+        <p:txBody>
+          <a:bodyPr/>
+          <a:p/>
+        </p:txBody>
       </p:sp>
       <p:sp>
         <p:nvSpPr>
@@ -11408,79 +11036,44 @@
       </p:sp>
       <p:sp>
         <p:nvSpPr>
-          <p:cNvPr id="13" name="Text 11"/>
-          <p:cNvSpPr txBox="1"/>
-          <p:nvPr/>
-        </p:nvSpPr>
-        <p:spPr>
-          <a:xfrm>
-            <a:off x="640080" y="6446520"/>
-            <a:ext cx="8686800" cy="292608"/>
-          </a:xfrm>
-          <a:prstGeom prst="rect">
-            <a:avLst/>
-          </a:prstGeom>
-          <a:noFill/>
-          <a:ln/>
-        </p:spPr>
-        <p:txBody>
-          <a:bodyPr wrap="square" lIns="0" tIns="0" rIns="0" bIns="0" rtlCol="0" anchor="ctr"/>
-          <a:lstStyle/>
-          <a:p>
-            <a:pPr algn="l" indent="0" marL="0">
-              <a:buNone/>
-            </a:pPr>
-            <a:r>
-              <a:rPr lang="en-US" sz="900" dirty="0">
-                <a:solidFill>
-                  <a:srgbClr val="5D5D72"/>
-                </a:solidFill>
-                <a:latin typeface="Calibri" pitchFamily="34" charset="0"/>
-                <a:ea typeface="Calibri" pitchFamily="34" charset="-122"/>
-                <a:cs typeface="Calibri" pitchFamily="34" charset="-120"/>
-              </a:rPr>
-              <a:t>Usman Akram  •  COMSATS University Islamabad</a:t>
-            </a:r>
-            <a:endParaRPr lang="en-US" sz="900" dirty="0"/>
-          </a:p>
-        </p:txBody>
-      </p:sp>
-      <p:sp>
-        <p:nvSpPr>
-          <p:cNvPr id="14" name="Text 12"/>
-          <p:cNvSpPr txBox="1"/>
-          <p:nvPr/>
-        </p:nvSpPr>
-        <p:spPr>
-          <a:xfrm>
-            <a:off x="11155680" y="6446520"/>
-            <a:ext cx="457200" cy="292608"/>
-          </a:xfrm>
-          <a:prstGeom prst="rect">
-            <a:avLst/>
-          </a:prstGeom>
-          <a:noFill/>
-          <a:ln/>
-        </p:spPr>
-        <p:txBody>
-          <a:bodyPr wrap="square" lIns="0" tIns="0" rIns="0" bIns="0" rtlCol="0" anchor="ctr"/>
-          <a:lstStyle/>
-          <a:p>
-            <a:pPr algn="r" indent="0" marL="0">
-              <a:buNone/>
-            </a:pPr>
-            <a:r>
-              <a:rPr lang="en-US" sz="900" dirty="0">
-                <a:solidFill>
-                  <a:srgbClr val="5D5D72"/>
-                </a:solidFill>
-                <a:latin typeface="Calibri" pitchFamily="34" charset="0"/>
-                <a:ea typeface="Calibri" pitchFamily="34" charset="-122"/>
-                <a:cs typeface="Calibri" pitchFamily="34" charset="-120"/>
-              </a:rPr>
-              <a:t>24</a:t>
-            </a:r>
-            <a:endParaRPr lang="en-US" sz="900" dirty="0"/>
+          <p:cNvPr id="15" name="cuinotes-footer-mark"/>
+          <p:cNvSpPr txBox="1"/>
+          <p:nvPr/>
+        </p:nvSpPr>
+        <p:spPr>
+          <a:xfrm>
+            <a:off x="9951720" y="6455664"/>
+            <a:ext cx="2011680" cy="292608"/>
+          </a:xfrm>
+          <a:prstGeom prst="rect">
+            <a:avLst/>
+          </a:prstGeom>
+          <a:noFill/>
+        </p:spPr>
+        <p:txBody>
+          <a:bodyPr wrap="none" lIns="0" rIns="0" tIns="0" bIns="0">
+            <a:spAutoFit/>
+          </a:bodyPr>
+          <a:lstStyle/>
+          <a:p>
+            <a:pPr algn="r"/>
+            <a:r>
+              <a:rPr sz="1000">
+                <a:solidFill>
+                  <a:srgbClr val="8A939B"/>
+                </a:solidFill>
+                <a:hlinkClick r:id="rId3"/>
+              </a:rPr>
+              <a:t>cuinotes.com</a:t>
+            </a:r>
+            <a:r>
+              <a:rPr sz="1000">
+                <a:solidFill>
+                  <a:srgbClr val="8A939B"/>
+                </a:solidFill>
+              </a:rPr>
+              <a:t>  ·  24</a:t>
+            </a:r>
           </a:p>
         </p:txBody>
       </p:sp>
@@ -11615,6 +11208,10 @@
           </a:solidFill>
           <a:ln/>
         </p:spPr>
+        <p:txBody>
+          <a:bodyPr/>
+          <a:p/>
+        </p:txBody>
       </p:sp>
       <p:sp>
         <p:nvSpPr>
@@ -11889,79 +11486,44 @@
       </p:sp>
       <p:sp>
         <p:nvSpPr>
-          <p:cNvPr id="6" name="Text 4"/>
-          <p:cNvSpPr txBox="1"/>
-          <p:nvPr/>
-        </p:nvSpPr>
-        <p:spPr>
-          <a:xfrm>
-            <a:off x="640080" y="6446520"/>
-            <a:ext cx="8686800" cy="292608"/>
-          </a:xfrm>
-          <a:prstGeom prst="rect">
-            <a:avLst/>
-          </a:prstGeom>
-          <a:noFill/>
-          <a:ln/>
-        </p:spPr>
-        <p:txBody>
-          <a:bodyPr wrap="square" lIns="0" tIns="0" rIns="0" bIns="0" rtlCol="0" anchor="ctr"/>
-          <a:lstStyle/>
-          <a:p>
-            <a:pPr algn="l" indent="0" marL="0">
-              <a:buNone/>
-            </a:pPr>
-            <a:r>
-              <a:rPr lang="en-US" sz="900" dirty="0">
-                <a:solidFill>
-                  <a:srgbClr val="5D5D72"/>
-                </a:solidFill>
-                <a:latin typeface="Calibri" pitchFamily="34" charset="0"/>
-                <a:ea typeface="Calibri" pitchFamily="34" charset="-122"/>
-                <a:cs typeface="Calibri" pitchFamily="34" charset="-120"/>
-              </a:rPr>
-              <a:t>Usman Akram  •  COMSATS University Islamabad</a:t>
-            </a:r>
-            <a:endParaRPr lang="en-US" sz="900" dirty="0"/>
-          </a:p>
-        </p:txBody>
-      </p:sp>
-      <p:sp>
-        <p:nvSpPr>
-          <p:cNvPr id="7" name="Text 5"/>
-          <p:cNvSpPr txBox="1"/>
-          <p:nvPr/>
-        </p:nvSpPr>
-        <p:spPr>
-          <a:xfrm>
-            <a:off x="11155680" y="6446520"/>
-            <a:ext cx="457200" cy="292608"/>
-          </a:xfrm>
-          <a:prstGeom prst="rect">
-            <a:avLst/>
-          </a:prstGeom>
-          <a:noFill/>
-          <a:ln/>
-        </p:spPr>
-        <p:txBody>
-          <a:bodyPr wrap="square" lIns="0" tIns="0" rIns="0" bIns="0" rtlCol="0" anchor="ctr"/>
-          <a:lstStyle/>
-          <a:p>
-            <a:pPr algn="r" indent="0" marL="0">
-              <a:buNone/>
-            </a:pPr>
-            <a:r>
-              <a:rPr lang="en-US" sz="900" dirty="0">
-                <a:solidFill>
-                  <a:srgbClr val="5D5D72"/>
-                </a:solidFill>
-                <a:latin typeface="Calibri" pitchFamily="34" charset="0"/>
-                <a:ea typeface="Calibri" pitchFamily="34" charset="-122"/>
-                <a:cs typeface="Calibri" pitchFamily="34" charset="-120"/>
-              </a:rPr>
-              <a:t>25</a:t>
-            </a:r>
-            <a:endParaRPr lang="en-US" sz="900" dirty="0"/>
+          <p:cNvPr id="8" name="cuinotes-footer-mark"/>
+          <p:cNvSpPr txBox="1"/>
+          <p:nvPr/>
+        </p:nvSpPr>
+        <p:spPr>
+          <a:xfrm>
+            <a:off x="9951720" y="6455664"/>
+            <a:ext cx="2011680" cy="292608"/>
+          </a:xfrm>
+          <a:prstGeom prst="rect">
+            <a:avLst/>
+          </a:prstGeom>
+          <a:noFill/>
+        </p:spPr>
+        <p:txBody>
+          <a:bodyPr wrap="none" lIns="0" rIns="0" tIns="0" bIns="0">
+            <a:spAutoFit/>
+          </a:bodyPr>
+          <a:lstStyle/>
+          <a:p>
+            <a:pPr algn="r"/>
+            <a:r>
+              <a:rPr sz="1000">
+                <a:solidFill>
+                  <a:srgbClr val="8A939B"/>
+                </a:solidFill>
+                <a:hlinkClick r:id="rId3"/>
+              </a:rPr>
+              <a:t>cuinotes.com</a:t>
+            </a:r>
+            <a:r>
+              <a:rPr sz="1000">
+                <a:solidFill>
+                  <a:srgbClr val="8A939B"/>
+                </a:solidFill>
+              </a:rPr>
+              <a:t>  ·  25</a:t>
+            </a:r>
           </a:p>
         </p:txBody>
       </p:sp>
@@ -12101,6 +11663,10 @@
             <a:prstDash val="solid"/>
           </a:ln>
         </p:spPr>
+        <p:txBody>
+          <a:bodyPr/>
+          <a:p/>
+        </p:txBody>
       </p:sp>
       <p:sp>
         <p:nvSpPr>
@@ -12182,79 +11748,44 @@
       </p:sp>
       <p:sp>
         <p:nvSpPr>
-          <p:cNvPr id="7" name="Text 5"/>
-          <p:cNvSpPr txBox="1"/>
-          <p:nvPr/>
-        </p:nvSpPr>
-        <p:spPr>
-          <a:xfrm>
-            <a:off x="640080" y="6446520"/>
-            <a:ext cx="8686800" cy="292608"/>
-          </a:xfrm>
-          <a:prstGeom prst="rect">
-            <a:avLst/>
-          </a:prstGeom>
-          <a:noFill/>
-          <a:ln/>
-        </p:spPr>
-        <p:txBody>
-          <a:bodyPr wrap="square" lIns="0" tIns="0" rIns="0" bIns="0" rtlCol="0" anchor="ctr"/>
-          <a:lstStyle/>
-          <a:p>
-            <a:pPr algn="l" indent="0" marL="0">
-              <a:buNone/>
-            </a:pPr>
-            <a:r>
-              <a:rPr lang="en-US" sz="900" dirty="0">
-                <a:solidFill>
-                  <a:srgbClr val="5D5D72"/>
-                </a:solidFill>
-                <a:latin typeface="Calibri" pitchFamily="34" charset="0"/>
-                <a:ea typeface="Calibri" pitchFamily="34" charset="-122"/>
-                <a:cs typeface="Calibri" pitchFamily="34" charset="-120"/>
-              </a:rPr>
-              <a:t>Usman Akram  •  COMSATS University Islamabad</a:t>
-            </a:r>
-            <a:endParaRPr lang="en-US" sz="900" dirty="0"/>
-          </a:p>
-        </p:txBody>
-      </p:sp>
-      <p:sp>
-        <p:nvSpPr>
-          <p:cNvPr id="8" name="Text 6"/>
-          <p:cNvSpPr txBox="1"/>
-          <p:nvPr/>
-        </p:nvSpPr>
-        <p:spPr>
-          <a:xfrm>
-            <a:off x="11155680" y="6446520"/>
-            <a:ext cx="457200" cy="292608"/>
-          </a:xfrm>
-          <a:prstGeom prst="rect">
-            <a:avLst/>
-          </a:prstGeom>
-          <a:noFill/>
-          <a:ln/>
-        </p:spPr>
-        <p:txBody>
-          <a:bodyPr wrap="square" lIns="0" tIns="0" rIns="0" bIns="0" rtlCol="0" anchor="ctr"/>
-          <a:lstStyle/>
-          <a:p>
-            <a:pPr algn="r" indent="0" marL="0">
-              <a:buNone/>
-            </a:pPr>
-            <a:r>
-              <a:rPr lang="en-US" sz="900" dirty="0">
-                <a:solidFill>
-                  <a:srgbClr val="5D5D72"/>
-                </a:solidFill>
-                <a:latin typeface="Calibri" pitchFamily="34" charset="0"/>
-                <a:ea typeface="Calibri" pitchFamily="34" charset="-122"/>
-                <a:cs typeface="Calibri" pitchFamily="34" charset="-120"/>
-              </a:rPr>
-              <a:t>26</a:t>
-            </a:r>
-            <a:endParaRPr lang="en-US" sz="900" dirty="0"/>
+          <p:cNvPr id="9" name="cuinotes-footer-mark"/>
+          <p:cNvSpPr txBox="1"/>
+          <p:nvPr/>
+        </p:nvSpPr>
+        <p:spPr>
+          <a:xfrm>
+            <a:off x="9951720" y="6455664"/>
+            <a:ext cx="2011680" cy="292608"/>
+          </a:xfrm>
+          <a:prstGeom prst="rect">
+            <a:avLst/>
+          </a:prstGeom>
+          <a:noFill/>
+        </p:spPr>
+        <p:txBody>
+          <a:bodyPr wrap="none" lIns="0" rIns="0" tIns="0" bIns="0">
+            <a:spAutoFit/>
+          </a:bodyPr>
+          <a:lstStyle/>
+          <a:p>
+            <a:pPr algn="r"/>
+            <a:r>
+              <a:rPr sz="1000">
+                <a:solidFill>
+                  <a:srgbClr val="8A939B"/>
+                </a:solidFill>
+                <a:hlinkClick r:id="rId3"/>
+              </a:rPr>
+              <a:t>cuinotes.com</a:t>
+            </a:r>
+            <a:r>
+              <a:rPr sz="1000">
+                <a:solidFill>
+                  <a:srgbClr val="8A939B"/>
+                </a:solidFill>
+              </a:rPr>
+              <a:t>  ·  26</a:t>
+            </a:r>
           </a:p>
         </p:txBody>
       </p:sp>
@@ -12387,6 +11918,10 @@
           </a:solidFill>
           <a:ln/>
         </p:spPr>
+        <p:txBody>
+          <a:bodyPr/>
+          <a:p/>
+        </p:txBody>
       </p:sp>
       <p:sp>
         <p:nvSpPr>
@@ -12485,6 +12020,10 @@
           </a:solidFill>
           <a:ln/>
         </p:spPr>
+        <p:txBody>
+          <a:bodyPr/>
+          <a:p/>
+        </p:txBody>
       </p:sp>
       <p:sp>
         <p:nvSpPr>
@@ -12583,6 +12122,10 @@
           </a:solidFill>
           <a:ln/>
         </p:spPr>
+        <p:txBody>
+          <a:bodyPr/>
+          <a:p/>
+        </p:txBody>
       </p:sp>
       <p:sp>
         <p:nvSpPr>
@@ -12664,79 +12207,44 @@
       </p:sp>
       <p:sp>
         <p:nvSpPr>
-          <p:cNvPr id="13" name="Text 11"/>
-          <p:cNvSpPr txBox="1"/>
-          <p:nvPr/>
-        </p:nvSpPr>
-        <p:spPr>
-          <a:xfrm>
-            <a:off x="640080" y="6446520"/>
-            <a:ext cx="8686800" cy="292608"/>
-          </a:xfrm>
-          <a:prstGeom prst="rect">
-            <a:avLst/>
-          </a:prstGeom>
-          <a:noFill/>
-          <a:ln/>
-        </p:spPr>
-        <p:txBody>
-          <a:bodyPr wrap="square" lIns="0" tIns="0" rIns="0" bIns="0" rtlCol="0" anchor="ctr"/>
-          <a:lstStyle/>
-          <a:p>
-            <a:pPr algn="l" indent="0" marL="0">
-              <a:buNone/>
-            </a:pPr>
-            <a:r>
-              <a:rPr lang="en-US" sz="900" dirty="0">
-                <a:solidFill>
-                  <a:srgbClr val="5D5D72"/>
-                </a:solidFill>
-                <a:latin typeface="Calibri" pitchFamily="34" charset="0"/>
-                <a:ea typeface="Calibri" pitchFamily="34" charset="-122"/>
-                <a:cs typeface="Calibri" pitchFamily="34" charset="-120"/>
-              </a:rPr>
-              <a:t>Usman Akram  •  COMSATS University Islamabad</a:t>
-            </a:r>
-            <a:endParaRPr lang="en-US" sz="900" dirty="0"/>
-          </a:p>
-        </p:txBody>
-      </p:sp>
-      <p:sp>
-        <p:nvSpPr>
-          <p:cNvPr id="14" name="Text 12"/>
-          <p:cNvSpPr txBox="1"/>
-          <p:nvPr/>
-        </p:nvSpPr>
-        <p:spPr>
-          <a:xfrm>
-            <a:off x="11155680" y="6446520"/>
-            <a:ext cx="457200" cy="292608"/>
-          </a:xfrm>
-          <a:prstGeom prst="rect">
-            <a:avLst/>
-          </a:prstGeom>
-          <a:noFill/>
-          <a:ln/>
-        </p:spPr>
-        <p:txBody>
-          <a:bodyPr wrap="square" lIns="0" tIns="0" rIns="0" bIns="0" rtlCol="0" anchor="ctr"/>
-          <a:lstStyle/>
-          <a:p>
-            <a:pPr algn="r" indent="0" marL="0">
-              <a:buNone/>
-            </a:pPr>
-            <a:r>
-              <a:rPr lang="en-US" sz="900" dirty="0">
-                <a:solidFill>
-                  <a:srgbClr val="5D5D72"/>
-                </a:solidFill>
-                <a:latin typeface="Calibri" pitchFamily="34" charset="0"/>
-                <a:ea typeface="Calibri" pitchFamily="34" charset="-122"/>
-                <a:cs typeface="Calibri" pitchFamily="34" charset="-120"/>
-              </a:rPr>
-              <a:t>27</a:t>
-            </a:r>
-            <a:endParaRPr lang="en-US" sz="900" dirty="0"/>
+          <p:cNvPr id="15" name="cuinotes-footer-mark"/>
+          <p:cNvSpPr txBox="1"/>
+          <p:nvPr/>
+        </p:nvSpPr>
+        <p:spPr>
+          <a:xfrm>
+            <a:off x="9951720" y="6455664"/>
+            <a:ext cx="2011680" cy="292608"/>
+          </a:xfrm>
+          <a:prstGeom prst="rect">
+            <a:avLst/>
+          </a:prstGeom>
+          <a:noFill/>
+        </p:spPr>
+        <p:txBody>
+          <a:bodyPr wrap="none" lIns="0" rIns="0" tIns="0" bIns="0">
+            <a:spAutoFit/>
+          </a:bodyPr>
+          <a:lstStyle/>
+          <a:p>
+            <a:pPr algn="r"/>
+            <a:r>
+              <a:rPr sz="1000">
+                <a:solidFill>
+                  <a:srgbClr val="8A939B"/>
+                </a:solidFill>
+                <a:hlinkClick r:id="rId3"/>
+              </a:rPr>
+              <a:t>cuinotes.com</a:t>
+            </a:r>
+            <a:r>
+              <a:rPr sz="1000">
+                <a:solidFill>
+                  <a:srgbClr val="8A939B"/>
+                </a:solidFill>
+              </a:rPr>
+              <a:t>  ·  27</a:t>
+            </a:r>
           </a:p>
         </p:txBody>
       </p:sp>
@@ -13572,79 +13080,44 @@
       </p:graphicFrame>
       <p:sp>
         <p:nvSpPr>
-          <p:cNvPr id="5" name="Text 2"/>
-          <p:cNvSpPr txBox="1"/>
-          <p:nvPr/>
-        </p:nvSpPr>
-        <p:spPr>
-          <a:xfrm>
-            <a:off x="640080" y="6446520"/>
-            <a:ext cx="8686800" cy="292608"/>
-          </a:xfrm>
-          <a:prstGeom prst="rect">
-            <a:avLst/>
-          </a:prstGeom>
-          <a:noFill/>
-          <a:ln/>
-        </p:spPr>
-        <p:txBody>
-          <a:bodyPr wrap="square" lIns="0" tIns="0" rIns="0" bIns="0" rtlCol="0" anchor="ctr"/>
-          <a:lstStyle/>
-          <a:p>
-            <a:pPr algn="l" indent="0" marL="0">
-              <a:buNone/>
-            </a:pPr>
-            <a:r>
-              <a:rPr lang="en-US" sz="900" dirty="0">
-                <a:solidFill>
-                  <a:srgbClr val="5D5D72"/>
-                </a:solidFill>
-                <a:latin typeface="Calibri" pitchFamily="34" charset="0"/>
-                <a:ea typeface="Calibri" pitchFamily="34" charset="-122"/>
-                <a:cs typeface="Calibri" pitchFamily="34" charset="-120"/>
-              </a:rPr>
-              <a:t>Usman Akram  •  COMSATS University Islamabad</a:t>
-            </a:r>
-            <a:endParaRPr lang="en-US" sz="900" dirty="0"/>
-          </a:p>
-        </p:txBody>
-      </p:sp>
-      <p:sp>
-        <p:nvSpPr>
-          <p:cNvPr id="6" name="Text 3"/>
-          <p:cNvSpPr txBox="1"/>
-          <p:nvPr/>
-        </p:nvSpPr>
-        <p:spPr>
-          <a:xfrm>
-            <a:off x="11155680" y="6446520"/>
-            <a:ext cx="457200" cy="292608"/>
-          </a:xfrm>
-          <a:prstGeom prst="rect">
-            <a:avLst/>
-          </a:prstGeom>
-          <a:noFill/>
-          <a:ln/>
-        </p:spPr>
-        <p:txBody>
-          <a:bodyPr wrap="square" lIns="0" tIns="0" rIns="0" bIns="0" rtlCol="0" anchor="ctr"/>
-          <a:lstStyle/>
-          <a:p>
-            <a:pPr algn="r" indent="0" marL="0">
-              <a:buNone/>
-            </a:pPr>
-            <a:r>
-              <a:rPr lang="en-US" sz="900" dirty="0">
-                <a:solidFill>
-                  <a:srgbClr val="5D5D72"/>
-                </a:solidFill>
-                <a:latin typeface="Calibri" pitchFamily="34" charset="0"/>
-                <a:ea typeface="Calibri" pitchFamily="34" charset="-122"/>
-                <a:cs typeface="Calibri" pitchFamily="34" charset="-120"/>
-              </a:rPr>
-              <a:t>28</a:t>
-            </a:r>
-            <a:endParaRPr lang="en-US" sz="900" dirty="0"/>
+          <p:cNvPr id="30" name="cuinotes-footer-mark"/>
+          <p:cNvSpPr txBox="1"/>
+          <p:nvPr/>
+        </p:nvSpPr>
+        <p:spPr>
+          <a:xfrm>
+            <a:off x="9951720" y="6455664"/>
+            <a:ext cx="2011680" cy="292608"/>
+          </a:xfrm>
+          <a:prstGeom prst="rect">
+            <a:avLst/>
+          </a:prstGeom>
+          <a:noFill/>
+        </p:spPr>
+        <p:txBody>
+          <a:bodyPr wrap="none" lIns="0" rIns="0" tIns="0" bIns="0">
+            <a:spAutoFit/>
+          </a:bodyPr>
+          <a:lstStyle/>
+          <a:p>
+            <a:pPr algn="r"/>
+            <a:r>
+              <a:rPr sz="1000">
+                <a:solidFill>
+                  <a:srgbClr val="8A939B"/>
+                </a:solidFill>
+                <a:hlinkClick r:id="rId3"/>
+              </a:rPr>
+              <a:t>cuinotes.com</a:t>
+            </a:r>
+            <a:r>
+              <a:rPr sz="1000">
+                <a:solidFill>
+                  <a:srgbClr val="8A939B"/>
+                </a:solidFill>
+              </a:rPr>
+              <a:t>  ·  28</a:t>
+            </a:r>
           </a:p>
         </p:txBody>
       </p:sp>
@@ -13777,6 +13250,10 @@
           </a:solidFill>
           <a:ln/>
         </p:spPr>
+        <p:txBody>
+          <a:bodyPr/>
+          <a:p/>
+        </p:txBody>
       </p:sp>
       <p:sp>
         <p:nvSpPr>
@@ -13875,6 +13352,10 @@
           </a:solidFill>
           <a:ln/>
         </p:spPr>
+        <p:txBody>
+          <a:bodyPr/>
+          <a:p/>
+        </p:txBody>
       </p:sp>
       <p:sp>
         <p:nvSpPr>
@@ -13973,6 +13454,10 @@
           </a:solidFill>
           <a:ln/>
         </p:spPr>
+        <p:txBody>
+          <a:bodyPr/>
+          <a:p/>
+        </p:txBody>
       </p:sp>
       <p:sp>
         <p:nvSpPr>
@@ -14054,79 +13539,44 @@
       </p:sp>
       <p:sp>
         <p:nvSpPr>
-          <p:cNvPr id="13" name="Text 11"/>
-          <p:cNvSpPr txBox="1"/>
-          <p:nvPr/>
-        </p:nvSpPr>
-        <p:spPr>
-          <a:xfrm>
-            <a:off x="640080" y="6446520"/>
-            <a:ext cx="8686800" cy="292608"/>
-          </a:xfrm>
-          <a:prstGeom prst="rect">
-            <a:avLst/>
-          </a:prstGeom>
-          <a:noFill/>
-          <a:ln/>
-        </p:spPr>
-        <p:txBody>
-          <a:bodyPr wrap="square" lIns="0" tIns="0" rIns="0" bIns="0" rtlCol="0" anchor="ctr"/>
-          <a:lstStyle/>
-          <a:p>
-            <a:pPr algn="l" indent="0" marL="0">
-              <a:buNone/>
-            </a:pPr>
-            <a:r>
-              <a:rPr lang="en-US" sz="900" dirty="0">
-                <a:solidFill>
-                  <a:srgbClr val="5D5D72"/>
-                </a:solidFill>
-                <a:latin typeface="Calibri" pitchFamily="34" charset="0"/>
-                <a:ea typeface="Calibri" pitchFamily="34" charset="-122"/>
-                <a:cs typeface="Calibri" pitchFamily="34" charset="-120"/>
-              </a:rPr>
-              <a:t>Usman Akram  •  COMSATS University Islamabad</a:t>
-            </a:r>
-            <a:endParaRPr lang="en-US" sz="900" dirty="0"/>
-          </a:p>
-        </p:txBody>
-      </p:sp>
-      <p:sp>
-        <p:nvSpPr>
-          <p:cNvPr id="14" name="Text 12"/>
-          <p:cNvSpPr txBox="1"/>
-          <p:nvPr/>
-        </p:nvSpPr>
-        <p:spPr>
-          <a:xfrm>
-            <a:off x="11155680" y="6446520"/>
-            <a:ext cx="457200" cy="292608"/>
-          </a:xfrm>
-          <a:prstGeom prst="rect">
-            <a:avLst/>
-          </a:prstGeom>
-          <a:noFill/>
-          <a:ln/>
-        </p:spPr>
-        <p:txBody>
-          <a:bodyPr wrap="square" lIns="0" tIns="0" rIns="0" bIns="0" rtlCol="0" anchor="ctr"/>
-          <a:lstStyle/>
-          <a:p>
-            <a:pPr algn="r" indent="0" marL="0">
-              <a:buNone/>
-            </a:pPr>
-            <a:r>
-              <a:rPr lang="en-US" sz="900" dirty="0">
-                <a:solidFill>
-                  <a:srgbClr val="5D5D72"/>
-                </a:solidFill>
-                <a:latin typeface="Calibri" pitchFamily="34" charset="0"/>
-                <a:ea typeface="Calibri" pitchFamily="34" charset="-122"/>
-                <a:cs typeface="Calibri" pitchFamily="34" charset="-120"/>
-              </a:rPr>
-              <a:t>29</a:t>
-            </a:r>
-            <a:endParaRPr lang="en-US" sz="900" dirty="0"/>
+          <p:cNvPr id="15" name="cuinotes-footer-mark"/>
+          <p:cNvSpPr txBox="1"/>
+          <p:nvPr/>
+        </p:nvSpPr>
+        <p:spPr>
+          <a:xfrm>
+            <a:off x="9951720" y="6455664"/>
+            <a:ext cx="2011680" cy="292608"/>
+          </a:xfrm>
+          <a:prstGeom prst="rect">
+            <a:avLst/>
+          </a:prstGeom>
+          <a:noFill/>
+        </p:spPr>
+        <p:txBody>
+          <a:bodyPr wrap="none" lIns="0" rIns="0" tIns="0" bIns="0">
+            <a:spAutoFit/>
+          </a:bodyPr>
+          <a:lstStyle/>
+          <a:p>
+            <a:pPr algn="r"/>
+            <a:r>
+              <a:rPr sz="1000">
+                <a:solidFill>
+                  <a:srgbClr val="8A939B"/>
+                </a:solidFill>
+                <a:hlinkClick r:id="rId3"/>
+              </a:rPr>
+              <a:t>cuinotes.com</a:t>
+            </a:r>
+            <a:r>
+              <a:rPr sz="1000">
+                <a:solidFill>
+                  <a:srgbClr val="8A939B"/>
+                </a:solidFill>
+              </a:rPr>
+              <a:t>  ·  29</a:t>
+            </a:r>
           </a:p>
         </p:txBody>
       </p:sp>
@@ -14266,6 +13716,10 @@
             <a:prstDash val="solid"/>
           </a:ln>
         </p:spPr>
+        <p:txBody>
+          <a:bodyPr/>
+          <a:p/>
+        </p:txBody>
       </p:sp>
       <p:sp>
         <p:nvSpPr>
@@ -14347,79 +13801,44 @@
       </p:sp>
       <p:sp>
         <p:nvSpPr>
-          <p:cNvPr id="7" name="Text 5"/>
-          <p:cNvSpPr txBox="1"/>
-          <p:nvPr/>
-        </p:nvSpPr>
-        <p:spPr>
-          <a:xfrm>
-            <a:off x="640080" y="6446520"/>
-            <a:ext cx="8686800" cy="292608"/>
-          </a:xfrm>
-          <a:prstGeom prst="rect">
-            <a:avLst/>
-          </a:prstGeom>
-          <a:noFill/>
-          <a:ln/>
-        </p:spPr>
-        <p:txBody>
-          <a:bodyPr wrap="square" lIns="0" tIns="0" rIns="0" bIns="0" rtlCol="0" anchor="ctr"/>
-          <a:lstStyle/>
-          <a:p>
-            <a:pPr algn="l" indent="0" marL="0">
-              <a:buNone/>
-            </a:pPr>
-            <a:r>
-              <a:rPr lang="en-US" sz="900" dirty="0">
-                <a:solidFill>
-                  <a:srgbClr val="5D5D72"/>
-                </a:solidFill>
-                <a:latin typeface="Calibri" pitchFamily="34" charset="0"/>
-                <a:ea typeface="Calibri" pitchFamily="34" charset="-122"/>
-                <a:cs typeface="Calibri" pitchFamily="34" charset="-120"/>
-              </a:rPr>
-              <a:t>Usman Akram  •  COMSATS University Islamabad</a:t>
-            </a:r>
-            <a:endParaRPr lang="en-US" sz="900" dirty="0"/>
-          </a:p>
-        </p:txBody>
-      </p:sp>
-      <p:sp>
-        <p:nvSpPr>
-          <p:cNvPr id="8" name="Text 6"/>
-          <p:cNvSpPr txBox="1"/>
-          <p:nvPr/>
-        </p:nvSpPr>
-        <p:spPr>
-          <a:xfrm>
-            <a:off x="11155680" y="6446520"/>
-            <a:ext cx="457200" cy="292608"/>
-          </a:xfrm>
-          <a:prstGeom prst="rect">
-            <a:avLst/>
-          </a:prstGeom>
-          <a:noFill/>
-          <a:ln/>
-        </p:spPr>
-        <p:txBody>
-          <a:bodyPr wrap="square" lIns="0" tIns="0" rIns="0" bIns="0" rtlCol="0" anchor="ctr"/>
-          <a:lstStyle/>
-          <a:p>
-            <a:pPr algn="r" indent="0" marL="0">
-              <a:buNone/>
-            </a:pPr>
-            <a:r>
-              <a:rPr lang="en-US" sz="900" dirty="0">
-                <a:solidFill>
-                  <a:srgbClr val="5D5D72"/>
-                </a:solidFill>
-                <a:latin typeface="Calibri" pitchFamily="34" charset="0"/>
-                <a:ea typeface="Calibri" pitchFamily="34" charset="-122"/>
-                <a:cs typeface="Calibri" pitchFamily="34" charset="-120"/>
-              </a:rPr>
-              <a:t>3</a:t>
-            </a:r>
-            <a:endParaRPr lang="en-US" sz="900" dirty="0"/>
+          <p:cNvPr id="9" name="cuinotes-footer-mark"/>
+          <p:cNvSpPr txBox="1"/>
+          <p:nvPr/>
+        </p:nvSpPr>
+        <p:spPr>
+          <a:xfrm>
+            <a:off x="9951720" y="6455664"/>
+            <a:ext cx="2011680" cy="292608"/>
+          </a:xfrm>
+          <a:prstGeom prst="rect">
+            <a:avLst/>
+          </a:prstGeom>
+          <a:noFill/>
+        </p:spPr>
+        <p:txBody>
+          <a:bodyPr wrap="none" lIns="0" rIns="0" tIns="0" bIns="0">
+            <a:spAutoFit/>
+          </a:bodyPr>
+          <a:lstStyle/>
+          <a:p>
+            <a:pPr algn="r"/>
+            <a:r>
+              <a:rPr sz="1000">
+                <a:solidFill>
+                  <a:srgbClr val="8A939B"/>
+                </a:solidFill>
+                <a:hlinkClick r:id="rId3"/>
+              </a:rPr>
+              <a:t>cuinotes.com</a:t>
+            </a:r>
+            <a:r>
+              <a:rPr sz="1000">
+                <a:solidFill>
+                  <a:srgbClr val="8A939B"/>
+                </a:solidFill>
+              </a:rPr>
+              <a:t>  ·  3</a:t>
+            </a:r>
           </a:p>
         </p:txBody>
       </p:sp>
@@ -14554,6 +13973,10 @@
           </a:solidFill>
           <a:ln/>
         </p:spPr>
+        <p:txBody>
+          <a:bodyPr/>
+          <a:p/>
+        </p:txBody>
       </p:sp>
       <p:sp>
         <p:nvSpPr>
@@ -14767,79 +14190,44 @@
       </p:sp>
       <p:sp>
         <p:nvSpPr>
-          <p:cNvPr id="7" name="Text 5"/>
-          <p:cNvSpPr txBox="1"/>
-          <p:nvPr/>
-        </p:nvSpPr>
-        <p:spPr>
-          <a:xfrm>
-            <a:off x="640080" y="6446520"/>
-            <a:ext cx="8686800" cy="292608"/>
-          </a:xfrm>
-          <a:prstGeom prst="rect">
-            <a:avLst/>
-          </a:prstGeom>
-          <a:noFill/>
-          <a:ln/>
-        </p:spPr>
-        <p:txBody>
-          <a:bodyPr wrap="square" lIns="0" tIns="0" rIns="0" bIns="0" rtlCol="0" anchor="ctr"/>
-          <a:lstStyle/>
-          <a:p>
-            <a:pPr algn="l" indent="0" marL="0">
-              <a:buNone/>
-            </a:pPr>
-            <a:r>
-              <a:rPr lang="en-US" sz="900" dirty="0">
-                <a:solidFill>
-                  <a:srgbClr val="5D5D72"/>
-                </a:solidFill>
-                <a:latin typeface="Calibri" pitchFamily="34" charset="0"/>
-                <a:ea typeface="Calibri" pitchFamily="34" charset="-122"/>
-                <a:cs typeface="Calibri" pitchFamily="34" charset="-120"/>
-              </a:rPr>
-              <a:t>Usman Akram  •  COMSATS University Islamabad</a:t>
-            </a:r>
-            <a:endParaRPr lang="en-US" sz="900" dirty="0"/>
-          </a:p>
-        </p:txBody>
-      </p:sp>
-      <p:sp>
-        <p:nvSpPr>
-          <p:cNvPr id="8" name="Text 6"/>
-          <p:cNvSpPr txBox="1"/>
-          <p:nvPr/>
-        </p:nvSpPr>
-        <p:spPr>
-          <a:xfrm>
-            <a:off x="11155680" y="6446520"/>
-            <a:ext cx="457200" cy="292608"/>
-          </a:xfrm>
-          <a:prstGeom prst="rect">
-            <a:avLst/>
-          </a:prstGeom>
-          <a:noFill/>
-          <a:ln/>
-        </p:spPr>
-        <p:txBody>
-          <a:bodyPr wrap="square" lIns="0" tIns="0" rIns="0" bIns="0" rtlCol="0" anchor="ctr"/>
-          <a:lstStyle/>
-          <a:p>
-            <a:pPr algn="r" indent="0" marL="0">
-              <a:buNone/>
-            </a:pPr>
-            <a:r>
-              <a:rPr lang="en-US" sz="900" dirty="0">
-                <a:solidFill>
-                  <a:srgbClr val="5D5D72"/>
-                </a:solidFill>
-                <a:latin typeface="Calibri" pitchFamily="34" charset="0"/>
-                <a:ea typeface="Calibri" pitchFamily="34" charset="-122"/>
-                <a:cs typeface="Calibri" pitchFamily="34" charset="-120"/>
-              </a:rPr>
-              <a:t>30</a:t>
-            </a:r>
-            <a:endParaRPr lang="en-US" sz="900" dirty="0"/>
+          <p:cNvPr id="9" name="cuinotes-footer-mark"/>
+          <p:cNvSpPr txBox="1"/>
+          <p:nvPr/>
+        </p:nvSpPr>
+        <p:spPr>
+          <a:xfrm>
+            <a:off x="9951720" y="6455664"/>
+            <a:ext cx="2011680" cy="292608"/>
+          </a:xfrm>
+          <a:prstGeom prst="rect">
+            <a:avLst/>
+          </a:prstGeom>
+          <a:noFill/>
+        </p:spPr>
+        <p:txBody>
+          <a:bodyPr wrap="none" lIns="0" rIns="0" tIns="0" bIns="0">
+            <a:spAutoFit/>
+          </a:bodyPr>
+          <a:lstStyle/>
+          <a:p>
+            <a:pPr algn="r"/>
+            <a:r>
+              <a:rPr sz="1000">
+                <a:solidFill>
+                  <a:srgbClr val="8A939B"/>
+                </a:solidFill>
+                <a:hlinkClick r:id="rId3"/>
+              </a:rPr>
+              <a:t>cuinotes.com</a:t>
+            </a:r>
+            <a:r>
+              <a:rPr sz="1000">
+                <a:solidFill>
+                  <a:srgbClr val="8A939B"/>
+                </a:solidFill>
+              </a:rPr>
+              <a:t>  ·  30</a:t>
+            </a:r>
           </a:p>
         </p:txBody>
       </p:sp>
@@ -14972,6 +14360,10 @@
           </a:solidFill>
           <a:ln/>
         </p:spPr>
+        <p:txBody>
+          <a:bodyPr/>
+          <a:p/>
+        </p:txBody>
       </p:sp>
       <p:sp>
         <p:nvSpPr>
@@ -15070,6 +14462,10 @@
           </a:solidFill>
           <a:ln/>
         </p:spPr>
+        <p:txBody>
+          <a:bodyPr/>
+          <a:p/>
+        </p:txBody>
       </p:sp>
       <p:sp>
         <p:nvSpPr>
@@ -15168,6 +14564,10 @@
           </a:solidFill>
           <a:ln/>
         </p:spPr>
+        <p:txBody>
+          <a:bodyPr/>
+          <a:p/>
+        </p:txBody>
       </p:sp>
       <p:sp>
         <p:nvSpPr>
@@ -15249,79 +14649,44 @@
       </p:sp>
       <p:sp>
         <p:nvSpPr>
-          <p:cNvPr id="13" name="Text 11"/>
-          <p:cNvSpPr txBox="1"/>
-          <p:nvPr/>
-        </p:nvSpPr>
-        <p:spPr>
-          <a:xfrm>
-            <a:off x="640080" y="6446520"/>
-            <a:ext cx="8686800" cy="292608"/>
-          </a:xfrm>
-          <a:prstGeom prst="rect">
-            <a:avLst/>
-          </a:prstGeom>
-          <a:noFill/>
-          <a:ln/>
-        </p:spPr>
-        <p:txBody>
-          <a:bodyPr wrap="square" lIns="0" tIns="0" rIns="0" bIns="0" rtlCol="0" anchor="ctr"/>
-          <a:lstStyle/>
-          <a:p>
-            <a:pPr algn="l" indent="0" marL="0">
-              <a:buNone/>
-            </a:pPr>
-            <a:r>
-              <a:rPr lang="en-US" sz="900" dirty="0">
-                <a:solidFill>
-                  <a:srgbClr val="5D5D72"/>
-                </a:solidFill>
-                <a:latin typeface="Calibri" pitchFamily="34" charset="0"/>
-                <a:ea typeface="Calibri" pitchFamily="34" charset="-122"/>
-                <a:cs typeface="Calibri" pitchFamily="34" charset="-120"/>
-              </a:rPr>
-              <a:t>Usman Akram  •  COMSATS University Islamabad</a:t>
-            </a:r>
-            <a:endParaRPr lang="en-US" sz="900" dirty="0"/>
-          </a:p>
-        </p:txBody>
-      </p:sp>
-      <p:sp>
-        <p:nvSpPr>
-          <p:cNvPr id="14" name="Text 12"/>
-          <p:cNvSpPr txBox="1"/>
-          <p:nvPr/>
-        </p:nvSpPr>
-        <p:spPr>
-          <a:xfrm>
-            <a:off x="11155680" y="6446520"/>
-            <a:ext cx="457200" cy="292608"/>
-          </a:xfrm>
-          <a:prstGeom prst="rect">
-            <a:avLst/>
-          </a:prstGeom>
-          <a:noFill/>
-          <a:ln/>
-        </p:spPr>
-        <p:txBody>
-          <a:bodyPr wrap="square" lIns="0" tIns="0" rIns="0" bIns="0" rtlCol="0" anchor="ctr"/>
-          <a:lstStyle/>
-          <a:p>
-            <a:pPr algn="r" indent="0" marL="0">
-              <a:buNone/>
-            </a:pPr>
-            <a:r>
-              <a:rPr lang="en-US" sz="900" dirty="0">
-                <a:solidFill>
-                  <a:srgbClr val="5D5D72"/>
-                </a:solidFill>
-                <a:latin typeface="Calibri" pitchFamily="34" charset="0"/>
-                <a:ea typeface="Calibri" pitchFamily="34" charset="-122"/>
-                <a:cs typeface="Calibri" pitchFamily="34" charset="-120"/>
-              </a:rPr>
-              <a:t>31</a:t>
-            </a:r>
-            <a:endParaRPr lang="en-US" sz="900" dirty="0"/>
+          <p:cNvPr id="15" name="cuinotes-footer-mark"/>
+          <p:cNvSpPr txBox="1"/>
+          <p:nvPr/>
+        </p:nvSpPr>
+        <p:spPr>
+          <a:xfrm>
+            <a:off x="9951720" y="6455664"/>
+            <a:ext cx="2011680" cy="292608"/>
+          </a:xfrm>
+          <a:prstGeom prst="rect">
+            <a:avLst/>
+          </a:prstGeom>
+          <a:noFill/>
+        </p:spPr>
+        <p:txBody>
+          <a:bodyPr wrap="none" lIns="0" rIns="0" tIns="0" bIns="0">
+            <a:spAutoFit/>
+          </a:bodyPr>
+          <a:lstStyle/>
+          <a:p>
+            <a:pPr algn="r"/>
+            <a:r>
+              <a:rPr sz="1000">
+                <a:solidFill>
+                  <a:srgbClr val="8A939B"/>
+                </a:solidFill>
+                <a:hlinkClick r:id="rId3"/>
+              </a:rPr>
+              <a:t>cuinotes.com</a:t>
+            </a:r>
+            <a:r>
+              <a:rPr sz="1000">
+                <a:solidFill>
+                  <a:srgbClr val="8A939B"/>
+                </a:solidFill>
+              </a:rPr>
+              <a:t>  ·  31</a:t>
+            </a:r>
           </a:p>
         </p:txBody>
       </p:sp>
@@ -15456,6 +14821,10 @@
           </a:solidFill>
           <a:ln/>
         </p:spPr>
+        <p:txBody>
+          <a:bodyPr/>
+          <a:p/>
+        </p:txBody>
       </p:sp>
       <p:sp>
         <p:nvSpPr>
@@ -15639,79 +15008,44 @@
       </p:sp>
       <p:sp>
         <p:nvSpPr>
-          <p:cNvPr id="6" name="Text 4"/>
-          <p:cNvSpPr txBox="1"/>
-          <p:nvPr/>
-        </p:nvSpPr>
-        <p:spPr>
-          <a:xfrm>
-            <a:off x="640080" y="6446520"/>
-            <a:ext cx="8686800" cy="292608"/>
-          </a:xfrm>
-          <a:prstGeom prst="rect">
-            <a:avLst/>
-          </a:prstGeom>
-          <a:noFill/>
-          <a:ln/>
-        </p:spPr>
-        <p:txBody>
-          <a:bodyPr wrap="square" lIns="0" tIns="0" rIns="0" bIns="0" rtlCol="0" anchor="ctr"/>
-          <a:lstStyle/>
-          <a:p>
-            <a:pPr algn="l" indent="0" marL="0">
-              <a:buNone/>
-            </a:pPr>
-            <a:r>
-              <a:rPr lang="en-US" sz="900" dirty="0">
-                <a:solidFill>
-                  <a:srgbClr val="5D5D72"/>
-                </a:solidFill>
-                <a:latin typeface="Calibri" pitchFamily="34" charset="0"/>
-                <a:ea typeface="Calibri" pitchFamily="34" charset="-122"/>
-                <a:cs typeface="Calibri" pitchFamily="34" charset="-120"/>
-              </a:rPr>
-              <a:t>Usman Akram  •  COMSATS University Islamabad</a:t>
-            </a:r>
-            <a:endParaRPr lang="en-US" sz="900" dirty="0"/>
-          </a:p>
-        </p:txBody>
-      </p:sp>
-      <p:sp>
-        <p:nvSpPr>
-          <p:cNvPr id="7" name="Text 5"/>
-          <p:cNvSpPr txBox="1"/>
-          <p:nvPr/>
-        </p:nvSpPr>
-        <p:spPr>
-          <a:xfrm>
-            <a:off x="11155680" y="6446520"/>
-            <a:ext cx="457200" cy="292608"/>
-          </a:xfrm>
-          <a:prstGeom prst="rect">
-            <a:avLst/>
-          </a:prstGeom>
-          <a:noFill/>
-          <a:ln/>
-        </p:spPr>
-        <p:txBody>
-          <a:bodyPr wrap="square" lIns="0" tIns="0" rIns="0" bIns="0" rtlCol="0" anchor="ctr"/>
-          <a:lstStyle/>
-          <a:p>
-            <a:pPr algn="r" indent="0" marL="0">
-              <a:buNone/>
-            </a:pPr>
-            <a:r>
-              <a:rPr lang="en-US" sz="900" dirty="0">
-                <a:solidFill>
-                  <a:srgbClr val="5D5D72"/>
-                </a:solidFill>
-                <a:latin typeface="Calibri" pitchFamily="34" charset="0"/>
-                <a:ea typeface="Calibri" pitchFamily="34" charset="-122"/>
-                <a:cs typeface="Calibri" pitchFamily="34" charset="-120"/>
-              </a:rPr>
-              <a:t>32</a:t>
-            </a:r>
-            <a:endParaRPr lang="en-US" sz="900" dirty="0"/>
+          <p:cNvPr id="8" name="cuinotes-footer-mark"/>
+          <p:cNvSpPr txBox="1"/>
+          <p:nvPr/>
+        </p:nvSpPr>
+        <p:spPr>
+          <a:xfrm>
+            <a:off x="9951720" y="6455664"/>
+            <a:ext cx="2011680" cy="292608"/>
+          </a:xfrm>
+          <a:prstGeom prst="rect">
+            <a:avLst/>
+          </a:prstGeom>
+          <a:noFill/>
+        </p:spPr>
+        <p:txBody>
+          <a:bodyPr wrap="none" lIns="0" rIns="0" tIns="0" bIns="0">
+            <a:spAutoFit/>
+          </a:bodyPr>
+          <a:lstStyle/>
+          <a:p>
+            <a:pPr algn="r"/>
+            <a:r>
+              <a:rPr sz="1000">
+                <a:solidFill>
+                  <a:srgbClr val="8A939B"/>
+                </a:solidFill>
+                <a:hlinkClick r:id="rId3"/>
+              </a:rPr>
+              <a:t>cuinotes.com</a:t>
+            </a:r>
+            <a:r>
+              <a:rPr sz="1000">
+                <a:solidFill>
+                  <a:srgbClr val="8A939B"/>
+                </a:solidFill>
+              </a:rPr>
+              <a:t>  ·  32</a:t>
+            </a:r>
           </a:p>
         </p:txBody>
       </p:sp>
@@ -15844,6 +15178,10 @@
           </a:solidFill>
           <a:ln/>
         </p:spPr>
+        <p:txBody>
+          <a:bodyPr/>
+          <a:p/>
+        </p:txBody>
       </p:sp>
       <p:sp>
         <p:nvSpPr>
@@ -15942,6 +15280,10 @@
           </a:solidFill>
           <a:ln/>
         </p:spPr>
+        <p:txBody>
+          <a:bodyPr/>
+          <a:p/>
+        </p:txBody>
       </p:sp>
       <p:sp>
         <p:nvSpPr>
@@ -16040,6 +15382,10 @@
           </a:solidFill>
           <a:ln/>
         </p:spPr>
+        <p:txBody>
+          <a:bodyPr/>
+          <a:p/>
+        </p:txBody>
       </p:sp>
       <p:sp>
         <p:nvSpPr>
@@ -16138,6 +15484,10 @@
           </a:solidFill>
           <a:ln/>
         </p:spPr>
+        <p:txBody>
+          <a:bodyPr/>
+          <a:p/>
+        </p:txBody>
       </p:sp>
       <p:sp>
         <p:nvSpPr>
@@ -16236,6 +15586,10 @@
           </a:solidFill>
           <a:ln/>
         </p:spPr>
+        <p:txBody>
+          <a:bodyPr/>
+          <a:p/>
+        </p:txBody>
       </p:sp>
       <p:sp>
         <p:nvSpPr>
@@ -16334,6 +15688,10 @@
           </a:solidFill>
           <a:ln/>
         </p:spPr>
+        <p:txBody>
+          <a:bodyPr/>
+          <a:p/>
+        </p:txBody>
       </p:sp>
       <p:sp>
         <p:nvSpPr>
@@ -16415,79 +15773,44 @@
       </p:sp>
       <p:sp>
         <p:nvSpPr>
-          <p:cNvPr id="22" name="Text 20"/>
-          <p:cNvSpPr txBox="1"/>
-          <p:nvPr/>
-        </p:nvSpPr>
-        <p:spPr>
-          <a:xfrm>
-            <a:off x="640080" y="6446520"/>
-            <a:ext cx="8686800" cy="292608"/>
-          </a:xfrm>
-          <a:prstGeom prst="rect">
-            <a:avLst/>
-          </a:prstGeom>
-          <a:noFill/>
-          <a:ln/>
-        </p:spPr>
-        <p:txBody>
-          <a:bodyPr wrap="square" lIns="0" tIns="0" rIns="0" bIns="0" rtlCol="0" anchor="ctr"/>
-          <a:lstStyle/>
-          <a:p>
-            <a:pPr algn="l" indent="0" marL="0">
-              <a:buNone/>
-            </a:pPr>
-            <a:r>
-              <a:rPr lang="en-US" sz="900" dirty="0">
-                <a:solidFill>
-                  <a:srgbClr val="9AA3D8"/>
-                </a:solidFill>
-                <a:latin typeface="Calibri" pitchFamily="34" charset="0"/>
-                <a:ea typeface="Calibri" pitchFamily="34" charset="-122"/>
-                <a:cs typeface="Calibri" pitchFamily="34" charset="-120"/>
-              </a:rPr>
-              <a:t>Usman Akram  •  COMSATS University Islamabad</a:t>
-            </a:r>
-            <a:endParaRPr lang="en-US" sz="900" dirty="0"/>
-          </a:p>
-        </p:txBody>
-      </p:sp>
-      <p:sp>
-        <p:nvSpPr>
-          <p:cNvPr id="23" name="Text 21"/>
-          <p:cNvSpPr txBox="1"/>
-          <p:nvPr/>
-        </p:nvSpPr>
-        <p:spPr>
-          <a:xfrm>
-            <a:off x="11155680" y="6446520"/>
-            <a:ext cx="457200" cy="292608"/>
-          </a:xfrm>
-          <a:prstGeom prst="rect">
-            <a:avLst/>
-          </a:prstGeom>
-          <a:noFill/>
-          <a:ln/>
-        </p:spPr>
-        <p:txBody>
-          <a:bodyPr wrap="square" lIns="0" tIns="0" rIns="0" bIns="0" rtlCol="0" anchor="ctr"/>
-          <a:lstStyle/>
-          <a:p>
-            <a:pPr algn="r" indent="0" marL="0">
-              <a:buNone/>
-            </a:pPr>
-            <a:r>
-              <a:rPr lang="en-US" sz="900" dirty="0">
-                <a:solidFill>
-                  <a:srgbClr val="9AA3D8"/>
-                </a:solidFill>
-                <a:latin typeface="Calibri" pitchFamily="34" charset="0"/>
-                <a:ea typeface="Calibri" pitchFamily="34" charset="-122"/>
-                <a:cs typeface="Calibri" pitchFamily="34" charset="-120"/>
-              </a:rPr>
-              <a:t>33</a:t>
-            </a:r>
-            <a:endParaRPr lang="en-US" sz="900" dirty="0"/>
+          <p:cNvPr id="24" name="cuinotes-footer-mark"/>
+          <p:cNvSpPr txBox="1"/>
+          <p:nvPr/>
+        </p:nvSpPr>
+        <p:spPr>
+          <a:xfrm>
+            <a:off x="9951720" y="6455664"/>
+            <a:ext cx="2011680" cy="292608"/>
+          </a:xfrm>
+          <a:prstGeom prst="rect">
+            <a:avLst/>
+          </a:prstGeom>
+          <a:noFill/>
+        </p:spPr>
+        <p:txBody>
+          <a:bodyPr wrap="none" lIns="0" rIns="0" tIns="0" bIns="0">
+            <a:spAutoFit/>
+          </a:bodyPr>
+          <a:lstStyle/>
+          <a:p>
+            <a:pPr algn="r"/>
+            <a:r>
+              <a:rPr sz="1000">
+                <a:solidFill>
+                  <a:srgbClr val="8A939B"/>
+                </a:solidFill>
+                <a:hlinkClick r:id="rId3"/>
+              </a:rPr>
+              <a:t>cuinotes.com</a:t>
+            </a:r>
+            <a:r>
+              <a:rPr sz="1000">
+                <a:solidFill>
+                  <a:srgbClr val="8A939B"/>
+                </a:solidFill>
+              </a:rPr>
+              <a:t>  ·  33</a:t>
+            </a:r>
           </a:p>
         </p:txBody>
       </p:sp>
@@ -16620,6 +15943,10 @@
           </a:solidFill>
           <a:ln/>
         </p:spPr>
+        <p:txBody>
+          <a:bodyPr/>
+          <a:p/>
+        </p:txBody>
       </p:sp>
       <p:sp>
         <p:nvSpPr>
@@ -16718,6 +16045,10 @@
           </a:solidFill>
           <a:ln/>
         </p:spPr>
+        <p:txBody>
+          <a:bodyPr/>
+          <a:p/>
+        </p:txBody>
       </p:sp>
       <p:sp>
         <p:nvSpPr>
@@ -16816,6 +16147,10 @@
           </a:solidFill>
           <a:ln/>
         </p:spPr>
+        <p:txBody>
+          <a:bodyPr/>
+          <a:p/>
+        </p:txBody>
       </p:sp>
       <p:sp>
         <p:nvSpPr>
@@ -16897,79 +16232,44 @@
       </p:sp>
       <p:sp>
         <p:nvSpPr>
-          <p:cNvPr id="13" name="Text 11"/>
-          <p:cNvSpPr txBox="1"/>
-          <p:nvPr/>
-        </p:nvSpPr>
-        <p:spPr>
-          <a:xfrm>
-            <a:off x="640080" y="6446520"/>
-            <a:ext cx="8686800" cy="292608"/>
-          </a:xfrm>
-          <a:prstGeom prst="rect">
-            <a:avLst/>
-          </a:prstGeom>
-          <a:noFill/>
-          <a:ln/>
-        </p:spPr>
-        <p:txBody>
-          <a:bodyPr wrap="square" lIns="0" tIns="0" rIns="0" bIns="0" rtlCol="0" anchor="ctr"/>
-          <a:lstStyle/>
-          <a:p>
-            <a:pPr algn="l" indent="0" marL="0">
-              <a:buNone/>
-            </a:pPr>
-            <a:r>
-              <a:rPr lang="en-US" sz="900" dirty="0">
-                <a:solidFill>
-                  <a:srgbClr val="5D5D72"/>
-                </a:solidFill>
-                <a:latin typeface="Calibri" pitchFamily="34" charset="0"/>
-                <a:ea typeface="Calibri" pitchFamily="34" charset="-122"/>
-                <a:cs typeface="Calibri" pitchFamily="34" charset="-120"/>
-              </a:rPr>
-              <a:t>Usman Akram  •  COMSATS University Islamabad</a:t>
-            </a:r>
-            <a:endParaRPr lang="en-US" sz="900" dirty="0"/>
-          </a:p>
-        </p:txBody>
-      </p:sp>
-      <p:sp>
-        <p:nvSpPr>
-          <p:cNvPr id="14" name="Text 12"/>
-          <p:cNvSpPr txBox="1"/>
-          <p:nvPr/>
-        </p:nvSpPr>
-        <p:spPr>
-          <a:xfrm>
-            <a:off x="11155680" y="6446520"/>
-            <a:ext cx="457200" cy="292608"/>
-          </a:xfrm>
-          <a:prstGeom prst="rect">
-            <a:avLst/>
-          </a:prstGeom>
-          <a:noFill/>
-          <a:ln/>
-        </p:spPr>
-        <p:txBody>
-          <a:bodyPr wrap="square" lIns="0" tIns="0" rIns="0" bIns="0" rtlCol="0" anchor="ctr"/>
-          <a:lstStyle/>
-          <a:p>
-            <a:pPr algn="r" indent="0" marL="0">
-              <a:buNone/>
-            </a:pPr>
-            <a:r>
-              <a:rPr lang="en-US" sz="900" dirty="0">
-                <a:solidFill>
-                  <a:srgbClr val="5D5D72"/>
-                </a:solidFill>
-                <a:latin typeface="Calibri" pitchFamily="34" charset="0"/>
-                <a:ea typeface="Calibri" pitchFamily="34" charset="-122"/>
-                <a:cs typeface="Calibri" pitchFamily="34" charset="-120"/>
-              </a:rPr>
-              <a:t>4</a:t>
-            </a:r>
-            <a:endParaRPr lang="en-US" sz="900" dirty="0"/>
+          <p:cNvPr id="15" name="cuinotes-footer-mark"/>
+          <p:cNvSpPr txBox="1"/>
+          <p:nvPr/>
+        </p:nvSpPr>
+        <p:spPr>
+          <a:xfrm>
+            <a:off x="9951720" y="6455664"/>
+            <a:ext cx="2011680" cy="292608"/>
+          </a:xfrm>
+          <a:prstGeom prst="rect">
+            <a:avLst/>
+          </a:prstGeom>
+          <a:noFill/>
+        </p:spPr>
+        <p:txBody>
+          <a:bodyPr wrap="none" lIns="0" rIns="0" tIns="0" bIns="0">
+            <a:spAutoFit/>
+          </a:bodyPr>
+          <a:lstStyle/>
+          <a:p>
+            <a:pPr algn="r"/>
+            <a:r>
+              <a:rPr sz="1000">
+                <a:solidFill>
+                  <a:srgbClr val="8A939B"/>
+                </a:solidFill>
+                <a:hlinkClick r:id="rId3"/>
+              </a:rPr>
+              <a:t>cuinotes.com</a:t>
+            </a:r>
+            <a:r>
+              <a:rPr sz="1000">
+                <a:solidFill>
+                  <a:srgbClr val="8A939B"/>
+                </a:solidFill>
+              </a:rPr>
+              <a:t>  ·  4</a:t>
+            </a:r>
           </a:p>
         </p:txBody>
       </p:sp>
@@ -17104,6 +16404,10 @@
           </a:solidFill>
           <a:ln/>
         </p:spPr>
+        <p:txBody>
+          <a:bodyPr/>
+          <a:p/>
+        </p:txBody>
       </p:sp>
       <p:sp>
         <p:nvSpPr>
@@ -17268,79 +16572,44 @@
       </p:sp>
       <p:sp>
         <p:nvSpPr>
-          <p:cNvPr id="7" name="Text 5"/>
-          <p:cNvSpPr txBox="1"/>
-          <p:nvPr/>
-        </p:nvSpPr>
-        <p:spPr>
-          <a:xfrm>
-            <a:off x="640080" y="6446520"/>
-            <a:ext cx="8686800" cy="292608"/>
-          </a:xfrm>
-          <a:prstGeom prst="rect">
-            <a:avLst/>
-          </a:prstGeom>
-          <a:noFill/>
-          <a:ln/>
-        </p:spPr>
-        <p:txBody>
-          <a:bodyPr wrap="square" lIns="0" tIns="0" rIns="0" bIns="0" rtlCol="0" anchor="ctr"/>
-          <a:lstStyle/>
-          <a:p>
-            <a:pPr algn="l" indent="0" marL="0">
-              <a:buNone/>
-            </a:pPr>
-            <a:r>
-              <a:rPr lang="en-US" sz="900" dirty="0">
-                <a:solidFill>
-                  <a:srgbClr val="5D5D72"/>
-                </a:solidFill>
-                <a:latin typeface="Calibri" pitchFamily="34" charset="0"/>
-                <a:ea typeface="Calibri" pitchFamily="34" charset="-122"/>
-                <a:cs typeface="Calibri" pitchFamily="34" charset="-120"/>
-              </a:rPr>
-              <a:t>Usman Akram  •  COMSATS University Islamabad</a:t>
-            </a:r>
-            <a:endParaRPr lang="en-US" sz="900" dirty="0"/>
-          </a:p>
-        </p:txBody>
-      </p:sp>
-      <p:sp>
-        <p:nvSpPr>
-          <p:cNvPr id="8" name="Text 6"/>
-          <p:cNvSpPr txBox="1"/>
-          <p:nvPr/>
-        </p:nvSpPr>
-        <p:spPr>
-          <a:xfrm>
-            <a:off x="11155680" y="6446520"/>
-            <a:ext cx="457200" cy="292608"/>
-          </a:xfrm>
-          <a:prstGeom prst="rect">
-            <a:avLst/>
-          </a:prstGeom>
-          <a:noFill/>
-          <a:ln/>
-        </p:spPr>
-        <p:txBody>
-          <a:bodyPr wrap="square" lIns="0" tIns="0" rIns="0" bIns="0" rtlCol="0" anchor="ctr"/>
-          <a:lstStyle/>
-          <a:p>
-            <a:pPr algn="r" indent="0" marL="0">
-              <a:buNone/>
-            </a:pPr>
-            <a:r>
-              <a:rPr lang="en-US" sz="900" dirty="0">
-                <a:solidFill>
-                  <a:srgbClr val="5D5D72"/>
-                </a:solidFill>
-                <a:latin typeface="Calibri" pitchFamily="34" charset="0"/>
-                <a:ea typeface="Calibri" pitchFamily="34" charset="-122"/>
-                <a:cs typeface="Calibri" pitchFamily="34" charset="-120"/>
-              </a:rPr>
-              <a:t>5</a:t>
-            </a:r>
-            <a:endParaRPr lang="en-US" sz="900" dirty="0"/>
+          <p:cNvPr id="9" name="cuinotes-footer-mark"/>
+          <p:cNvSpPr txBox="1"/>
+          <p:nvPr/>
+        </p:nvSpPr>
+        <p:spPr>
+          <a:xfrm>
+            <a:off x="9951720" y="6455664"/>
+            <a:ext cx="2011680" cy="292608"/>
+          </a:xfrm>
+          <a:prstGeom prst="rect">
+            <a:avLst/>
+          </a:prstGeom>
+          <a:noFill/>
+        </p:spPr>
+        <p:txBody>
+          <a:bodyPr wrap="none" lIns="0" rIns="0" tIns="0" bIns="0">
+            <a:spAutoFit/>
+          </a:bodyPr>
+          <a:lstStyle/>
+          <a:p>
+            <a:pPr algn="r"/>
+            <a:r>
+              <a:rPr sz="1000">
+                <a:solidFill>
+                  <a:srgbClr val="8A939B"/>
+                </a:solidFill>
+                <a:hlinkClick r:id="rId3"/>
+              </a:rPr>
+              <a:t>cuinotes.com</a:t>
+            </a:r>
+            <a:r>
+              <a:rPr sz="1000">
+                <a:solidFill>
+                  <a:srgbClr val="8A939B"/>
+                </a:solidFill>
+              </a:rPr>
+              <a:t>  ·  5</a:t>
+            </a:r>
           </a:p>
         </p:txBody>
       </p:sp>
@@ -17475,6 +16744,10 @@
           </a:solidFill>
           <a:ln/>
         </p:spPr>
+        <p:txBody>
+          <a:bodyPr/>
+          <a:p/>
+        </p:txBody>
       </p:sp>
       <p:sp>
         <p:nvSpPr>
@@ -17679,79 +16952,44 @@
       </p:sp>
       <p:sp>
         <p:nvSpPr>
-          <p:cNvPr id="7" name="Text 5"/>
-          <p:cNvSpPr txBox="1"/>
-          <p:nvPr/>
-        </p:nvSpPr>
-        <p:spPr>
-          <a:xfrm>
-            <a:off x="640080" y="6446520"/>
-            <a:ext cx="8686800" cy="292608"/>
-          </a:xfrm>
-          <a:prstGeom prst="rect">
-            <a:avLst/>
-          </a:prstGeom>
-          <a:noFill/>
-          <a:ln/>
-        </p:spPr>
-        <p:txBody>
-          <a:bodyPr wrap="square" lIns="0" tIns="0" rIns="0" bIns="0" rtlCol="0" anchor="ctr"/>
-          <a:lstStyle/>
-          <a:p>
-            <a:pPr algn="l" indent="0" marL="0">
-              <a:buNone/>
-            </a:pPr>
-            <a:r>
-              <a:rPr lang="en-US" sz="900" dirty="0">
-                <a:solidFill>
-                  <a:srgbClr val="5D5D72"/>
-                </a:solidFill>
-                <a:latin typeface="Calibri" pitchFamily="34" charset="0"/>
-                <a:ea typeface="Calibri" pitchFamily="34" charset="-122"/>
-                <a:cs typeface="Calibri" pitchFamily="34" charset="-120"/>
-              </a:rPr>
-              <a:t>Usman Akram  •  COMSATS University Islamabad</a:t>
-            </a:r>
-            <a:endParaRPr lang="en-US" sz="900" dirty="0"/>
-          </a:p>
-        </p:txBody>
-      </p:sp>
-      <p:sp>
-        <p:nvSpPr>
-          <p:cNvPr id="8" name="Text 6"/>
-          <p:cNvSpPr txBox="1"/>
-          <p:nvPr/>
-        </p:nvSpPr>
-        <p:spPr>
-          <a:xfrm>
-            <a:off x="11155680" y="6446520"/>
-            <a:ext cx="457200" cy="292608"/>
-          </a:xfrm>
-          <a:prstGeom prst="rect">
-            <a:avLst/>
-          </a:prstGeom>
-          <a:noFill/>
-          <a:ln/>
-        </p:spPr>
-        <p:txBody>
-          <a:bodyPr wrap="square" lIns="0" tIns="0" rIns="0" bIns="0" rtlCol="0" anchor="ctr"/>
-          <a:lstStyle/>
-          <a:p>
-            <a:pPr algn="r" indent="0" marL="0">
-              <a:buNone/>
-            </a:pPr>
-            <a:r>
-              <a:rPr lang="en-US" sz="900" dirty="0">
-                <a:solidFill>
-                  <a:srgbClr val="5D5D72"/>
-                </a:solidFill>
-                <a:latin typeface="Calibri" pitchFamily="34" charset="0"/>
-                <a:ea typeface="Calibri" pitchFamily="34" charset="-122"/>
-                <a:cs typeface="Calibri" pitchFamily="34" charset="-120"/>
-              </a:rPr>
-              <a:t>6</a:t>
-            </a:r>
-            <a:endParaRPr lang="en-US" sz="900" dirty="0"/>
+          <p:cNvPr id="9" name="cuinotes-footer-mark"/>
+          <p:cNvSpPr txBox="1"/>
+          <p:nvPr/>
+        </p:nvSpPr>
+        <p:spPr>
+          <a:xfrm>
+            <a:off x="9951720" y="6455664"/>
+            <a:ext cx="2011680" cy="292608"/>
+          </a:xfrm>
+          <a:prstGeom prst="rect">
+            <a:avLst/>
+          </a:prstGeom>
+          <a:noFill/>
+        </p:spPr>
+        <p:txBody>
+          <a:bodyPr wrap="none" lIns="0" rIns="0" tIns="0" bIns="0">
+            <a:spAutoFit/>
+          </a:bodyPr>
+          <a:lstStyle/>
+          <a:p>
+            <a:pPr algn="r"/>
+            <a:r>
+              <a:rPr sz="1000">
+                <a:solidFill>
+                  <a:srgbClr val="8A939B"/>
+                </a:solidFill>
+                <a:hlinkClick r:id="rId3"/>
+              </a:rPr>
+              <a:t>cuinotes.com</a:t>
+            </a:r>
+            <a:r>
+              <a:rPr sz="1000">
+                <a:solidFill>
+                  <a:srgbClr val="8A939B"/>
+                </a:solidFill>
+              </a:rPr>
+              <a:t>  ·  6</a:t>
+            </a:r>
           </a:p>
         </p:txBody>
       </p:sp>
@@ -17884,6 +17122,10 @@
           </a:solidFill>
           <a:ln/>
         </p:spPr>
+        <p:txBody>
+          <a:bodyPr/>
+          <a:p/>
+        </p:txBody>
       </p:sp>
       <p:sp>
         <p:nvSpPr>
@@ -17982,6 +17224,10 @@
           </a:solidFill>
           <a:ln/>
         </p:spPr>
+        <p:txBody>
+          <a:bodyPr/>
+          <a:p/>
+        </p:txBody>
       </p:sp>
       <p:sp>
         <p:nvSpPr>
@@ -18080,6 +17326,10 @@
           </a:solidFill>
           <a:ln/>
         </p:spPr>
+        <p:txBody>
+          <a:bodyPr/>
+          <a:p/>
+        </p:txBody>
       </p:sp>
       <p:sp>
         <p:nvSpPr>
@@ -18161,79 +17411,44 @@
       </p:sp>
       <p:sp>
         <p:nvSpPr>
-          <p:cNvPr id="13" name="Text 11"/>
-          <p:cNvSpPr txBox="1"/>
-          <p:nvPr/>
-        </p:nvSpPr>
-        <p:spPr>
-          <a:xfrm>
-            <a:off x="640080" y="6446520"/>
-            <a:ext cx="8686800" cy="292608"/>
-          </a:xfrm>
-          <a:prstGeom prst="rect">
-            <a:avLst/>
-          </a:prstGeom>
-          <a:noFill/>
-          <a:ln/>
-        </p:spPr>
-        <p:txBody>
-          <a:bodyPr wrap="square" lIns="0" tIns="0" rIns="0" bIns="0" rtlCol="0" anchor="ctr"/>
-          <a:lstStyle/>
-          <a:p>
-            <a:pPr algn="l" indent="0" marL="0">
-              <a:buNone/>
-            </a:pPr>
-            <a:r>
-              <a:rPr lang="en-US" sz="900" dirty="0">
-                <a:solidFill>
-                  <a:srgbClr val="5D5D72"/>
-                </a:solidFill>
-                <a:latin typeface="Calibri" pitchFamily="34" charset="0"/>
-                <a:ea typeface="Calibri" pitchFamily="34" charset="-122"/>
-                <a:cs typeface="Calibri" pitchFamily="34" charset="-120"/>
-              </a:rPr>
-              <a:t>Usman Akram  •  COMSATS University Islamabad</a:t>
-            </a:r>
-            <a:endParaRPr lang="en-US" sz="900" dirty="0"/>
-          </a:p>
-        </p:txBody>
-      </p:sp>
-      <p:sp>
-        <p:nvSpPr>
-          <p:cNvPr id="14" name="Text 12"/>
-          <p:cNvSpPr txBox="1"/>
-          <p:nvPr/>
-        </p:nvSpPr>
-        <p:spPr>
-          <a:xfrm>
-            <a:off x="11155680" y="6446520"/>
-            <a:ext cx="457200" cy="292608"/>
-          </a:xfrm>
-          <a:prstGeom prst="rect">
-            <a:avLst/>
-          </a:prstGeom>
-          <a:noFill/>
-          <a:ln/>
-        </p:spPr>
-        <p:txBody>
-          <a:bodyPr wrap="square" lIns="0" tIns="0" rIns="0" bIns="0" rtlCol="0" anchor="ctr"/>
-          <a:lstStyle/>
-          <a:p>
-            <a:pPr algn="r" indent="0" marL="0">
-              <a:buNone/>
-            </a:pPr>
-            <a:r>
-              <a:rPr lang="en-US" sz="900" dirty="0">
-                <a:solidFill>
-                  <a:srgbClr val="5D5D72"/>
-                </a:solidFill>
-                <a:latin typeface="Calibri" pitchFamily="34" charset="0"/>
-                <a:ea typeface="Calibri" pitchFamily="34" charset="-122"/>
-                <a:cs typeface="Calibri" pitchFamily="34" charset="-120"/>
-              </a:rPr>
-              <a:t>7</a:t>
-            </a:r>
-            <a:endParaRPr lang="en-US" sz="900" dirty="0"/>
+          <p:cNvPr id="15" name="cuinotes-footer-mark"/>
+          <p:cNvSpPr txBox="1"/>
+          <p:nvPr/>
+        </p:nvSpPr>
+        <p:spPr>
+          <a:xfrm>
+            <a:off x="9951720" y="6455664"/>
+            <a:ext cx="2011680" cy="292608"/>
+          </a:xfrm>
+          <a:prstGeom prst="rect">
+            <a:avLst/>
+          </a:prstGeom>
+          <a:noFill/>
+        </p:spPr>
+        <p:txBody>
+          <a:bodyPr wrap="none" lIns="0" rIns="0" tIns="0" bIns="0">
+            <a:spAutoFit/>
+          </a:bodyPr>
+          <a:lstStyle/>
+          <a:p>
+            <a:pPr algn="r"/>
+            <a:r>
+              <a:rPr sz="1000">
+                <a:solidFill>
+                  <a:srgbClr val="8A939B"/>
+                </a:solidFill>
+                <a:hlinkClick r:id="rId3"/>
+              </a:rPr>
+              <a:t>cuinotes.com</a:t>
+            </a:r>
+            <a:r>
+              <a:rPr sz="1000">
+                <a:solidFill>
+                  <a:srgbClr val="8A939B"/>
+                </a:solidFill>
+              </a:rPr>
+              <a:t>  ·  7</a:t>
+            </a:r>
           </a:p>
         </p:txBody>
       </p:sp>
@@ -18368,6 +17583,10 @@
           </a:solidFill>
           <a:ln/>
         </p:spPr>
+        <p:txBody>
+          <a:bodyPr/>
+          <a:p/>
+        </p:txBody>
       </p:sp>
       <p:sp>
         <p:nvSpPr>
@@ -18661,79 +17880,44 @@
       </p:sp>
       <p:sp>
         <p:nvSpPr>
-          <p:cNvPr id="7" name="Text 5"/>
-          <p:cNvSpPr txBox="1"/>
-          <p:nvPr/>
-        </p:nvSpPr>
-        <p:spPr>
-          <a:xfrm>
-            <a:off x="640080" y="6446520"/>
-            <a:ext cx="8686800" cy="292608"/>
-          </a:xfrm>
-          <a:prstGeom prst="rect">
-            <a:avLst/>
-          </a:prstGeom>
-          <a:noFill/>
-          <a:ln/>
-        </p:spPr>
-        <p:txBody>
-          <a:bodyPr wrap="square" lIns="0" tIns="0" rIns="0" bIns="0" rtlCol="0" anchor="ctr"/>
-          <a:lstStyle/>
-          <a:p>
-            <a:pPr algn="l" indent="0" marL="0">
-              <a:buNone/>
-            </a:pPr>
-            <a:r>
-              <a:rPr lang="en-US" sz="900" dirty="0">
-                <a:solidFill>
-                  <a:srgbClr val="5D5D72"/>
-                </a:solidFill>
-                <a:latin typeface="Calibri" pitchFamily="34" charset="0"/>
-                <a:ea typeface="Calibri" pitchFamily="34" charset="-122"/>
-                <a:cs typeface="Calibri" pitchFamily="34" charset="-120"/>
-              </a:rPr>
-              <a:t>Usman Akram  •  COMSATS University Islamabad</a:t>
-            </a:r>
-            <a:endParaRPr lang="en-US" sz="900" dirty="0"/>
-          </a:p>
-        </p:txBody>
-      </p:sp>
-      <p:sp>
-        <p:nvSpPr>
-          <p:cNvPr id="8" name="Text 6"/>
-          <p:cNvSpPr txBox="1"/>
-          <p:nvPr/>
-        </p:nvSpPr>
-        <p:spPr>
-          <a:xfrm>
-            <a:off x="11155680" y="6446520"/>
-            <a:ext cx="457200" cy="292608"/>
-          </a:xfrm>
-          <a:prstGeom prst="rect">
-            <a:avLst/>
-          </a:prstGeom>
-          <a:noFill/>
-          <a:ln/>
-        </p:spPr>
-        <p:txBody>
-          <a:bodyPr wrap="square" lIns="0" tIns="0" rIns="0" bIns="0" rtlCol="0" anchor="ctr"/>
-          <a:lstStyle/>
-          <a:p>
-            <a:pPr algn="r" indent="0" marL="0">
-              <a:buNone/>
-            </a:pPr>
-            <a:r>
-              <a:rPr lang="en-US" sz="900" dirty="0">
-                <a:solidFill>
-                  <a:srgbClr val="5D5D72"/>
-                </a:solidFill>
-                <a:latin typeface="Calibri" pitchFamily="34" charset="0"/>
-                <a:ea typeface="Calibri" pitchFamily="34" charset="-122"/>
-                <a:cs typeface="Calibri" pitchFamily="34" charset="-120"/>
-              </a:rPr>
-              <a:t>8</a:t>
-            </a:r>
-            <a:endParaRPr lang="en-US" sz="900" dirty="0"/>
+          <p:cNvPr id="9" name="cuinotes-footer-mark"/>
+          <p:cNvSpPr txBox="1"/>
+          <p:nvPr/>
+        </p:nvSpPr>
+        <p:spPr>
+          <a:xfrm>
+            <a:off x="9951720" y="6455664"/>
+            <a:ext cx="2011680" cy="292608"/>
+          </a:xfrm>
+          <a:prstGeom prst="rect">
+            <a:avLst/>
+          </a:prstGeom>
+          <a:noFill/>
+        </p:spPr>
+        <p:txBody>
+          <a:bodyPr wrap="none" lIns="0" rIns="0" tIns="0" bIns="0">
+            <a:spAutoFit/>
+          </a:bodyPr>
+          <a:lstStyle/>
+          <a:p>
+            <a:pPr algn="r"/>
+            <a:r>
+              <a:rPr sz="1000">
+                <a:solidFill>
+                  <a:srgbClr val="8A939B"/>
+                </a:solidFill>
+                <a:hlinkClick r:id="rId3"/>
+              </a:rPr>
+              <a:t>cuinotes.com</a:t>
+            </a:r>
+            <a:r>
+              <a:rPr sz="1000">
+                <a:solidFill>
+                  <a:srgbClr val="8A939B"/>
+                </a:solidFill>
+              </a:rPr>
+              <a:t>  ·  8</a:t>
+            </a:r>
           </a:p>
         </p:txBody>
       </p:sp>
@@ -18873,6 +18057,10 @@
             <a:prstDash val="solid"/>
           </a:ln>
         </p:spPr>
+        <p:txBody>
+          <a:bodyPr/>
+          <a:p/>
+        </p:txBody>
       </p:sp>
       <p:sp>
         <p:nvSpPr>
@@ -18954,79 +18142,44 @@
       </p:sp>
       <p:sp>
         <p:nvSpPr>
-          <p:cNvPr id="7" name="Text 5"/>
-          <p:cNvSpPr txBox="1"/>
-          <p:nvPr/>
-        </p:nvSpPr>
-        <p:spPr>
-          <a:xfrm>
-            <a:off x="640080" y="6446520"/>
-            <a:ext cx="8686800" cy="292608"/>
-          </a:xfrm>
-          <a:prstGeom prst="rect">
-            <a:avLst/>
-          </a:prstGeom>
-          <a:noFill/>
-          <a:ln/>
-        </p:spPr>
-        <p:txBody>
-          <a:bodyPr wrap="square" lIns="0" tIns="0" rIns="0" bIns="0" rtlCol="0" anchor="ctr"/>
-          <a:lstStyle/>
-          <a:p>
-            <a:pPr algn="l" indent="0" marL="0">
-              <a:buNone/>
-            </a:pPr>
-            <a:r>
-              <a:rPr lang="en-US" sz="900" dirty="0">
-                <a:solidFill>
-                  <a:srgbClr val="5D5D72"/>
-                </a:solidFill>
-                <a:latin typeface="Calibri" pitchFamily="34" charset="0"/>
-                <a:ea typeface="Calibri" pitchFamily="34" charset="-122"/>
-                <a:cs typeface="Calibri" pitchFamily="34" charset="-120"/>
-              </a:rPr>
-              <a:t>Usman Akram  •  COMSATS University Islamabad</a:t>
-            </a:r>
-            <a:endParaRPr lang="en-US" sz="900" dirty="0"/>
-          </a:p>
-        </p:txBody>
-      </p:sp>
-      <p:sp>
-        <p:nvSpPr>
-          <p:cNvPr id="8" name="Text 6"/>
-          <p:cNvSpPr txBox="1"/>
-          <p:nvPr/>
-        </p:nvSpPr>
-        <p:spPr>
-          <a:xfrm>
-            <a:off x="11155680" y="6446520"/>
-            <a:ext cx="457200" cy="292608"/>
-          </a:xfrm>
-          <a:prstGeom prst="rect">
-            <a:avLst/>
-          </a:prstGeom>
-          <a:noFill/>
-          <a:ln/>
-        </p:spPr>
-        <p:txBody>
-          <a:bodyPr wrap="square" lIns="0" tIns="0" rIns="0" bIns="0" rtlCol="0" anchor="ctr"/>
-          <a:lstStyle/>
-          <a:p>
-            <a:pPr algn="r" indent="0" marL="0">
-              <a:buNone/>
-            </a:pPr>
-            <a:r>
-              <a:rPr lang="en-US" sz="900" dirty="0">
-                <a:solidFill>
-                  <a:srgbClr val="5D5D72"/>
-                </a:solidFill>
-                <a:latin typeface="Calibri" pitchFamily="34" charset="0"/>
-                <a:ea typeface="Calibri" pitchFamily="34" charset="-122"/>
-                <a:cs typeface="Calibri" pitchFamily="34" charset="-120"/>
-              </a:rPr>
-              <a:t>9</a:t>
-            </a:r>
-            <a:endParaRPr lang="en-US" sz="900" dirty="0"/>
+          <p:cNvPr id="9" name="cuinotes-footer-mark"/>
+          <p:cNvSpPr txBox="1"/>
+          <p:nvPr/>
+        </p:nvSpPr>
+        <p:spPr>
+          <a:xfrm>
+            <a:off x="9951720" y="6455664"/>
+            <a:ext cx="2011680" cy="292608"/>
+          </a:xfrm>
+          <a:prstGeom prst="rect">
+            <a:avLst/>
+          </a:prstGeom>
+          <a:noFill/>
+        </p:spPr>
+        <p:txBody>
+          <a:bodyPr wrap="none" lIns="0" rIns="0" tIns="0" bIns="0">
+            <a:spAutoFit/>
+          </a:bodyPr>
+          <a:lstStyle/>
+          <a:p>
+            <a:pPr algn="r"/>
+            <a:r>
+              <a:rPr sz="1000">
+                <a:solidFill>
+                  <a:srgbClr val="8A939B"/>
+                </a:solidFill>
+                <a:hlinkClick r:id="rId3"/>
+              </a:rPr>
+              <a:t>cuinotes.com</a:t>
+            </a:r>
+            <a:r>
+              <a:rPr sz="1000">
+                <a:solidFill>
+                  <a:srgbClr val="8A939B"/>
+                </a:solidFill>
+              </a:rPr>
+              <a:t>  ·  9</a:t>
+            </a:r>
           </a:p>
         </p:txBody>
       </p:sp>

--- a/slides/CSC336-Lecture-31-Common-Web-Attacks-and-Defences.pptx
+++ b/slides/CSC336-Lecture-31-Common-Web-Attacks-and-Defences.pptx
@@ -6518,9 +6518,13 @@
             </a:avLst>
           </a:prstGeom>
           <a:solidFill>
-            <a:srgbClr val="1E1E4C"/>
+            <a:srgbClr val="F7F8F9"/>
           </a:solidFill>
-          <a:ln/>
+          <a:ln w="9525">
+            <a:solidFill>
+              <a:srgbClr val="D0D5DD"/>
+            </a:solidFill>
+          </a:ln>
         </p:spPr>
         <p:txBody>
           <a:bodyPr/>
@@ -6557,7 +6561,7 @@
             <a:r>
               <a:rPr lang="en-US" sz="1400" dirty="0">
                 <a:solidFill>
-                  <a:srgbClr val="C9D3F5"/>
+                  <a:srgbClr val="1F2429"/>
                 </a:solidFill>
                 <a:latin typeface="Courier New" pitchFamily="34" charset="0"/>
                 <a:ea typeface="Courier New" pitchFamily="34" charset="-122"/>
@@ -6577,7 +6581,7 @@
             <a:r>
               <a:rPr lang="en-US" sz="1400" dirty="0">
                 <a:solidFill>
-                  <a:srgbClr val="C9D3F5"/>
+                  <a:srgbClr val="1F2429"/>
                 </a:solidFill>
                 <a:latin typeface="Courier New" pitchFamily="34" charset="0"/>
                 <a:ea typeface="Courier New" pitchFamily="34" charset="-122"/>
@@ -6597,7 +6601,7 @@
             <a:r>
               <a:rPr lang="en-US" sz="1400" dirty="0">
                 <a:solidFill>
-                  <a:srgbClr val="C9D3F5"/>
+                  <a:srgbClr val="1F2429"/>
                 </a:solidFill>
                 <a:latin typeface="Courier New" pitchFamily="34" charset="0"/>
                 <a:ea typeface="Courier New" pitchFamily="34" charset="-122"/>
@@ -6617,7 +6621,7 @@
             <a:r>
               <a:rPr lang="en-US" sz="1400" dirty="0">
                 <a:solidFill>
-                  <a:srgbClr val="C9D3F5"/>
+                  <a:srgbClr val="1F2429"/>
                 </a:solidFill>
                 <a:latin typeface="Courier New" pitchFamily="34" charset="0"/>
                 <a:ea typeface="Courier New" pitchFamily="34" charset="-122"/>
@@ -6637,7 +6641,7 @@
             <a:r>
               <a:rPr lang="en-US" sz="1400" dirty="0">
                 <a:solidFill>
-                  <a:srgbClr val="C9D3F5"/>
+                  <a:srgbClr val="1F2429"/>
                 </a:solidFill>
                 <a:latin typeface="Courier New" pitchFamily="34" charset="0"/>
                 <a:ea typeface="Courier New" pitchFamily="34" charset="-122"/>
@@ -6858,9 +6862,13 @@
             </a:avLst>
           </a:prstGeom>
           <a:solidFill>
-            <a:srgbClr val="1E1E4C"/>
+            <a:srgbClr val="F7F8F9"/>
           </a:solidFill>
-          <a:ln/>
+          <a:ln w="9525">
+            <a:solidFill>
+              <a:srgbClr val="D0D5DD"/>
+            </a:solidFill>
+          </a:ln>
         </p:spPr>
         <p:txBody>
           <a:bodyPr/>
@@ -6897,7 +6905,7 @@
             <a:r>
               <a:rPr lang="en-US" sz="1400" dirty="0">
                 <a:solidFill>
-                  <a:srgbClr val="C9D3F5"/>
+                  <a:srgbClr val="1F2429"/>
                 </a:solidFill>
                 <a:latin typeface="Courier New" pitchFamily="34" charset="0"/>
                 <a:ea typeface="Courier New" pitchFamily="34" charset="-122"/>
@@ -6917,7 +6925,7 @@
             <a:r>
               <a:rPr lang="en-US" sz="1400" dirty="0">
                 <a:solidFill>
-                  <a:srgbClr val="C9D3F5"/>
+                  <a:srgbClr val="1F2429"/>
                 </a:solidFill>
                 <a:latin typeface="Courier New" pitchFamily="34" charset="0"/>
                 <a:ea typeface="Courier New" pitchFamily="34" charset="-122"/>
@@ -6937,7 +6945,7 @@
             <a:r>
               <a:rPr lang="en-US" sz="1400" dirty="0">
                 <a:solidFill>
-                  <a:srgbClr val="C9D3F5"/>
+                  <a:srgbClr val="1F2429"/>
                 </a:solidFill>
                 <a:latin typeface="Courier New" pitchFamily="34" charset="0"/>
                 <a:ea typeface="Courier New" pitchFamily="34" charset="-122"/>
@@ -6957,7 +6965,7 @@
             <a:r>
               <a:rPr lang="en-US" sz="1400" dirty="0">
                 <a:solidFill>
-                  <a:srgbClr val="C9D3F5"/>
+                  <a:srgbClr val="1F2429"/>
                 </a:solidFill>
                 <a:latin typeface="Courier New" pitchFamily="34" charset="0"/>
                 <a:ea typeface="Courier New" pitchFamily="34" charset="-122"/>
@@ -6986,7 +6994,7 @@
             <a:r>
               <a:rPr lang="en-US" sz="1400" dirty="0">
                 <a:solidFill>
-                  <a:srgbClr val="C9D3F5"/>
+                  <a:srgbClr val="1F2429"/>
                 </a:solidFill>
                 <a:latin typeface="Courier New" pitchFamily="34" charset="0"/>
                 <a:ea typeface="Courier New" pitchFamily="34" charset="-122"/>
@@ -7006,7 +7014,7 @@
             <a:r>
               <a:rPr lang="en-US" sz="1400" dirty="0">
                 <a:solidFill>
-                  <a:srgbClr val="C9D3F5"/>
+                  <a:srgbClr val="1F2429"/>
                 </a:solidFill>
                 <a:latin typeface="Courier New" pitchFamily="34" charset="0"/>
                 <a:ea typeface="Courier New" pitchFamily="34" charset="-122"/>
@@ -7026,7 +7034,7 @@
             <a:r>
               <a:rPr lang="en-US" sz="1400" dirty="0">
                 <a:solidFill>
-                  <a:srgbClr val="C9D3F5"/>
+                  <a:srgbClr val="1F2429"/>
                 </a:solidFill>
                 <a:latin typeface="Courier New" pitchFamily="34" charset="0"/>
                 <a:ea typeface="Courier New" pitchFamily="34" charset="-122"/>
@@ -7046,7 +7054,7 @@
             <a:r>
               <a:rPr lang="en-US" sz="1400" dirty="0">
                 <a:solidFill>
-                  <a:srgbClr val="C9D3F5"/>
+                  <a:srgbClr val="1F2429"/>
                 </a:solidFill>
                 <a:latin typeface="Courier New" pitchFamily="34" charset="0"/>
                 <a:ea typeface="Courier New" pitchFamily="34" charset="-122"/>
@@ -7228,9 +7236,13 @@
             </a:avLst>
           </a:prstGeom>
           <a:solidFill>
-            <a:srgbClr val="1E1E4C"/>
+            <a:srgbClr val="F7F8F9"/>
           </a:solidFill>
-          <a:ln/>
+          <a:ln w="9525">
+            <a:solidFill>
+              <a:srgbClr val="D0D5DD"/>
+            </a:solidFill>
+          </a:ln>
         </p:spPr>
         <p:txBody>
           <a:bodyPr/>
@@ -7267,7 +7279,7 @@
             <a:r>
               <a:rPr lang="en-US" sz="1400" dirty="0">
                 <a:solidFill>
-                  <a:srgbClr val="C9D3F5"/>
+                  <a:srgbClr val="1F2429"/>
                 </a:solidFill>
                 <a:latin typeface="Courier New" pitchFamily="34" charset="0"/>
                 <a:ea typeface="Courier New" pitchFamily="34" charset="-122"/>
@@ -7296,7 +7308,7 @@
             <a:r>
               <a:rPr lang="en-US" sz="1400" dirty="0">
                 <a:solidFill>
-                  <a:srgbClr val="C9D3F5"/>
+                  <a:srgbClr val="1F2429"/>
                 </a:solidFill>
                 <a:latin typeface="Courier New" pitchFamily="34" charset="0"/>
                 <a:ea typeface="Courier New" pitchFamily="34" charset="-122"/>
@@ -7316,7 +7328,7 @@
             <a:r>
               <a:rPr lang="en-US" sz="1400" dirty="0">
                 <a:solidFill>
-                  <a:srgbClr val="C9D3F5"/>
+                  <a:srgbClr val="1F2429"/>
                 </a:solidFill>
                 <a:latin typeface="Courier New" pitchFamily="34" charset="0"/>
                 <a:ea typeface="Courier New" pitchFamily="34" charset="-122"/>
@@ -7537,9 +7549,13 @@
             </a:avLst>
           </a:prstGeom>
           <a:solidFill>
-            <a:srgbClr val="1E1E4C"/>
+            <a:srgbClr val="F7F8F9"/>
           </a:solidFill>
-          <a:ln/>
+          <a:ln w="9525">
+            <a:solidFill>
+              <a:srgbClr val="D0D5DD"/>
+            </a:solidFill>
+          </a:ln>
         </p:spPr>
         <p:txBody>
           <a:bodyPr/>
@@ -7576,7 +7592,7 @@
             <a:r>
               <a:rPr lang="en-US" sz="1400" dirty="0">
                 <a:solidFill>
-                  <a:srgbClr val="C9D3F5"/>
+                  <a:srgbClr val="1F2429"/>
                 </a:solidFill>
                 <a:latin typeface="Courier New" pitchFamily="34" charset="0"/>
                 <a:ea typeface="Courier New" pitchFamily="34" charset="-122"/>
@@ -8919,9 +8935,13 @@
             </a:avLst>
           </a:prstGeom>
           <a:solidFill>
-            <a:srgbClr val="1E1E4C"/>
+            <a:srgbClr val="F7F8F9"/>
           </a:solidFill>
-          <a:ln/>
+          <a:ln w="9525">
+            <a:solidFill>
+              <a:srgbClr val="D0D5DD"/>
+            </a:solidFill>
+          </a:ln>
         </p:spPr>
         <p:txBody>
           <a:bodyPr/>
@@ -8958,7 +8978,7 @@
             <a:r>
               <a:rPr lang="en-US" sz="1400" dirty="0">
                 <a:solidFill>
-                  <a:srgbClr val="C9D3F5"/>
+                  <a:srgbClr val="1F2429"/>
                 </a:solidFill>
                 <a:latin typeface="Courier New" pitchFamily="34" charset="0"/>
                 <a:ea typeface="Courier New" pitchFamily="34" charset="-122"/>
@@ -8978,7 +8998,7 @@
             <a:r>
               <a:rPr lang="en-US" sz="1400" dirty="0">
                 <a:solidFill>
-                  <a:srgbClr val="C9D3F5"/>
+                  <a:srgbClr val="1F2429"/>
                 </a:solidFill>
                 <a:latin typeface="Courier New" pitchFamily="34" charset="0"/>
                 <a:ea typeface="Courier New" pitchFamily="34" charset="-122"/>
@@ -8998,7 +9018,7 @@
             <a:r>
               <a:rPr lang="en-US" sz="1400" dirty="0">
                 <a:solidFill>
-                  <a:srgbClr val="C9D3F5"/>
+                  <a:srgbClr val="1F2429"/>
                 </a:solidFill>
                 <a:latin typeface="Courier New" pitchFamily="34" charset="0"/>
                 <a:ea typeface="Courier New" pitchFamily="34" charset="-122"/>
@@ -9018,7 +9038,7 @@
             <a:r>
               <a:rPr lang="en-US" sz="1400" dirty="0">
                 <a:solidFill>
-                  <a:srgbClr val="C9D3F5"/>
+                  <a:srgbClr val="1F2429"/>
                 </a:solidFill>
                 <a:latin typeface="Courier New" pitchFamily="34" charset="0"/>
                 <a:ea typeface="Courier New" pitchFamily="34" charset="-122"/>
@@ -9038,7 +9058,7 @@
             <a:r>
               <a:rPr lang="en-US" sz="1400" dirty="0">
                 <a:solidFill>
-                  <a:srgbClr val="C9D3F5"/>
+                  <a:srgbClr val="1F2429"/>
                 </a:solidFill>
                 <a:latin typeface="Courier New" pitchFamily="34" charset="0"/>
                 <a:ea typeface="Courier New" pitchFamily="34" charset="-122"/>
@@ -9058,7 +9078,7 @@
             <a:r>
               <a:rPr lang="en-US" sz="1400" dirty="0">
                 <a:solidFill>
-                  <a:srgbClr val="C9D3F5"/>
+                  <a:srgbClr val="1F2429"/>
                 </a:solidFill>
                 <a:latin typeface="Courier New" pitchFamily="34" charset="0"/>
                 <a:ea typeface="Courier New" pitchFamily="34" charset="-122"/>
@@ -9078,7 +9098,7 @@
             <a:r>
               <a:rPr lang="en-US" sz="1400" dirty="0">
                 <a:solidFill>
-                  <a:srgbClr val="C9D3F5"/>
+                  <a:srgbClr val="1F2429"/>
                 </a:solidFill>
                 <a:latin typeface="Courier New" pitchFamily="34" charset="0"/>
                 <a:ea typeface="Courier New" pitchFamily="34" charset="-122"/>
@@ -9098,7 +9118,7 @@
             <a:r>
               <a:rPr lang="en-US" sz="1400" dirty="0">
                 <a:solidFill>
-                  <a:srgbClr val="C9D3F5"/>
+                  <a:srgbClr val="1F2429"/>
                 </a:solidFill>
                 <a:latin typeface="Courier New" pitchFamily="34" charset="0"/>
                 <a:ea typeface="Courier New" pitchFamily="34" charset="-122"/>
@@ -9118,7 +9138,7 @@
             <a:r>
               <a:rPr lang="en-US" sz="1400" dirty="0">
                 <a:solidFill>
-                  <a:srgbClr val="C9D3F5"/>
+                  <a:srgbClr val="1F2429"/>
                 </a:solidFill>
                 <a:latin typeface="Courier New" pitchFamily="34" charset="0"/>
                 <a:ea typeface="Courier New" pitchFamily="34" charset="-122"/>
@@ -10014,9 +10034,13 @@
             </a:avLst>
           </a:prstGeom>
           <a:solidFill>
-            <a:srgbClr val="1E1E4C"/>
+            <a:srgbClr val="F7F8F9"/>
           </a:solidFill>
-          <a:ln/>
+          <a:ln w="9525">
+            <a:solidFill>
+              <a:srgbClr val="D0D5DD"/>
+            </a:solidFill>
+          </a:ln>
         </p:spPr>
         <p:txBody>
           <a:bodyPr/>
@@ -10053,7 +10077,7 @@
             <a:r>
               <a:rPr lang="en-US" sz="1200" dirty="0">
                 <a:solidFill>
-                  <a:srgbClr val="C9D3F5"/>
+                  <a:srgbClr val="1F2429"/>
                 </a:solidFill>
                 <a:latin typeface="Courier New" pitchFamily="34" charset="0"/>
                 <a:ea typeface="Courier New" pitchFamily="34" charset="-122"/>
@@ -10073,7 +10097,7 @@
             <a:r>
               <a:rPr lang="en-US" sz="1200" dirty="0">
                 <a:solidFill>
-                  <a:srgbClr val="C9D3F5"/>
+                  <a:srgbClr val="1F2429"/>
                 </a:solidFill>
                 <a:latin typeface="Courier New" pitchFamily="34" charset="0"/>
                 <a:ea typeface="Courier New" pitchFamily="34" charset="-122"/>
@@ -10093,7 +10117,7 @@
             <a:r>
               <a:rPr lang="en-US" sz="1200" dirty="0">
                 <a:solidFill>
-                  <a:srgbClr val="C9D3F5"/>
+                  <a:srgbClr val="1F2429"/>
                 </a:solidFill>
                 <a:latin typeface="Courier New" pitchFamily="34" charset="0"/>
                 <a:ea typeface="Courier New" pitchFamily="34" charset="-122"/>
@@ -10113,7 +10137,7 @@
             <a:r>
               <a:rPr lang="en-US" sz="1200" dirty="0">
                 <a:solidFill>
-                  <a:srgbClr val="C9D3F5"/>
+                  <a:srgbClr val="1F2429"/>
                 </a:solidFill>
                 <a:latin typeface="Courier New" pitchFamily="34" charset="0"/>
                 <a:ea typeface="Courier New" pitchFamily="34" charset="-122"/>
@@ -10133,7 +10157,7 @@
             <a:r>
               <a:rPr lang="en-US" sz="1200" dirty="0">
                 <a:solidFill>
-                  <a:srgbClr val="C9D3F5"/>
+                  <a:srgbClr val="1F2429"/>
                 </a:solidFill>
                 <a:latin typeface="Courier New" pitchFamily="34" charset="0"/>
                 <a:ea typeface="Courier New" pitchFamily="34" charset="-122"/>
@@ -10162,7 +10186,7 @@
             <a:r>
               <a:rPr lang="en-US" sz="1200" dirty="0">
                 <a:solidFill>
-                  <a:srgbClr val="C9D3F5"/>
+                  <a:srgbClr val="1F2429"/>
                 </a:solidFill>
                 <a:latin typeface="Courier New" pitchFamily="34" charset="0"/>
                 <a:ea typeface="Courier New" pitchFamily="34" charset="-122"/>
@@ -10182,7 +10206,7 @@
             <a:r>
               <a:rPr lang="en-US" sz="1200" dirty="0">
                 <a:solidFill>
-                  <a:srgbClr val="C9D3F5"/>
+                  <a:srgbClr val="1F2429"/>
                 </a:solidFill>
                 <a:latin typeface="Courier New" pitchFamily="34" charset="0"/>
                 <a:ea typeface="Courier New" pitchFamily="34" charset="-122"/>
@@ -10202,7 +10226,7 @@
             <a:r>
               <a:rPr lang="en-US" sz="1200" dirty="0">
                 <a:solidFill>
-                  <a:srgbClr val="C9D3F5"/>
+                  <a:srgbClr val="1F2429"/>
                 </a:solidFill>
                 <a:latin typeface="Courier New" pitchFamily="34" charset="0"/>
                 <a:ea typeface="Courier New" pitchFamily="34" charset="-122"/>
@@ -10222,7 +10246,7 @@
             <a:r>
               <a:rPr lang="en-US" sz="1200" dirty="0">
                 <a:solidFill>
-                  <a:srgbClr val="C9D3F5"/>
+                  <a:srgbClr val="1F2429"/>
                 </a:solidFill>
                 <a:latin typeface="Courier New" pitchFamily="34" charset="0"/>
                 <a:ea typeface="Courier New" pitchFamily="34" charset="-122"/>
@@ -10242,7 +10266,7 @@
             <a:r>
               <a:rPr lang="en-US" sz="1200" dirty="0">
                 <a:solidFill>
-                  <a:srgbClr val="C9D3F5"/>
+                  <a:srgbClr val="1F2429"/>
                 </a:solidFill>
                 <a:latin typeface="Courier New" pitchFamily="34" charset="0"/>
                 <a:ea typeface="Courier New" pitchFamily="34" charset="-122"/>
@@ -10262,7 +10286,7 @@
             <a:r>
               <a:rPr lang="en-US" sz="1200" dirty="0">
                 <a:solidFill>
-                  <a:srgbClr val="C9D3F5"/>
+                  <a:srgbClr val="1F2429"/>
                 </a:solidFill>
                 <a:latin typeface="Courier New" pitchFamily="34" charset="0"/>
                 <a:ea typeface="Courier New" pitchFamily="34" charset="-122"/>
@@ -10475,7 +10499,7 @@
         <p:spPr>
           <a:xfrm>
             <a:off x="640080" y="1965960"/>
-            <a:ext cx="10911535" cy="1737360"/>
+            <a:ext cx="10911535" cy="3657600"/>
           </a:xfrm>
           <a:prstGeom prst="roundRect">
             <a:avLst>
@@ -10506,7 +10530,7 @@
         <p:spPr>
           <a:xfrm>
             <a:off x="868680" y="2103120"/>
-            <a:ext cx="10454335" cy="274320"/>
+            <a:ext cx="10454335" cy="400000"/>
           </a:xfrm>
           <a:prstGeom prst="rect">
             <a:avLst/>
@@ -10522,7 +10546,7 @@
               <a:buNone/>
             </a:pPr>
             <a:r>
-              <a:rPr lang="en-US" sz="1000" b="1" spc="200" kern="0" dirty="0">
+              <a:rPr lang="en-US" sz="1800" b="1" spc="200" kern="0" dirty="0">
                 <a:solidFill>
                   <a:srgbClr val="33459E"/>
                 </a:solidFill>
@@ -10532,7 +10556,7 @@
               </a:rPr>
               <a:t>NOTE</a:t>
             </a:r>
-            <a:endParaRPr lang="en-US" sz="1000" dirty="0"/>
+            <a:endParaRPr lang="en-US" sz="1800" dirty="0"/>
           </a:p>
         </p:txBody>
       </p:sp>
@@ -10544,24 +10568,24 @@
         </p:nvSpPr>
         <p:spPr>
           <a:xfrm>
-            <a:off x="868680" y="2404872"/>
-            <a:ext cx="10454335" cy="1143000"/>
-          </a:xfrm>
-          <a:prstGeom prst="rect">
-            <a:avLst/>
-          </a:prstGeom>
-          <a:noFill/>
-          <a:ln/>
-        </p:spPr>
-        <p:txBody>
-          <a:bodyPr wrap="square" lIns="0" tIns="0" rIns="0" bIns="0" rtlCol="0" anchor="t"/>
+            <a:off x="868680" y="2795960"/>
+            <a:ext cx="10454335" cy="2500000"/>
+          </a:xfrm>
+          <a:prstGeom prst="rect">
+            <a:avLst/>
+          </a:prstGeom>
+          <a:noFill/>
+          <a:ln/>
+        </p:spPr>
+        <p:txBody>
+          <a:bodyPr wrap="square" lIns="0" tIns="0" rIns="0" bIns="0" rtlCol="0" anchor="ctr"/>
           <a:lstStyle/>
           <a:p>
             <a:pPr indent="0" marL="0">
               <a:buNone/>
             </a:pPr>
             <a:r>
-              <a:rPr lang="en-US" sz="1250" dirty="0">
+              <a:rPr lang="en-US" sz="2800" dirty="0">
                 <a:solidFill>
                   <a:srgbClr val="26262F"/>
                 </a:solidFill>
@@ -10571,7 +10595,7 @@
               </a:rPr>
               <a:t>CSRF specifically abuses the browser's automatic cookie-attaching. If your API requires a token sent manually in an Authorization header (as with JWTs in Lecture 25) rather than relying on cookies, a forged form submission can't attach that header -- though it introduces its own tradeoffs around client-side token storage.</a:t>
             </a:r>
-            <a:endParaRPr lang="en-US" sz="1250" dirty="0"/>
+            <a:endParaRPr lang="en-US" sz="2800" dirty="0"/>
           </a:p>
         </p:txBody>
       </p:sp>
@@ -11204,9 +11228,13 @@
             </a:avLst>
           </a:prstGeom>
           <a:solidFill>
-            <a:srgbClr val="1E1E4C"/>
+            <a:srgbClr val="F7F8F9"/>
           </a:solidFill>
-          <a:ln/>
+          <a:ln w="9525">
+            <a:solidFill>
+              <a:srgbClr val="D0D5DD"/>
+            </a:solidFill>
+          </a:ln>
         </p:spPr>
         <p:txBody>
           <a:bodyPr/>
@@ -11243,7 +11271,7 @@
             <a:r>
               <a:rPr lang="en-US" sz="1366" dirty="0">
                 <a:solidFill>
-                  <a:srgbClr val="C9D3F5"/>
+                  <a:srgbClr val="1F2429"/>
                 </a:solidFill>
                 <a:latin typeface="Courier New" pitchFamily="34" charset="0"/>
                 <a:ea typeface="Courier New" pitchFamily="34" charset="-122"/>
@@ -11263,7 +11291,7 @@
             <a:r>
               <a:rPr lang="en-US" sz="1366" dirty="0">
                 <a:solidFill>
-                  <a:srgbClr val="C9D3F5"/>
+                  <a:srgbClr val="1F2429"/>
                 </a:solidFill>
                 <a:latin typeface="Courier New" pitchFamily="34" charset="0"/>
                 <a:ea typeface="Courier New" pitchFamily="34" charset="-122"/>
@@ -11283,7 +11311,7 @@
             <a:r>
               <a:rPr lang="en-US" sz="1366" dirty="0">
                 <a:solidFill>
-                  <a:srgbClr val="C9D3F5"/>
+                  <a:srgbClr val="1F2429"/>
                 </a:solidFill>
                 <a:latin typeface="Courier New" pitchFamily="34" charset="0"/>
                 <a:ea typeface="Courier New" pitchFamily="34" charset="-122"/>
@@ -11303,7 +11331,7 @@
             <a:r>
               <a:rPr lang="en-US" sz="1366" dirty="0">
                 <a:solidFill>
-                  <a:srgbClr val="C9D3F5"/>
+                  <a:srgbClr val="1F2429"/>
                 </a:solidFill>
                 <a:latin typeface="Courier New" pitchFamily="34" charset="0"/>
                 <a:ea typeface="Courier New" pitchFamily="34" charset="-122"/>
@@ -11323,7 +11351,7 @@
             <a:r>
               <a:rPr lang="en-US" sz="1366" dirty="0">
                 <a:solidFill>
-                  <a:srgbClr val="C9D3F5"/>
+                  <a:srgbClr val="1F2429"/>
                 </a:solidFill>
                 <a:latin typeface="Courier New" pitchFamily="34" charset="0"/>
                 <a:ea typeface="Courier New" pitchFamily="34" charset="-122"/>
@@ -11352,7 +11380,7 @@
             <a:r>
               <a:rPr lang="en-US" sz="1366" dirty="0">
                 <a:solidFill>
-                  <a:srgbClr val="C9D3F5"/>
+                  <a:srgbClr val="1F2429"/>
                 </a:solidFill>
                 <a:latin typeface="Courier New" pitchFamily="34" charset="0"/>
                 <a:ea typeface="Courier New" pitchFamily="34" charset="-122"/>
@@ -11372,7 +11400,7 @@
             <a:r>
               <a:rPr lang="en-US" sz="1366" dirty="0">
                 <a:solidFill>
-                  <a:srgbClr val="C9D3F5"/>
+                  <a:srgbClr val="1F2429"/>
                 </a:solidFill>
                 <a:latin typeface="Courier New" pitchFamily="34" charset="0"/>
                 <a:ea typeface="Courier New" pitchFamily="34" charset="-122"/>
@@ -11392,7 +11420,7 @@
             <a:r>
               <a:rPr lang="en-US" sz="1366" dirty="0">
                 <a:solidFill>
-                  <a:srgbClr val="C9D3F5"/>
+                  <a:srgbClr val="1F2429"/>
                 </a:solidFill>
                 <a:latin typeface="Courier New" pitchFamily="34" charset="0"/>
                 <a:ea typeface="Courier New" pitchFamily="34" charset="-122"/>
@@ -11412,7 +11440,7 @@
             <a:r>
               <a:rPr lang="en-US" sz="1366" dirty="0">
                 <a:solidFill>
-                  <a:srgbClr val="C9D3F5"/>
+                  <a:srgbClr val="1F2429"/>
                 </a:solidFill>
                 <a:latin typeface="Courier New" pitchFamily="34" charset="0"/>
                 <a:ea typeface="Courier New" pitchFamily="34" charset="-122"/>
@@ -11432,7 +11460,7 @@
             <a:r>
               <a:rPr lang="en-US" sz="1366" dirty="0">
                 <a:solidFill>
-                  <a:srgbClr val="C9D3F5"/>
+                  <a:srgbClr val="1F2429"/>
                 </a:solidFill>
                 <a:latin typeface="Courier New" pitchFamily="34" charset="0"/>
                 <a:ea typeface="Courier New" pitchFamily="34" charset="-122"/>
@@ -11452,7 +11480,7 @@
             <a:r>
               <a:rPr lang="en-US" sz="1366" dirty="0">
                 <a:solidFill>
-                  <a:srgbClr val="C9D3F5"/>
+                  <a:srgbClr val="1F2429"/>
                 </a:solidFill>
                 <a:latin typeface="Courier New" pitchFamily="34" charset="0"/>
                 <a:ea typeface="Courier New" pitchFamily="34" charset="-122"/>
@@ -11472,7 +11500,7 @@
             <a:r>
               <a:rPr lang="en-US" sz="1366" dirty="0">
                 <a:solidFill>
-                  <a:srgbClr val="C9D3F5"/>
+                  <a:srgbClr val="1F2429"/>
                 </a:solidFill>
                 <a:latin typeface="Courier New" pitchFamily="34" charset="0"/>
                 <a:ea typeface="Courier New" pitchFamily="34" charset="-122"/>
@@ -11646,7 +11674,7 @@
         <p:spPr>
           <a:xfrm>
             <a:off x="640080" y="1965960"/>
-            <a:ext cx="10911535" cy="1737360"/>
+            <a:ext cx="10911535" cy="3657600"/>
           </a:xfrm>
           <a:prstGeom prst="roundRect">
             <a:avLst>
@@ -11677,7 +11705,7 @@
         <p:spPr>
           <a:xfrm>
             <a:off x="868680" y="2103120"/>
-            <a:ext cx="10454335" cy="274320"/>
+            <a:ext cx="10454335" cy="400000"/>
           </a:xfrm>
           <a:prstGeom prst="rect">
             <a:avLst/>
@@ -11693,7 +11721,7 @@
               <a:buNone/>
             </a:pPr>
             <a:r>
-              <a:rPr lang="en-US" sz="1000" b="1" spc="200" kern="0" dirty="0">
+              <a:rPr lang="en-US" sz="1800" b="1" spc="200" kern="0" dirty="0">
                 <a:solidFill>
                   <a:srgbClr val="8A3A12"/>
                 </a:solidFill>
@@ -11703,7 +11731,7 @@
               </a:rPr>
               <a:t>WARNING</a:t>
             </a:r>
-            <a:endParaRPr lang="en-US" sz="1000" dirty="0"/>
+            <a:endParaRPr lang="en-US" sz="1800" dirty="0"/>
           </a:p>
         </p:txBody>
       </p:sp>
@@ -11715,24 +11743,24 @@
         </p:nvSpPr>
         <p:spPr>
           <a:xfrm>
-            <a:off x="868680" y="2404872"/>
-            <a:ext cx="10454335" cy="1143000"/>
-          </a:xfrm>
-          <a:prstGeom prst="rect">
-            <a:avLst/>
-          </a:prstGeom>
-          <a:noFill/>
-          <a:ln/>
-        </p:spPr>
-        <p:txBody>
-          <a:bodyPr wrap="square" lIns="0" tIns="0" rIns="0" bIns="0" rtlCol="0" anchor="t"/>
+            <a:off x="868680" y="2795960"/>
+            <a:ext cx="10454335" cy="2500000"/>
+          </a:xfrm>
+          <a:prstGeom prst="rect">
+            <a:avLst/>
+          </a:prstGeom>
+          <a:noFill/>
+          <a:ln/>
+        </p:spPr>
+        <p:txBody>
+          <a:bodyPr wrap="square" lIns="0" tIns="0" rIns="0" bIns="0" rtlCol="0" anchor="ctr"/>
           <a:lstStyle/>
           <a:p>
             <a:pPr indent="0" marL="0">
               <a:buNone/>
             </a:pPr>
             <a:r>
-              <a:rPr lang="en-US" sz="1250" dirty="0">
+              <a:rPr lang="en-US" sz="2800" dirty="0">
                 <a:solidFill>
                   <a:srgbClr val="26262F"/>
                 </a:solidFill>
@@ -11742,7 +11770,7 @@
               </a:rPr>
               <a:t>Hiding an admin feature in React ({user.isAdmin &amp;&amp; &lt;AdminButton /&gt;}) only improves the interface -- it does nothing to stop someone calling the admin API endpoint directly. Every privileged action must be enforced on the SERVER, not just hidden on the client.</a:t>
             </a:r>
-            <a:endParaRPr lang="en-US" sz="1250" dirty="0"/>
+            <a:endParaRPr lang="en-US" sz="2800" dirty="0"/>
           </a:p>
         </p:txBody>
       </p:sp>
@@ -13699,7 +13727,7 @@
         <p:spPr>
           <a:xfrm>
             <a:off x="640080" y="1965960"/>
-            <a:ext cx="10911535" cy="1737360"/>
+            <a:ext cx="10911535" cy="3657600"/>
           </a:xfrm>
           <a:prstGeom prst="roundRect">
             <a:avLst>
@@ -13730,7 +13758,7 @@
         <p:spPr>
           <a:xfrm>
             <a:off x="868680" y="2103120"/>
-            <a:ext cx="10454335" cy="274320"/>
+            <a:ext cx="10454335" cy="400000"/>
           </a:xfrm>
           <a:prstGeom prst="rect">
             <a:avLst/>
@@ -13746,7 +13774,7 @@
               <a:buNone/>
             </a:pPr>
             <a:r>
-              <a:rPr lang="en-US" sz="1000" b="1" spc="200" kern="0" dirty="0">
+              <a:rPr lang="en-US" sz="1800" b="1" spc="200" kern="0" dirty="0">
                 <a:solidFill>
                   <a:srgbClr val="33459E"/>
                 </a:solidFill>
@@ -13756,7 +13784,7 @@
               </a:rPr>
               <a:t>NOTE</a:t>
             </a:r>
-            <a:endParaRPr lang="en-US" sz="1000" dirty="0"/>
+            <a:endParaRPr lang="en-US" sz="1800" dirty="0"/>
           </a:p>
         </p:txBody>
       </p:sp>
@@ -13768,24 +13796,24 @@
         </p:nvSpPr>
         <p:spPr>
           <a:xfrm>
-            <a:off x="868680" y="2404872"/>
-            <a:ext cx="10454335" cy="1143000"/>
-          </a:xfrm>
-          <a:prstGeom prst="rect">
-            <a:avLst/>
-          </a:prstGeom>
-          <a:noFill/>
-          <a:ln/>
-        </p:spPr>
-        <p:txBody>
-          <a:bodyPr wrap="square" lIns="0" tIns="0" rIns="0" bIns="0" rtlCol="0" anchor="t"/>
+            <a:off x="868680" y="2795960"/>
+            <a:ext cx="10454335" cy="2500000"/>
+          </a:xfrm>
+          <a:prstGeom prst="rect">
+            <a:avLst/>
+          </a:prstGeom>
+          <a:noFill/>
+          <a:ln/>
+        </p:spPr>
+        <p:txBody>
+          <a:bodyPr wrap="square" lIns="0" tIns="0" rIns="0" bIns="0" rtlCol="0" anchor="ctr"/>
           <a:lstStyle/>
           <a:p>
             <a:pPr indent="0" marL="0">
               <a:buNone/>
             </a:pPr>
             <a:r>
-              <a:rPr lang="en-US" sz="1250" dirty="0">
+              <a:rPr lang="en-US" sz="2800" dirty="0">
                 <a:solidFill>
                   <a:srgbClr val="26262F"/>
                 </a:solidFill>
@@ -13795,7 +13823,7 @@
               </a:rPr>
               <a:t>Most attacks in this lecture appear on the OWASP Top 10 — a well-known, regularly updated list of the most critical web application security risks, published by the Open Worldwide Application Security Project. Worth revisiting throughout your career.</a:t>
             </a:r>
-            <a:endParaRPr lang="en-US" sz="1250" dirty="0"/>
+            <a:endParaRPr lang="en-US" sz="2800" dirty="0"/>
           </a:p>
         </p:txBody>
       </p:sp>
@@ -13969,9 +13997,13 @@
             </a:avLst>
           </a:prstGeom>
           <a:solidFill>
-            <a:srgbClr val="1E1E4C"/>
+            <a:srgbClr val="F7F8F9"/>
           </a:solidFill>
-          <a:ln/>
+          <a:ln w="9525">
+            <a:solidFill>
+              <a:srgbClr val="D0D5DD"/>
+            </a:solidFill>
+          </a:ln>
         </p:spPr>
         <p:txBody>
           <a:bodyPr/>
@@ -14008,7 +14040,7 @@
             <a:r>
               <a:rPr lang="en-US" sz="1400" dirty="0">
                 <a:solidFill>
-                  <a:srgbClr val="C9D3F5"/>
+                  <a:srgbClr val="1F2429"/>
                 </a:solidFill>
                 <a:latin typeface="Courier New" pitchFamily="34" charset="0"/>
                 <a:ea typeface="Courier New" pitchFamily="34" charset="-122"/>
@@ -14028,7 +14060,7 @@
             <a:r>
               <a:rPr lang="en-US" sz="1400" dirty="0">
                 <a:solidFill>
-                  <a:srgbClr val="C9D3F5"/>
+                  <a:srgbClr val="1F2429"/>
                 </a:solidFill>
                 <a:latin typeface="Courier New" pitchFamily="34" charset="0"/>
                 <a:ea typeface="Courier New" pitchFamily="34" charset="-122"/>
@@ -14057,7 +14089,7 @@
             <a:r>
               <a:rPr lang="en-US" sz="1400" dirty="0">
                 <a:solidFill>
-                  <a:srgbClr val="C9D3F5"/>
+                  <a:srgbClr val="1F2429"/>
                 </a:solidFill>
                 <a:latin typeface="Courier New" pitchFamily="34" charset="0"/>
                 <a:ea typeface="Courier New" pitchFamily="34" charset="-122"/>
@@ -14077,7 +14109,7 @@
             <a:r>
               <a:rPr lang="en-US" sz="1400" dirty="0">
                 <a:solidFill>
-                  <a:srgbClr val="C9D3F5"/>
+                  <a:srgbClr val="1F2429"/>
                 </a:solidFill>
                 <a:latin typeface="Courier New" pitchFamily="34" charset="0"/>
                 <a:ea typeface="Courier New" pitchFamily="34" charset="-122"/>
@@ -14097,7 +14129,7 @@
             <a:r>
               <a:rPr lang="en-US" sz="1400" dirty="0">
                 <a:solidFill>
-                  <a:srgbClr val="C9D3F5"/>
+                  <a:srgbClr val="1F2429"/>
                 </a:solidFill>
                 <a:latin typeface="Courier New" pitchFamily="34" charset="0"/>
                 <a:ea typeface="Courier New" pitchFamily="34" charset="-122"/>
@@ -14117,7 +14149,7 @@
             <a:r>
               <a:rPr lang="en-US" sz="1400" dirty="0">
                 <a:solidFill>
-                  <a:srgbClr val="C9D3F5"/>
+                  <a:srgbClr val="1F2429"/>
                 </a:solidFill>
                 <a:latin typeface="Courier New" pitchFamily="34" charset="0"/>
                 <a:ea typeface="Courier New" pitchFamily="34" charset="-122"/>
@@ -14137,7 +14169,7 @@
             <a:r>
               <a:rPr lang="en-US" sz="1400" dirty="0">
                 <a:solidFill>
-                  <a:srgbClr val="C9D3F5"/>
+                  <a:srgbClr val="1F2429"/>
                 </a:solidFill>
                 <a:latin typeface="Courier New" pitchFamily="34" charset="0"/>
                 <a:ea typeface="Courier New" pitchFamily="34" charset="-122"/>
@@ -14817,9 +14849,13 @@
             </a:avLst>
           </a:prstGeom>
           <a:solidFill>
-            <a:srgbClr val="1E1E4C"/>
+            <a:srgbClr val="F7F8F9"/>
           </a:solidFill>
-          <a:ln/>
+          <a:ln w="9525">
+            <a:solidFill>
+              <a:srgbClr val="D0D5DD"/>
+            </a:solidFill>
+          </a:ln>
         </p:spPr>
         <p:txBody>
           <a:bodyPr/>
@@ -14856,7 +14892,7 @@
             <a:r>
               <a:rPr lang="en-US" sz="1400" dirty="0">
                 <a:solidFill>
-                  <a:srgbClr val="C9D3F5"/>
+                  <a:srgbClr val="1F2429"/>
                 </a:solidFill>
                 <a:latin typeface="Courier New" pitchFamily="34" charset="0"/>
                 <a:ea typeface="Courier New" pitchFamily="34" charset="-122"/>
@@ -14885,7 +14921,7 @@
             <a:r>
               <a:rPr lang="en-US" sz="1400" dirty="0">
                 <a:solidFill>
-                  <a:srgbClr val="C9D3F5"/>
+                  <a:srgbClr val="1F2429"/>
                 </a:solidFill>
                 <a:latin typeface="Courier New" pitchFamily="34" charset="0"/>
                 <a:ea typeface="Courier New" pitchFamily="34" charset="-122"/>
@@ -14905,7 +14941,7 @@
             <a:r>
               <a:rPr lang="en-US" sz="1400" dirty="0">
                 <a:solidFill>
-                  <a:srgbClr val="C9D3F5"/>
+                  <a:srgbClr val="1F2429"/>
                 </a:solidFill>
                 <a:latin typeface="Courier New" pitchFamily="34" charset="0"/>
                 <a:ea typeface="Courier New" pitchFamily="34" charset="-122"/>
@@ -14925,7 +14961,7 @@
             <a:r>
               <a:rPr lang="en-US" sz="1400" dirty="0">
                 <a:solidFill>
-                  <a:srgbClr val="C9D3F5"/>
+                  <a:srgbClr val="1F2429"/>
                 </a:solidFill>
                 <a:latin typeface="Courier New" pitchFamily="34" charset="0"/>
                 <a:ea typeface="Courier New" pitchFamily="34" charset="-122"/>
@@ -14945,7 +14981,7 @@
             <a:r>
               <a:rPr lang="en-US" sz="1400" dirty="0">
                 <a:solidFill>
-                  <a:srgbClr val="C9D3F5"/>
+                  <a:srgbClr val="1F2429"/>
                 </a:solidFill>
                 <a:latin typeface="Courier New" pitchFamily="34" charset="0"/>
                 <a:ea typeface="Courier New" pitchFamily="34" charset="-122"/>
@@ -14965,7 +15001,7 @@
             <a:r>
               <a:rPr lang="en-US" sz="1400" dirty="0">
                 <a:solidFill>
-                  <a:srgbClr val="C9D3F5"/>
+                  <a:srgbClr val="1F2429"/>
                 </a:solidFill>
                 <a:latin typeface="Courier New" pitchFamily="34" charset="0"/>
                 <a:ea typeface="Courier New" pitchFamily="34" charset="-122"/>
@@ -14994,7 +15030,7 @@
             <a:r>
               <a:rPr lang="en-US" sz="1400" dirty="0">
                 <a:solidFill>
-                  <a:srgbClr val="C9D3F5"/>
+                  <a:srgbClr val="1F2429"/>
                 </a:solidFill>
                 <a:latin typeface="Courier New" pitchFamily="34" charset="0"/>
                 <a:ea typeface="Courier New" pitchFamily="34" charset="-122"/>
@@ -16400,9 +16436,13 @@
             </a:avLst>
           </a:prstGeom>
           <a:solidFill>
-            <a:srgbClr val="1E1E4C"/>
+            <a:srgbClr val="F7F8F9"/>
           </a:solidFill>
-          <a:ln/>
+          <a:ln w="9525">
+            <a:solidFill>
+              <a:srgbClr val="D0D5DD"/>
+            </a:solidFill>
+          </a:ln>
         </p:spPr>
         <p:txBody>
           <a:bodyPr/>
@@ -16439,7 +16479,7 @@
             <a:r>
               <a:rPr lang="en-US" sz="1400" dirty="0">
                 <a:solidFill>
-                  <a:srgbClr val="C9D3F5"/>
+                  <a:srgbClr val="1F2429"/>
                 </a:solidFill>
                 <a:latin typeface="Courier New" pitchFamily="34" charset="0"/>
                 <a:ea typeface="Courier New" pitchFamily="34" charset="-122"/>
@@ -16459,7 +16499,7 @@
             <a:r>
               <a:rPr lang="en-US" sz="1400" dirty="0">
                 <a:solidFill>
-                  <a:srgbClr val="C9D3F5"/>
+                  <a:srgbClr val="1F2429"/>
                 </a:solidFill>
                 <a:latin typeface="Courier New" pitchFamily="34" charset="0"/>
                 <a:ea typeface="Courier New" pitchFamily="34" charset="-122"/>
@@ -16479,7 +16519,7 @@
             <a:r>
               <a:rPr lang="en-US" sz="1400" dirty="0">
                 <a:solidFill>
-                  <a:srgbClr val="C9D3F5"/>
+                  <a:srgbClr val="1F2429"/>
                 </a:solidFill>
                 <a:latin typeface="Courier New" pitchFamily="34" charset="0"/>
                 <a:ea typeface="Courier New" pitchFamily="34" charset="-122"/>
@@ -16499,7 +16539,7 @@
             <a:r>
               <a:rPr lang="en-US" sz="1400" dirty="0">
                 <a:solidFill>
-                  <a:srgbClr val="C9D3F5"/>
+                  <a:srgbClr val="1F2429"/>
                 </a:solidFill>
                 <a:latin typeface="Courier New" pitchFamily="34" charset="0"/>
                 <a:ea typeface="Courier New" pitchFamily="34" charset="-122"/>
@@ -16519,7 +16559,7 @@
             <a:r>
               <a:rPr lang="en-US" sz="1400" dirty="0">
                 <a:solidFill>
-                  <a:srgbClr val="C9D3F5"/>
+                  <a:srgbClr val="1F2429"/>
                 </a:solidFill>
                 <a:latin typeface="Courier New" pitchFamily="34" charset="0"/>
                 <a:ea typeface="Courier New" pitchFamily="34" charset="-122"/>
@@ -16740,9 +16780,13 @@
             </a:avLst>
           </a:prstGeom>
           <a:solidFill>
-            <a:srgbClr val="1E1E4C"/>
+            <a:srgbClr val="F7F8F9"/>
           </a:solidFill>
-          <a:ln/>
+          <a:ln w="9525">
+            <a:solidFill>
+              <a:srgbClr val="D0D5DD"/>
+            </a:solidFill>
+          </a:ln>
         </p:spPr>
         <p:txBody>
           <a:bodyPr/>
@@ -16779,7 +16823,7 @@
             <a:r>
               <a:rPr lang="en-US" sz="1400" dirty="0">
                 <a:solidFill>
-                  <a:srgbClr val="C9D3F5"/>
+                  <a:srgbClr val="1F2429"/>
                 </a:solidFill>
                 <a:latin typeface="Courier New" pitchFamily="34" charset="0"/>
                 <a:ea typeface="Courier New" pitchFamily="34" charset="-122"/>
@@ -16799,7 +16843,7 @@
             <a:r>
               <a:rPr lang="en-US" sz="1400" dirty="0">
                 <a:solidFill>
-                  <a:srgbClr val="C9D3F5"/>
+                  <a:srgbClr val="1F2429"/>
                 </a:solidFill>
                 <a:latin typeface="Courier New" pitchFamily="34" charset="0"/>
                 <a:ea typeface="Courier New" pitchFamily="34" charset="-122"/>
@@ -16819,7 +16863,7 @@
             <a:r>
               <a:rPr lang="en-US" sz="1400" dirty="0">
                 <a:solidFill>
-                  <a:srgbClr val="C9D3F5"/>
+                  <a:srgbClr val="1F2429"/>
                 </a:solidFill>
                 <a:latin typeface="Courier New" pitchFamily="34" charset="0"/>
                 <a:ea typeface="Courier New" pitchFamily="34" charset="-122"/>
@@ -16839,7 +16883,7 @@
             <a:r>
               <a:rPr lang="en-US" sz="1400" dirty="0">
                 <a:solidFill>
-                  <a:srgbClr val="C9D3F5"/>
+                  <a:srgbClr val="1F2429"/>
                 </a:solidFill>
                 <a:latin typeface="Courier New" pitchFamily="34" charset="0"/>
                 <a:ea typeface="Courier New" pitchFamily="34" charset="-122"/>
@@ -16859,7 +16903,7 @@
             <a:r>
               <a:rPr lang="en-US" sz="1400" dirty="0">
                 <a:solidFill>
-                  <a:srgbClr val="C9D3F5"/>
+                  <a:srgbClr val="1F2429"/>
                 </a:solidFill>
                 <a:latin typeface="Courier New" pitchFamily="34" charset="0"/>
                 <a:ea typeface="Courier New" pitchFamily="34" charset="-122"/>
@@ -16879,7 +16923,7 @@
             <a:r>
               <a:rPr lang="en-US" sz="1400" dirty="0">
                 <a:solidFill>
-                  <a:srgbClr val="C9D3F5"/>
+                  <a:srgbClr val="1F2429"/>
                 </a:solidFill>
                 <a:latin typeface="Courier New" pitchFamily="34" charset="0"/>
                 <a:ea typeface="Courier New" pitchFamily="34" charset="-122"/>
@@ -16899,7 +16943,7 @@
             <a:r>
               <a:rPr lang="en-US" sz="1400" dirty="0">
                 <a:solidFill>
-                  <a:srgbClr val="C9D3F5"/>
+                  <a:srgbClr val="1F2429"/>
                 </a:solidFill>
                 <a:latin typeface="Courier New" pitchFamily="34" charset="0"/>
                 <a:ea typeface="Courier New" pitchFamily="34" charset="-122"/>
@@ -17579,9 +17623,13 @@
             </a:avLst>
           </a:prstGeom>
           <a:solidFill>
-            <a:srgbClr val="1E1E4C"/>
+            <a:srgbClr val="F7F8F9"/>
           </a:solidFill>
-          <a:ln/>
+          <a:ln w="9525">
+            <a:solidFill>
+              <a:srgbClr val="D0D5DD"/>
+            </a:solidFill>
+          </a:ln>
         </p:spPr>
         <p:txBody>
           <a:bodyPr/>
@@ -17618,7 +17666,7 @@
             <a:r>
               <a:rPr lang="en-US" sz="1200" dirty="0">
                 <a:solidFill>
-                  <a:srgbClr val="C9D3F5"/>
+                  <a:srgbClr val="1F2429"/>
                 </a:solidFill>
                 <a:latin typeface="Courier New" pitchFamily="34" charset="0"/>
                 <a:ea typeface="Courier New" pitchFamily="34" charset="-122"/>
@@ -17638,7 +17686,7 @@
             <a:r>
               <a:rPr lang="en-US" sz="1200" dirty="0">
                 <a:solidFill>
-                  <a:srgbClr val="C9D3F5"/>
+                  <a:srgbClr val="1F2429"/>
                 </a:solidFill>
                 <a:latin typeface="Courier New" pitchFamily="34" charset="0"/>
                 <a:ea typeface="Courier New" pitchFamily="34" charset="-122"/>
@@ -17658,7 +17706,7 @@
             <a:r>
               <a:rPr lang="en-US" sz="1200" dirty="0">
                 <a:solidFill>
-                  <a:srgbClr val="C9D3F5"/>
+                  <a:srgbClr val="1F2429"/>
                 </a:solidFill>
                 <a:latin typeface="Courier New" pitchFamily="34" charset="0"/>
                 <a:ea typeface="Courier New" pitchFamily="34" charset="-122"/>
@@ -17678,7 +17726,7 @@
             <a:r>
               <a:rPr lang="en-US" sz="1200" dirty="0">
                 <a:solidFill>
-                  <a:srgbClr val="C9D3F5"/>
+                  <a:srgbClr val="1F2429"/>
                 </a:solidFill>
                 <a:latin typeface="Courier New" pitchFamily="34" charset="0"/>
                 <a:ea typeface="Courier New" pitchFamily="34" charset="-122"/>
@@ -17698,7 +17746,7 @@
             <a:r>
               <a:rPr lang="en-US" sz="1200" dirty="0">
                 <a:solidFill>
-                  <a:srgbClr val="C9D3F5"/>
+                  <a:srgbClr val="1F2429"/>
                 </a:solidFill>
                 <a:latin typeface="Courier New" pitchFamily="34" charset="0"/>
                 <a:ea typeface="Courier New" pitchFamily="34" charset="-122"/>
@@ -17718,7 +17766,7 @@
             <a:r>
               <a:rPr lang="en-US" sz="1200" dirty="0">
                 <a:solidFill>
-                  <a:srgbClr val="C9D3F5"/>
+                  <a:srgbClr val="1F2429"/>
                 </a:solidFill>
                 <a:latin typeface="Courier New" pitchFamily="34" charset="0"/>
                 <a:ea typeface="Courier New" pitchFamily="34" charset="-122"/>
@@ -17747,7 +17795,7 @@
             <a:r>
               <a:rPr lang="en-US" sz="1200" dirty="0">
                 <a:solidFill>
-                  <a:srgbClr val="C9D3F5"/>
+                  <a:srgbClr val="1F2429"/>
                 </a:solidFill>
                 <a:latin typeface="Courier New" pitchFamily="34" charset="0"/>
                 <a:ea typeface="Courier New" pitchFamily="34" charset="-122"/>
@@ -17767,7 +17815,7 @@
             <a:r>
               <a:rPr lang="en-US" sz="1200" dirty="0">
                 <a:solidFill>
-                  <a:srgbClr val="C9D3F5"/>
+                  <a:srgbClr val="1F2429"/>
                 </a:solidFill>
                 <a:latin typeface="Courier New" pitchFamily="34" charset="0"/>
                 <a:ea typeface="Courier New" pitchFamily="34" charset="-122"/>
@@ -17787,7 +17835,7 @@
             <a:r>
               <a:rPr lang="en-US" sz="1200" dirty="0">
                 <a:solidFill>
-                  <a:srgbClr val="C9D3F5"/>
+                  <a:srgbClr val="1F2429"/>
                 </a:solidFill>
                 <a:latin typeface="Courier New" pitchFamily="34" charset="0"/>
                 <a:ea typeface="Courier New" pitchFamily="34" charset="-122"/>
@@ -17807,7 +17855,7 @@
             <a:r>
               <a:rPr lang="en-US" sz="1200" dirty="0">
                 <a:solidFill>
-                  <a:srgbClr val="C9D3F5"/>
+                  <a:srgbClr val="1F2429"/>
                 </a:solidFill>
                 <a:latin typeface="Courier New" pitchFamily="34" charset="0"/>
                 <a:ea typeface="Courier New" pitchFamily="34" charset="-122"/>
@@ -17827,7 +17875,7 @@
             <a:r>
               <a:rPr lang="en-US" sz="1200" dirty="0">
                 <a:solidFill>
-                  <a:srgbClr val="C9D3F5"/>
+                  <a:srgbClr val="1F2429"/>
                 </a:solidFill>
                 <a:latin typeface="Courier New" pitchFamily="34" charset="0"/>
                 <a:ea typeface="Courier New" pitchFamily="34" charset="-122"/>
@@ -18040,7 +18088,7 @@
         <p:spPr>
           <a:xfrm>
             <a:off x="640080" y="1965960"/>
-            <a:ext cx="10911535" cy="1737360"/>
+            <a:ext cx="10911535" cy="3657600"/>
           </a:xfrm>
           <a:prstGeom prst="roundRect">
             <a:avLst>
@@ -18071,7 +18119,7 @@
         <p:spPr>
           <a:xfrm>
             <a:off x="868680" y="2103120"/>
-            <a:ext cx="10454335" cy="274320"/>
+            <a:ext cx="10454335" cy="400000"/>
           </a:xfrm>
           <a:prstGeom prst="rect">
             <a:avLst/>
@@ -18087,7 +18135,7 @@
               <a:buNone/>
             </a:pPr>
             <a:r>
-              <a:rPr lang="en-US" sz="1000" b="1" spc="200" kern="0" dirty="0">
+              <a:rPr lang="en-US" sz="1800" b="1" spc="200" kern="0" dirty="0">
                 <a:solidFill>
                   <a:srgbClr val="8A3A12"/>
                 </a:solidFill>
@@ -18097,7 +18145,7 @@
               </a:rPr>
               <a:t>WARNING</a:t>
             </a:r>
-            <a:endParaRPr lang="en-US" sz="1000" dirty="0"/>
+            <a:endParaRPr lang="en-US" sz="1800" dirty="0"/>
           </a:p>
         </p:txBody>
       </p:sp>
@@ -18109,24 +18157,24 @@
         </p:nvSpPr>
         <p:spPr>
           <a:xfrm>
-            <a:off x="868680" y="2404872"/>
-            <a:ext cx="10454335" cy="1143000"/>
-          </a:xfrm>
-          <a:prstGeom prst="rect">
-            <a:avLst/>
-          </a:prstGeom>
-          <a:noFill/>
-          <a:ln/>
-        </p:spPr>
-        <p:txBody>
-          <a:bodyPr wrap="square" lIns="0" tIns="0" rIns="0" bIns="0" rtlCol="0" anchor="t"/>
+            <a:off x="868680" y="2795960"/>
+            <a:ext cx="10454335" cy="2500000"/>
+          </a:xfrm>
+          <a:prstGeom prst="rect">
+            <a:avLst/>
+          </a:prstGeom>
+          <a:noFill/>
+          <a:ln/>
+        </p:spPr>
+        <p:txBody>
+          <a:bodyPr wrap="square" lIns="0" tIns="0" rIns="0" bIns="0" rtlCol="0" anchor="ctr"/>
           <a:lstStyle/>
           <a:p>
             <a:pPr indent="0" marL="0">
               <a:buNone/>
             </a:pPr>
             <a:r>
-              <a:rPr lang="en-US" sz="1250" dirty="0">
+              <a:rPr lang="en-US" sz="2800" dirty="0">
                 <a:solidFill>
                   <a:srgbClr val="26262F"/>
                 </a:solidFill>
@@ -18136,7 +18184,7 @@
               </a:rPr>
               <a:t>If you ever see a query built like `...WHERE x = '${value}'` anywhere in your code -- SQL or otherwise -- treat it as a bug to fix immediately, even in a class project. This single habit, more than any other, is responsible for a huge share of real-world data breaches.</a:t>
             </a:r>
-            <a:endParaRPr lang="en-US" sz="1250" dirty="0"/>
+            <a:endParaRPr lang="en-US" sz="2800" dirty="0"/>
           </a:p>
         </p:txBody>
       </p:sp>
